--- a/docs/talks/SVC_on_Android_Debugged_RTC_ON_2026.pptx
+++ b/docs/talks/SVC_on_Android_Debugged_RTC_ON_2026.pptx
@@ -26,9 +26,11 @@
     <p:sldId id="274" r:id="rId20"/>
     <p:sldId id="275" r:id="rId21"/>
     <p:sldId id="276" r:id="rId22"/>
+    <p:sldId id="277" r:id="rId23"/>
+    <p:sldId id="278" r:id="rId24"/>
   </p:sldIdLst>
   <p:notesMasterIdLst>
-    <p:notesMasterId r:id="rId23"/>
+    <p:notesMasterId r:id="rId25"/>
   </p:notesMasterIdLst>
   <p:sldSz cx="9144000" cy="5143500"/>
   <p:notesSz cx="5143500" cy="9144000"/>
@@ -1690,6 +1692,182 @@
             <a:fld id="{F7021451-1387-4CA6-816F-3879F97B5CBC}" type="slidenum">
               <a:rPr lang="en-US"/>
               <a:t>21</a:t>
+            </a:fld>
+            <a:endParaRPr lang="en-US"/>
+          </a:p>
+        </p:txBody>
+      </p:sp>
+    </p:spTree>
+    <p:extLst>
+      <p:ext uri="{BB962C8B-B14F-4D97-AF65-F5344CB8AC3E}">
+        <p14:creationId xmlns:p14="http://schemas.microsoft.com/office/powerpoint/2010/main" val="1024086991"/>
+      </p:ext>
+    </p:extLst>
+  </p:cSld>
+  <p:clrMapOvr>
+    <a:masterClrMapping/>
+  </p:clrMapOvr>
+</p:notes>
+</file>
+
+<file path=ppt/notesSlides/notesSlide22.xml><?xml version="1.0" encoding="utf-8"?>
+<p:notes xmlns:a="http://schemas.openxmlformats.org/drawingml/2006/main" xmlns:r="http://schemas.openxmlformats.org/officeDocument/2006/relationships" xmlns:p="http://schemas.openxmlformats.org/presentationml/2006/main">
+  <p:cSld>
+    <p:spTree>
+      <p:nvGrpSpPr>
+        <p:cNvPr id="1" name=""/>
+        <p:cNvGrpSpPr/>
+        <p:nvPr/>
+      </p:nvGrpSpPr>
+      <p:grpSpPr>
+        <a:xfrm>
+          <a:off x="0" y="0"/>
+          <a:ext cx="0" cy="0"/>
+          <a:chOff x="0" y="0"/>
+          <a:chExt cx="0" cy="0"/>
+        </a:xfrm>
+      </p:grpSpPr>
+      <p:sp>
+        <p:nvSpPr>
+          <p:cNvPr id="2" name="Slide Image Placeholder 1"/>
+          <p:cNvSpPr>
+            <a:spLocks noGrp="1" noRot="1" noChangeAspect="1"/>
+          </p:cNvSpPr>
+          <p:nvPr>
+            <p:ph type="sldImg"/>
+          </p:nvPr>
+        </p:nvSpPr>
+        <p:spPr/>
+      </p:sp>
+      <p:sp>
+        <p:nvSpPr>
+          <p:cNvPr id="3" name="Notes Placeholder 2"/>
+          <p:cNvSpPr>
+            <a:spLocks noGrp="1"/>
+          </p:cNvSpPr>
+          <p:nvPr>
+            <p:ph type="body" idx="1"/>
+          </p:nvPr>
+        </p:nvSpPr>
+        <p:spPr/>
+        <p:txBody>
+          <a:bodyPr/>
+          <a:lstStyle/>
+          <a:p>
+            <a:r>
+              <a:rPr lang="en-US" dirty="0"/>
+              <a:t/>
+            </a:r>
+            <a:endParaRPr lang="en-US" dirty="0"/>
+          </a:p>
+        </p:txBody>
+      </p:sp>
+      <p:sp>
+        <p:nvSpPr>
+          <p:cNvPr id="4" name="Slide Number Placeholder 3"/>
+          <p:cNvSpPr>
+            <a:spLocks noGrp="1"/>
+          </p:cNvSpPr>
+          <p:nvPr>
+            <p:ph type="sldNum" sz="quarter" idx="10"/>
+          </p:nvPr>
+        </p:nvSpPr>
+        <p:spPr/>
+        <p:txBody>
+          <a:bodyPr/>
+          <a:lstStyle/>
+          <a:p>
+            <a:fld id="{F7021451-1387-4CA6-816F-3879F97B5CBC}" type="slidenum">
+              <a:rPr lang="en-US"/>
+              <a:t>22</a:t>
+            </a:fld>
+            <a:endParaRPr lang="en-US"/>
+          </a:p>
+        </p:txBody>
+      </p:sp>
+    </p:spTree>
+    <p:extLst>
+      <p:ext uri="{BB962C8B-B14F-4D97-AF65-F5344CB8AC3E}">
+        <p14:creationId xmlns:p14="http://schemas.microsoft.com/office/powerpoint/2010/main" val="1024086991"/>
+      </p:ext>
+    </p:extLst>
+  </p:cSld>
+  <p:clrMapOvr>
+    <a:masterClrMapping/>
+  </p:clrMapOvr>
+</p:notes>
+</file>
+
+<file path=ppt/notesSlides/notesSlide23.xml><?xml version="1.0" encoding="utf-8"?>
+<p:notes xmlns:a="http://schemas.openxmlformats.org/drawingml/2006/main" xmlns:r="http://schemas.openxmlformats.org/officeDocument/2006/relationships" xmlns:p="http://schemas.openxmlformats.org/presentationml/2006/main">
+  <p:cSld>
+    <p:spTree>
+      <p:nvGrpSpPr>
+        <p:cNvPr id="1" name=""/>
+        <p:cNvGrpSpPr/>
+        <p:nvPr/>
+      </p:nvGrpSpPr>
+      <p:grpSpPr>
+        <a:xfrm>
+          <a:off x="0" y="0"/>
+          <a:ext cx="0" cy="0"/>
+          <a:chOff x="0" y="0"/>
+          <a:chExt cx="0" cy="0"/>
+        </a:xfrm>
+      </p:grpSpPr>
+      <p:sp>
+        <p:nvSpPr>
+          <p:cNvPr id="2" name="Slide Image Placeholder 1"/>
+          <p:cNvSpPr>
+            <a:spLocks noGrp="1" noRot="1" noChangeAspect="1"/>
+          </p:cNvSpPr>
+          <p:nvPr>
+            <p:ph type="sldImg"/>
+          </p:nvPr>
+        </p:nvSpPr>
+        <p:spPr/>
+      </p:sp>
+      <p:sp>
+        <p:nvSpPr>
+          <p:cNvPr id="3" name="Notes Placeholder 2"/>
+          <p:cNvSpPr>
+            <a:spLocks noGrp="1"/>
+          </p:cNvSpPr>
+          <p:nvPr>
+            <p:ph type="body" idx="1"/>
+          </p:nvPr>
+        </p:nvSpPr>
+        <p:spPr/>
+        <p:txBody>
+          <a:bodyPr/>
+          <a:lstStyle/>
+          <a:p>
+            <a:r>
+              <a:rPr lang="en-US" dirty="0"/>
+              <a:t/>
+            </a:r>
+            <a:endParaRPr lang="en-US" dirty="0"/>
+          </a:p>
+        </p:txBody>
+      </p:sp>
+      <p:sp>
+        <p:nvSpPr>
+          <p:cNvPr id="4" name="Slide Number Placeholder 3"/>
+          <p:cNvSpPr>
+            <a:spLocks noGrp="1"/>
+          </p:cNvSpPr>
+          <p:nvPr>
+            <p:ph type="sldNum" sz="quarter" idx="10"/>
+          </p:nvPr>
+        </p:nvSpPr>
+        <p:spPr/>
+        <p:txBody>
+          <a:bodyPr/>
+          <a:lstStyle/>
+          <a:p>
+            <a:fld id="{F7021451-1387-4CA6-816F-3879F97B5CBC}" type="slidenum">
+              <a:rPr lang="en-US"/>
+              <a:t>23</a:t>
             </a:fld>
             <a:endParaRPr lang="en-US"/>
           </a:p>
@@ -3851,13 +4029,52 @@
       </p:sp>
       <p:sp>
         <p:nvSpPr>
-          <p:cNvPr id="7" name="Shape 4"/>
-          <p:cNvSpPr/>
-          <p:nvPr/>
-        </p:nvSpPr>
-        <p:spPr>
-          <a:xfrm>
-            <a:off x="365760" y="1938528"/>
+          <p:cNvPr id="7" name="Text 4"/>
+          <p:cNvSpPr/>
+          <p:nvPr/>
+        </p:nvSpPr>
+        <p:spPr>
+          <a:xfrm>
+            <a:off x="411480" y="1874520"/>
+            <a:ext cx="8321040" cy="292608"/>
+          </a:xfrm>
+          <a:prstGeom prst="rect">
+            <a:avLst/>
+          </a:prstGeom>
+          <a:noFill/>
+          <a:ln/>
+        </p:spPr>
+        <p:txBody>
+          <a:bodyPr wrap="square" lIns="0" tIns="0" rIns="0" bIns="0" rtlCol="0" anchor="ctr"/>
+          <a:lstStyle/>
+          <a:p>
+            <a:pPr indent="0" marL="0">
+              <a:buNone/>
+            </a:pPr>
+            <a:r>
+              <a:rPr lang="en-US" sz="1300" dirty="0">
+                <a:solidFill>
+                  <a:srgbClr val="A8C7FA"/>
+                </a:solidFill>
+                <a:latin typeface="Geist" pitchFamily="34" charset="0"/>
+                <a:ea typeface="Geist" pitchFamily="34" charset="-122"/>
+                <a:cs typeface="Geist" pitchFamily="34" charset="-120"/>
+              </a:rPr>
+              <a:t>QualityScaler flips resolution. Hardware VP9 cannot scale in-place — each flip tears the encoder down twice.</a:t>
+            </a:r>
+            <a:endParaRPr lang="en-US" sz="1300" dirty="0"/>
+          </a:p>
+        </p:txBody>
+      </p:sp>
+      <p:sp>
+        <p:nvSpPr>
+          <p:cNvPr id="8" name="Shape 5"/>
+          <p:cNvSpPr/>
+          <p:nvPr/>
+        </p:nvSpPr>
+        <p:spPr>
+          <a:xfrm>
+            <a:off x="365760" y="2267712"/>
             <a:ext cx="1965960" cy="1371600"/>
           </a:xfrm>
           <a:prstGeom prst="rect">
@@ -3876,13 +4093,13 @@
       </p:sp>
       <p:sp>
         <p:nvSpPr>
-          <p:cNvPr id="8" name="Shape 5"/>
-          <p:cNvSpPr/>
-          <p:nvPr/>
-        </p:nvSpPr>
-        <p:spPr>
-          <a:xfrm>
-            <a:off x="365760" y="1938528"/>
+          <p:cNvPr id="9" name="Shape 6"/>
+          <p:cNvSpPr/>
+          <p:nvPr/>
+        </p:nvSpPr>
+        <p:spPr>
+          <a:xfrm>
+            <a:off x="365760" y="2267712"/>
             <a:ext cx="1965960" cy="73152"/>
           </a:xfrm>
           <a:prstGeom prst="rect">
@@ -3901,13 +4118,13 @@
       </p:sp>
       <p:sp>
         <p:nvSpPr>
-          <p:cNvPr id="9" name="Text 6"/>
-          <p:cNvSpPr/>
-          <p:nvPr/>
-        </p:nvSpPr>
-        <p:spPr>
-          <a:xfrm>
-            <a:off x="457200" y="2066544"/>
+          <p:cNvPr id="10" name="Text 7"/>
+          <p:cNvSpPr/>
+          <p:nvPr/>
+        </p:nvSpPr>
+        <p:spPr>
+          <a:xfrm>
+            <a:off x="457200" y="2395728"/>
             <a:ext cx="1783080" cy="201168"/>
           </a:xfrm>
           <a:prstGeom prst="rect">
@@ -3940,13 +4157,13 @@
       </p:sp>
       <p:sp>
         <p:nvSpPr>
-          <p:cNvPr id="10" name="Text 7"/>
-          <p:cNvSpPr/>
-          <p:nvPr/>
-        </p:nvSpPr>
-        <p:spPr>
-          <a:xfrm>
-            <a:off x="457200" y="2267712"/>
+          <p:cNvPr id="11" name="Text 8"/>
+          <p:cNvSpPr/>
+          <p:nvPr/>
+        </p:nvSpPr>
+        <p:spPr>
+          <a:xfrm>
+            <a:off x="457200" y="2596896"/>
             <a:ext cx="1783080" cy="182880"/>
           </a:xfrm>
           <a:prstGeom prst="rect">
@@ -3979,13 +4196,13 @@
       </p:sp>
       <p:sp>
         <p:nvSpPr>
-          <p:cNvPr id="11" name="Text 8"/>
-          <p:cNvSpPr/>
-          <p:nvPr/>
-        </p:nvSpPr>
-        <p:spPr>
-          <a:xfrm>
-            <a:off x="457200" y="2468880"/>
+          <p:cNvPr id="12" name="Text 9"/>
+          <p:cNvSpPr/>
+          <p:nvPr/>
+        </p:nvSpPr>
+        <p:spPr>
+          <a:xfrm>
+            <a:off x="457200" y="2798064"/>
             <a:ext cx="1783080" cy="384048"/>
           </a:xfrm>
           <a:prstGeom prst="rect">
@@ -4018,13 +4235,13 @@
       </p:sp>
       <p:sp>
         <p:nvSpPr>
-          <p:cNvPr id="12" name="Text 9"/>
-          <p:cNvSpPr/>
-          <p:nvPr/>
-        </p:nvSpPr>
-        <p:spPr>
-          <a:xfrm>
-            <a:off x="457200" y="2871216"/>
+          <p:cNvPr id="13" name="Text 10"/>
+          <p:cNvSpPr/>
+          <p:nvPr/>
+        </p:nvSpPr>
+        <p:spPr>
+          <a:xfrm>
+            <a:off x="457200" y="3200400"/>
             <a:ext cx="1783080" cy="274320"/>
           </a:xfrm>
           <a:prstGeom prst="rect">
@@ -4057,13 +4274,13 @@
       </p:sp>
       <p:sp>
         <p:nvSpPr>
-          <p:cNvPr id="13" name="Text 10"/>
-          <p:cNvSpPr/>
-          <p:nvPr/>
-        </p:nvSpPr>
-        <p:spPr>
-          <a:xfrm>
-            <a:off x="2267712" y="2423160"/>
+          <p:cNvPr id="14" name="Text 11"/>
+          <p:cNvSpPr/>
+          <p:nvPr/>
+        </p:nvSpPr>
+        <p:spPr>
+          <a:xfrm>
+            <a:off x="2267712" y="2752344"/>
             <a:ext cx="347472" cy="365760"/>
           </a:xfrm>
           <a:prstGeom prst="rect">
@@ -4096,13 +4313,13 @@
       </p:sp>
       <p:sp>
         <p:nvSpPr>
-          <p:cNvPr id="14" name="Shape 11"/>
-          <p:cNvSpPr/>
-          <p:nvPr/>
-        </p:nvSpPr>
-        <p:spPr>
-          <a:xfrm>
-            <a:off x="2560320" y="1938528"/>
+          <p:cNvPr id="15" name="Shape 12"/>
+          <p:cNvSpPr/>
+          <p:nvPr/>
+        </p:nvSpPr>
+        <p:spPr>
+          <a:xfrm>
+            <a:off x="2560320" y="2267712"/>
             <a:ext cx="1965960" cy="1371600"/>
           </a:xfrm>
           <a:prstGeom prst="rect">
@@ -4121,13 +4338,13 @@
       </p:sp>
       <p:sp>
         <p:nvSpPr>
-          <p:cNvPr id="15" name="Shape 12"/>
-          <p:cNvSpPr/>
-          <p:nvPr/>
-        </p:nvSpPr>
-        <p:spPr>
-          <a:xfrm>
-            <a:off x="2560320" y="1938528"/>
+          <p:cNvPr id="16" name="Shape 13"/>
+          <p:cNvSpPr/>
+          <p:nvPr/>
+        </p:nvSpPr>
+        <p:spPr>
+          <a:xfrm>
+            <a:off x="2560320" y="2267712"/>
             <a:ext cx="1965960" cy="73152"/>
           </a:xfrm>
           <a:prstGeom prst="rect">
@@ -4146,13 +4363,13 @@
       </p:sp>
       <p:sp>
         <p:nvSpPr>
-          <p:cNvPr id="16" name="Text 13"/>
-          <p:cNvSpPr/>
-          <p:nvPr/>
-        </p:nvSpPr>
-        <p:spPr>
-          <a:xfrm>
-            <a:off x="2651760" y="2066544"/>
+          <p:cNvPr id="17" name="Text 14"/>
+          <p:cNvSpPr/>
+          <p:nvPr/>
+        </p:nvSpPr>
+        <p:spPr>
+          <a:xfrm>
+            <a:off x="2651760" y="2395728"/>
             <a:ext cx="1783080" cy="201168"/>
           </a:xfrm>
           <a:prstGeom prst="rect">
@@ -4185,13 +4402,13 @@
       </p:sp>
       <p:sp>
         <p:nvSpPr>
-          <p:cNvPr id="17" name="Text 14"/>
-          <p:cNvSpPr/>
-          <p:nvPr/>
-        </p:nvSpPr>
-        <p:spPr>
-          <a:xfrm>
-            <a:off x="2651760" y="2267712"/>
+          <p:cNvPr id="18" name="Text 15"/>
+          <p:cNvSpPr/>
+          <p:nvPr/>
+        </p:nvSpPr>
+        <p:spPr>
+          <a:xfrm>
+            <a:off x="2651760" y="2596896"/>
             <a:ext cx="1783080" cy="182880"/>
           </a:xfrm>
           <a:prstGeom prst="rect">
@@ -4224,13 +4441,13 @@
       </p:sp>
       <p:sp>
         <p:nvSpPr>
-          <p:cNvPr id="18" name="Text 15"/>
-          <p:cNvSpPr/>
-          <p:nvPr/>
-        </p:nvSpPr>
-        <p:spPr>
-          <a:xfrm>
-            <a:off x="2651760" y="2468880"/>
+          <p:cNvPr id="19" name="Text 16"/>
+          <p:cNvSpPr/>
+          <p:nvPr/>
+        </p:nvSpPr>
+        <p:spPr>
+          <a:xfrm>
+            <a:off x="2651760" y="2798064"/>
             <a:ext cx="1783080" cy="384048"/>
           </a:xfrm>
           <a:prstGeom prst="rect">
@@ -4263,13 +4480,13 @@
       </p:sp>
       <p:sp>
         <p:nvSpPr>
-          <p:cNvPr id="19" name="Text 16"/>
-          <p:cNvSpPr/>
-          <p:nvPr/>
-        </p:nvSpPr>
-        <p:spPr>
-          <a:xfrm>
-            <a:off x="2651760" y="2871216"/>
+          <p:cNvPr id="20" name="Text 17"/>
+          <p:cNvSpPr/>
+          <p:nvPr/>
+        </p:nvSpPr>
+        <p:spPr>
+          <a:xfrm>
+            <a:off x="2651760" y="3200400"/>
             <a:ext cx="1783080" cy="274320"/>
           </a:xfrm>
           <a:prstGeom prst="rect">
@@ -4302,13 +4519,13 @@
       </p:sp>
       <p:sp>
         <p:nvSpPr>
-          <p:cNvPr id="20" name="Text 17"/>
-          <p:cNvSpPr/>
-          <p:nvPr/>
-        </p:nvSpPr>
-        <p:spPr>
-          <a:xfrm>
-            <a:off x="4462272" y="2423160"/>
+          <p:cNvPr id="21" name="Text 18"/>
+          <p:cNvSpPr/>
+          <p:nvPr/>
+        </p:nvSpPr>
+        <p:spPr>
+          <a:xfrm>
+            <a:off x="4462272" y="2752344"/>
             <a:ext cx="347472" cy="365760"/>
           </a:xfrm>
           <a:prstGeom prst="rect">
@@ -4341,13 +4558,13 @@
       </p:sp>
       <p:sp>
         <p:nvSpPr>
-          <p:cNvPr id="21" name="Shape 18"/>
-          <p:cNvSpPr/>
-          <p:nvPr/>
-        </p:nvSpPr>
-        <p:spPr>
-          <a:xfrm>
-            <a:off x="4754880" y="1938528"/>
+          <p:cNvPr id="22" name="Shape 19"/>
+          <p:cNvSpPr/>
+          <p:nvPr/>
+        </p:nvSpPr>
+        <p:spPr>
+          <a:xfrm>
+            <a:off x="4754880" y="2267712"/>
             <a:ext cx="1965960" cy="1371600"/>
           </a:xfrm>
           <a:prstGeom prst="rect">
@@ -4366,13 +4583,13 @@
       </p:sp>
       <p:sp>
         <p:nvSpPr>
-          <p:cNvPr id="22" name="Shape 19"/>
-          <p:cNvSpPr/>
-          <p:nvPr/>
-        </p:nvSpPr>
-        <p:spPr>
-          <a:xfrm>
-            <a:off x="4754880" y="1938528"/>
+          <p:cNvPr id="23" name="Shape 20"/>
+          <p:cNvSpPr/>
+          <p:nvPr/>
+        </p:nvSpPr>
+        <p:spPr>
+          <a:xfrm>
+            <a:off x="4754880" y="2267712"/>
             <a:ext cx="1965960" cy="73152"/>
           </a:xfrm>
           <a:prstGeom prst="rect">
@@ -4391,13 +4608,13 @@
       </p:sp>
       <p:sp>
         <p:nvSpPr>
-          <p:cNvPr id="23" name="Text 20"/>
-          <p:cNvSpPr/>
-          <p:nvPr/>
-        </p:nvSpPr>
-        <p:spPr>
-          <a:xfrm>
-            <a:off x="4846320" y="2066544"/>
+          <p:cNvPr id="24" name="Text 21"/>
+          <p:cNvSpPr/>
+          <p:nvPr/>
+        </p:nvSpPr>
+        <p:spPr>
+          <a:xfrm>
+            <a:off x="4846320" y="2395728"/>
             <a:ext cx="1783080" cy="201168"/>
           </a:xfrm>
           <a:prstGeom prst="rect">
@@ -4430,13 +4647,13 @@
       </p:sp>
       <p:sp>
         <p:nvSpPr>
-          <p:cNvPr id="24" name="Text 21"/>
-          <p:cNvSpPr/>
-          <p:nvPr/>
-        </p:nvSpPr>
-        <p:spPr>
-          <a:xfrm>
-            <a:off x="4846320" y="2267712"/>
+          <p:cNvPr id="25" name="Text 22"/>
+          <p:cNvSpPr/>
+          <p:nvPr/>
+        </p:nvSpPr>
+        <p:spPr>
+          <a:xfrm>
+            <a:off x="4846320" y="2596896"/>
             <a:ext cx="1783080" cy="182880"/>
           </a:xfrm>
           <a:prstGeom prst="rect">
@@ -4469,13 +4686,13 @@
       </p:sp>
       <p:sp>
         <p:nvSpPr>
-          <p:cNvPr id="25" name="Text 22"/>
-          <p:cNvSpPr/>
-          <p:nvPr/>
-        </p:nvSpPr>
-        <p:spPr>
-          <a:xfrm>
-            <a:off x="4846320" y="2468880"/>
+          <p:cNvPr id="26" name="Text 23"/>
+          <p:cNvSpPr/>
+          <p:nvPr/>
+        </p:nvSpPr>
+        <p:spPr>
+          <a:xfrm>
+            <a:off x="4846320" y="2798064"/>
             <a:ext cx="1783080" cy="384048"/>
           </a:xfrm>
           <a:prstGeom prst="rect">
@@ -4508,13 +4725,13 @@
       </p:sp>
       <p:sp>
         <p:nvSpPr>
-          <p:cNvPr id="26" name="Text 23"/>
-          <p:cNvSpPr/>
-          <p:nvPr/>
-        </p:nvSpPr>
-        <p:spPr>
-          <a:xfrm>
-            <a:off x="4846320" y="2871216"/>
+          <p:cNvPr id="27" name="Text 24"/>
+          <p:cNvSpPr/>
+          <p:nvPr/>
+        </p:nvSpPr>
+        <p:spPr>
+          <a:xfrm>
+            <a:off x="4846320" y="3200400"/>
             <a:ext cx="1783080" cy="274320"/>
           </a:xfrm>
           <a:prstGeom prst="rect">
@@ -4547,13 +4764,13 @@
       </p:sp>
       <p:sp>
         <p:nvSpPr>
-          <p:cNvPr id="27" name="Text 24"/>
-          <p:cNvSpPr/>
-          <p:nvPr/>
-        </p:nvSpPr>
-        <p:spPr>
-          <a:xfrm>
-            <a:off x="6656832" y="2423160"/>
+          <p:cNvPr id="28" name="Text 25"/>
+          <p:cNvSpPr/>
+          <p:nvPr/>
+        </p:nvSpPr>
+        <p:spPr>
+          <a:xfrm>
+            <a:off x="6656832" y="2752344"/>
             <a:ext cx="347472" cy="365760"/>
           </a:xfrm>
           <a:prstGeom prst="rect">
@@ -4586,13 +4803,13 @@
       </p:sp>
       <p:sp>
         <p:nvSpPr>
-          <p:cNvPr id="28" name="Shape 25"/>
-          <p:cNvSpPr/>
-          <p:nvPr/>
-        </p:nvSpPr>
-        <p:spPr>
-          <a:xfrm>
-            <a:off x="6949440" y="1938528"/>
+          <p:cNvPr id="29" name="Shape 26"/>
+          <p:cNvSpPr/>
+          <p:nvPr/>
+        </p:nvSpPr>
+        <p:spPr>
+          <a:xfrm>
+            <a:off x="6949440" y="2267712"/>
             <a:ext cx="1965960" cy="1371600"/>
           </a:xfrm>
           <a:prstGeom prst="rect">
@@ -4611,13 +4828,13 @@
       </p:sp>
       <p:sp>
         <p:nvSpPr>
-          <p:cNvPr id="29" name="Shape 26"/>
-          <p:cNvSpPr/>
-          <p:nvPr/>
-        </p:nvSpPr>
-        <p:spPr>
-          <a:xfrm>
-            <a:off x="6949440" y="1938528"/>
+          <p:cNvPr id="30" name="Shape 27"/>
+          <p:cNvSpPr/>
+          <p:nvPr/>
+        </p:nvSpPr>
+        <p:spPr>
+          <a:xfrm>
+            <a:off x="6949440" y="2267712"/>
             <a:ext cx="1965960" cy="73152"/>
           </a:xfrm>
           <a:prstGeom prst="rect">
@@ -4636,13 +4853,13 @@
       </p:sp>
       <p:sp>
         <p:nvSpPr>
-          <p:cNvPr id="30" name="Text 27"/>
-          <p:cNvSpPr/>
-          <p:nvPr/>
-        </p:nvSpPr>
-        <p:spPr>
-          <a:xfrm>
-            <a:off x="7040880" y="2066544"/>
+          <p:cNvPr id="31" name="Text 28"/>
+          <p:cNvSpPr/>
+          <p:nvPr/>
+        </p:nvSpPr>
+        <p:spPr>
+          <a:xfrm>
+            <a:off x="7040880" y="2395728"/>
             <a:ext cx="1783080" cy="201168"/>
           </a:xfrm>
           <a:prstGeom prst="rect">
@@ -4675,13 +4892,13 @@
       </p:sp>
       <p:sp>
         <p:nvSpPr>
-          <p:cNvPr id="31" name="Text 28"/>
-          <p:cNvSpPr/>
-          <p:nvPr/>
-        </p:nvSpPr>
-        <p:spPr>
-          <a:xfrm>
-            <a:off x="7040880" y="2267712"/>
+          <p:cNvPr id="32" name="Text 29"/>
+          <p:cNvSpPr/>
+          <p:nvPr/>
+        </p:nvSpPr>
+        <p:spPr>
+          <a:xfrm>
+            <a:off x="7040880" y="2596896"/>
             <a:ext cx="1783080" cy="182880"/>
           </a:xfrm>
           <a:prstGeom prst="rect">
@@ -4714,13 +4931,13 @@
       </p:sp>
       <p:sp>
         <p:nvSpPr>
-          <p:cNvPr id="32" name="Text 29"/>
-          <p:cNvSpPr/>
-          <p:nvPr/>
-        </p:nvSpPr>
-        <p:spPr>
-          <a:xfrm>
-            <a:off x="7040880" y="2468880"/>
+          <p:cNvPr id="33" name="Text 30"/>
+          <p:cNvSpPr/>
+          <p:nvPr/>
+        </p:nvSpPr>
+        <p:spPr>
+          <a:xfrm>
+            <a:off x="7040880" y="2798064"/>
             <a:ext cx="1783080" cy="384048"/>
           </a:xfrm>
           <a:prstGeom prst="rect">
@@ -4753,13 +4970,13 @@
       </p:sp>
       <p:sp>
         <p:nvSpPr>
-          <p:cNvPr id="33" name="Text 30"/>
-          <p:cNvSpPr/>
-          <p:nvPr/>
-        </p:nvSpPr>
-        <p:spPr>
-          <a:xfrm>
-            <a:off x="7040880" y="2871216"/>
+          <p:cNvPr id="34" name="Text 31"/>
+          <p:cNvSpPr/>
+          <p:nvPr/>
+        </p:nvSpPr>
+        <p:spPr>
+          <a:xfrm>
+            <a:off x="7040880" y="3200400"/>
             <a:ext cx="1783080" cy="274320"/>
           </a:xfrm>
           <a:prstGeom prst="rect">
@@ -4792,13 +5009,13 @@
       </p:sp>
       <p:sp>
         <p:nvSpPr>
-          <p:cNvPr id="34" name="Shape 31"/>
-          <p:cNvSpPr/>
-          <p:nvPr/>
-        </p:nvSpPr>
-        <p:spPr>
-          <a:xfrm>
-            <a:off x="1298448" y="3456432"/>
+          <p:cNvPr id="35" name="Shape 32"/>
+          <p:cNvSpPr/>
+          <p:nvPr/>
+        </p:nvSpPr>
+        <p:spPr>
+          <a:xfrm>
+            <a:off x="1298448" y="3785616"/>
             <a:ext cx="27432" cy="201168"/>
           </a:xfrm>
           <a:prstGeom prst="rect">
@@ -4817,13 +5034,13 @@
       </p:sp>
       <p:sp>
         <p:nvSpPr>
-          <p:cNvPr id="35" name="Shape 32"/>
-          <p:cNvSpPr/>
-          <p:nvPr/>
-        </p:nvSpPr>
-        <p:spPr>
-          <a:xfrm>
-            <a:off x="7882128" y="3310128"/>
+          <p:cNvPr id="36" name="Shape 33"/>
+          <p:cNvSpPr/>
+          <p:nvPr/>
+        </p:nvSpPr>
+        <p:spPr>
+          <a:xfrm>
+            <a:off x="7882128" y="3639312"/>
             <a:ext cx="27432" cy="347472"/>
           </a:xfrm>
           <a:prstGeom prst="rect">
@@ -4842,13 +5059,13 @@
       </p:sp>
       <p:sp>
         <p:nvSpPr>
-          <p:cNvPr id="36" name="Shape 33"/>
-          <p:cNvSpPr/>
-          <p:nvPr/>
-        </p:nvSpPr>
-        <p:spPr>
-          <a:xfrm>
-            <a:off x="1298448" y="3639312"/>
+          <p:cNvPr id="37" name="Shape 34"/>
+          <p:cNvSpPr/>
+          <p:nvPr/>
+        </p:nvSpPr>
+        <p:spPr>
+          <a:xfrm>
+            <a:off x="1298448" y="3968496"/>
             <a:ext cx="6611112" cy="27432"/>
           </a:xfrm>
           <a:prstGeom prst="rect">
@@ -4867,13 +5084,13 @@
       </p:sp>
       <p:sp>
         <p:nvSpPr>
-          <p:cNvPr id="37" name="Text 34"/>
-          <p:cNvSpPr/>
-          <p:nvPr/>
-        </p:nvSpPr>
-        <p:spPr>
-          <a:xfrm>
-            <a:off x="1554480" y="3694176"/>
+          <p:cNvPr id="38" name="Text 35"/>
+          <p:cNvSpPr/>
+          <p:nvPr/>
+        </p:nvSpPr>
+        <p:spPr>
+          <a:xfrm>
+            <a:off x="1554480" y="4023360"/>
             <a:ext cx="6126480" cy="237744"/>
           </a:xfrm>
           <a:prstGeom prst="rect">
@@ -4906,14 +5123,14 @@
       </p:sp>
       <p:sp>
         <p:nvSpPr>
-          <p:cNvPr id="38" name="Shape 35"/>
-          <p:cNvSpPr/>
-          <p:nvPr/>
-        </p:nvSpPr>
-        <p:spPr>
-          <a:xfrm>
-            <a:off x="411480" y="4023360"/>
-            <a:ext cx="8321040" cy="822960"/>
+          <p:cNvPr id="39" name="Shape 36"/>
+          <p:cNvSpPr/>
+          <p:nvPr/>
+        </p:nvSpPr>
+        <p:spPr>
+          <a:xfrm>
+            <a:off x="411480" y="4370832"/>
+            <a:ext cx="8321040" cy="475488"/>
           </a:xfrm>
           <a:prstGeom prst="rect">
             <a:avLst/>
@@ -4923,7 +5140,7 @@
           </a:solidFill>
           <a:ln w="12700">
             <a:solidFill>
-              <a:srgbClr val="005FFF"/>
+              <a:srgbClr val="1A3D7A"/>
             </a:solidFill>
             <a:prstDash val="solid"/>
           </a:ln>
@@ -4931,14 +5148,14 @@
       </p:sp>
       <p:sp>
         <p:nvSpPr>
-          <p:cNvPr id="39" name="Text 36"/>
-          <p:cNvSpPr/>
-          <p:nvPr/>
-        </p:nvSpPr>
-        <p:spPr>
-          <a:xfrm>
-            <a:off x="594360" y="4023360"/>
-            <a:ext cx="7955280" cy="822960"/>
+          <p:cNvPr id="40" name="Text 37"/>
+          <p:cNvSpPr/>
+          <p:nvPr/>
+        </p:nvSpPr>
+        <p:spPr>
+          <a:xfrm>
+            <a:off x="594360" y="4370832"/>
+            <a:ext cx="7955280" cy="475488"/>
           </a:xfrm>
           <a:prstGeom prst="rect">
             <a:avLst/>
@@ -4954,7 +5171,7 @@
               <a:buNone/>
             </a:pPr>
             <a:r>
-              <a:rPr lang="en-US" sz="1350" dirty="0">
+              <a:rPr lang="en-US" sz="1300" dirty="0">
                 <a:solidFill>
                   <a:srgbClr val="FFFFFF"/>
                 </a:solidFill>
@@ -4962,9 +5179,9 @@
                 <a:ea typeface="Geist" pitchFamily="34" charset="-122"/>
                 <a:cs typeface="Geist" pitchFamily="34" charset="-120"/>
               </a:rPr>
-              <a:t>Looked like the bitrate problem. We disabled QualityScaler — the loop stopped. The SFU still marked this stream as poor. So we went deeper.</a:t>
-            </a:r>
-            <a:endParaRPr lang="en-US" sz="1350" dirty="0"/>
+              <a:t>Software VP9 scales in-place. Hardware cannot — so QualityScaler turns a QP adjustment into a full encoder recreate loop.</a:t>
+            </a:r>
+            <a:endParaRPr lang="en-US" sz="1300" dirty="0"/>
           </a:p>
         </p:txBody>
       </p:sp>
@@ -5148,7 +5365,7 @@
                 <a:ea typeface="Geist" pitchFamily="34" charset="-122"/>
                 <a:cs typeface="Geist" pitchFamily="34" charset="-120"/>
               </a:rPr>
-              <a:t>Asked for 3 Layers — Encoder Sent 1</a:t>
+              <a:t>QualityScaler Off Stopped the Loop</a:t>
             </a:r>
             <a:endParaRPr lang="en-US" sz="3400" dirty="0"/>
           </a:p>
@@ -5181,92 +5398,14 @@
       </p:sp>
       <p:sp>
         <p:nvSpPr>
-          <p:cNvPr id="7" name="Text 4"/>
-          <p:cNvSpPr/>
-          <p:nvPr/>
-        </p:nvSpPr>
-        <p:spPr>
-          <a:xfrm>
-            <a:off x="411480" y="1901952"/>
-            <a:ext cx="3840480" cy="201168"/>
-          </a:xfrm>
-          <a:prstGeom prst="rect">
-            <a:avLst/>
-          </a:prstGeom>
-          <a:noFill/>
-          <a:ln/>
-        </p:spPr>
-        <p:txBody>
-          <a:bodyPr wrap="square" lIns="0" tIns="0" rIns="0" bIns="0" rtlCol="0" anchor="ctr"/>
-          <a:lstStyle/>
-          <a:p>
-            <a:pPr indent="0" marL="0">
-              <a:buNone/>
-            </a:pPr>
-            <a:r>
-              <a:rPr lang="en-US" sz="1100" spc="120" kern="0" dirty="0">
-                <a:solidFill>
-                  <a:srgbClr val="22C55E"/>
-                </a:solidFill>
-                <a:latin typeface="Geist" pitchFamily="34" charset="0"/>
-                <a:ea typeface="Geist" pitchFamily="34" charset="-122"/>
-                <a:cs typeface="Geist" pitchFamily="34" charset="-120"/>
-              </a:rPr>
-              <a:t>ASKED FOR</a:t>
-            </a:r>
-            <a:endParaRPr lang="en-US" sz="1100" dirty="0"/>
-          </a:p>
-        </p:txBody>
-      </p:sp>
-      <p:sp>
-        <p:nvSpPr>
-          <p:cNvPr id="8" name="Text 5"/>
-          <p:cNvSpPr/>
-          <p:nvPr/>
-        </p:nvSpPr>
-        <p:spPr>
-          <a:xfrm>
-            <a:off x="411480" y="2084832"/>
-            <a:ext cx="3840480" cy="292608"/>
-          </a:xfrm>
-          <a:prstGeom prst="rect">
-            <a:avLst/>
-          </a:prstGeom>
-          <a:noFill/>
-          <a:ln/>
-        </p:spPr>
-        <p:txBody>
-          <a:bodyPr wrap="square" lIns="0" tIns="0" rIns="0" bIns="0" rtlCol="0" anchor="ctr"/>
-          <a:lstStyle/>
-          <a:p>
-            <a:pPr indent="0" marL="0">
-              <a:buNone/>
-            </a:pPr>
-            <a:r>
-              <a:rPr lang="en-US" sz="1600" dirty="0">
-                <a:solidFill>
-                  <a:srgbClr val="FFFFFF"/>
-                </a:solidFill>
-                <a:latin typeface="Geist" pitchFamily="34" charset="0"/>
-                <a:ea typeface="Geist" pitchFamily="34" charset="-122"/>
-                <a:cs typeface="Geist" pitchFamily="34" charset="-120"/>
-              </a:rPr>
-              <a:t>L3T3_KEY</a:t>
-            </a:r>
-            <a:endParaRPr lang="en-US" sz="1600" dirty="0"/>
-          </a:p>
-        </p:txBody>
-      </p:sp>
-      <p:sp>
-        <p:nvSpPr>
-          <p:cNvPr id="9" name="Shape 6"/>
-          <p:cNvSpPr/>
-          <p:nvPr/>
-        </p:nvSpPr>
-        <p:spPr>
-          <a:xfrm>
-            <a:off x="411480" y="2450592"/>
-            <a:ext cx="3840480" cy="548640"/>
+          <p:cNvPr id="7" name="Shape 4"/>
+          <p:cNvSpPr/>
+          <p:nvPr/>
+        </p:nvSpPr>
+        <p:spPr>
+          <a:xfrm>
+            <a:off x="411480" y="1965960"/>
+            <a:ext cx="4069080" cy="2148840"/>
           </a:xfrm>
           <a:prstGeom prst="rect">
             <a:avLst/>
@@ -5276,7 +5415,7 @@
           </a:solidFill>
           <a:ln w="12700">
             <a:solidFill>
-              <a:srgbClr val="22C55E"/>
+              <a:srgbClr val="1A3D7A"/>
             </a:solidFill>
             <a:prstDash val="solid"/>
           </a:ln>
@@ -5284,27 +5423,132 @@
       </p:sp>
       <p:sp>
         <p:nvSpPr>
+          <p:cNvPr id="8" name="Shape 5"/>
+          <p:cNvSpPr/>
+          <p:nvPr/>
+        </p:nvSpPr>
+        <p:spPr>
+          <a:xfrm>
+            <a:off x="411480" y="1965960"/>
+            <a:ext cx="73152" cy="2148840"/>
+          </a:xfrm>
+          <a:prstGeom prst="rect">
+            <a:avLst/>
+          </a:prstGeom>
+          <a:solidFill>
+            <a:srgbClr val="005FFF"/>
+          </a:solidFill>
+          <a:ln w="12700">
+            <a:solidFill>
+              <a:srgbClr val="005FFF"/>
+            </a:solidFill>
+            <a:prstDash val="solid"/>
+          </a:ln>
+        </p:spPr>
+      </p:sp>
+      <p:sp>
+        <p:nvSpPr>
+          <p:cNvPr id="9" name="Text 6"/>
+          <p:cNvSpPr/>
+          <p:nvPr/>
+        </p:nvSpPr>
+        <p:spPr>
+          <a:xfrm>
+            <a:off x="640080" y="2084832"/>
+            <a:ext cx="3657600" cy="219456"/>
+          </a:xfrm>
+          <a:prstGeom prst="rect">
+            <a:avLst/>
+          </a:prstGeom>
+          <a:noFill/>
+          <a:ln/>
+        </p:spPr>
+        <p:txBody>
+          <a:bodyPr wrap="square" lIns="0" tIns="0" rIns="0" bIns="0" rtlCol="0" anchor="ctr"/>
+          <a:lstStyle/>
+          <a:p>
+            <a:pPr indent="0" marL="0">
+              <a:buNone/>
+            </a:pPr>
+            <a:r>
+              <a:rPr lang="en-US" sz="1100" spc="120" kern="0" dirty="0">
+                <a:solidFill>
+                  <a:srgbClr val="22C55E"/>
+                </a:solidFill>
+                <a:latin typeface="Geist" pitchFamily="34" charset="0"/>
+                <a:ea typeface="Geist" pitchFamily="34" charset="-122"/>
+                <a:cs typeface="Geist" pitchFamily="34" charset="-120"/>
+              </a:rPr>
+              <a:t>WHAT WE DID</a:t>
+            </a:r>
+            <a:endParaRPr lang="en-US" sz="1100" dirty="0"/>
+          </a:p>
+        </p:txBody>
+      </p:sp>
+      <p:sp>
+        <p:nvSpPr>
           <p:cNvPr id="10" name="Text 7"/>
           <p:cNvSpPr/>
           <p:nvPr/>
         </p:nvSpPr>
         <p:spPr>
           <a:xfrm>
-            <a:off x="411480" y="2487168"/>
-            <a:ext cx="3840480" cy="274320"/>
-          </a:xfrm>
-          <a:prstGeom prst="rect">
-            <a:avLst/>
-          </a:prstGeom>
-          <a:noFill/>
-          <a:ln/>
-        </p:spPr>
-        <p:txBody>
-          <a:bodyPr wrap="square" lIns="0" tIns="0" rIns="0" bIns="0" rtlCol="0" anchor="ctr"/>
-          <a:lstStyle/>
-          <a:p>
-            <a:pPr algn="ctr" indent="0" marL="0">
-              <a:buNone/>
+            <a:off x="640080" y="2340864"/>
+            <a:ext cx="3657600" cy="329184"/>
+          </a:xfrm>
+          <a:prstGeom prst="rect">
+            <a:avLst/>
+          </a:prstGeom>
+          <a:noFill/>
+          <a:ln/>
+        </p:spPr>
+        <p:txBody>
+          <a:bodyPr wrap="square" lIns="0" tIns="0" rIns="0" bIns="0" rtlCol="0" anchor="ctr"/>
+          <a:lstStyle/>
+          <a:p>
+            <a:pPr indent="0" marL="0">
+              <a:buNone/>
+            </a:pPr>
+            <a:r>
+              <a:rPr lang="en-US" sz="1800" dirty="0">
+                <a:solidFill>
+                  <a:srgbClr val="FFFFFF"/>
+                </a:solidFill>
+                <a:latin typeface="Geist" pitchFamily="34" charset="0"/>
+                <a:ea typeface="Geist" pitchFamily="34" charset="-122"/>
+                <a:cs typeface="Geist" pitchFamily="34" charset="-120"/>
+              </a:rPr>
+              <a:t>Turned QualityScaler off</a:t>
+            </a:r>
+            <a:endParaRPr lang="en-US" sz="1800" dirty="0"/>
+          </a:p>
+        </p:txBody>
+      </p:sp>
+      <p:sp>
+        <p:nvSpPr>
+          <p:cNvPr id="11" name="Text 8"/>
+          <p:cNvSpPr/>
+          <p:nvPr/>
+        </p:nvSpPr>
+        <p:spPr>
+          <a:xfrm>
+            <a:off x="640080" y="2788920"/>
+            <a:ext cx="3657600" cy="1143000"/>
+          </a:xfrm>
+          <a:prstGeom prst="rect">
+            <a:avLst/>
+          </a:prstGeom>
+          <a:noFill/>
+          <a:ln/>
+        </p:spPr>
+        <p:txBody>
+          <a:bodyPr wrap="square" lIns="0" tIns="0" rIns="0" bIns="0" rtlCol="0" anchor="t"/>
+          <a:lstStyle/>
+          <a:p>
+            <a:pPr>
+              <a:spcAft>
+                <a:spcPts val="600"/>
+              </a:spcAft>
             </a:pPr>
             <a:r>
               <a:rPr lang="en-US" sz="1400" dirty="0">
@@ -5315,48 +5559,47 @@
                 <a:ea typeface="Geist" pitchFamily="34" charset="-122"/>
                 <a:cs typeface="Geist" pitchFamily="34" charset="-120"/>
               </a:rPr>
-              <a:t>S2  ·  720p</a:t>
+              <a:t>degradationPreference disabled the scaler</a:t>
             </a:r>
             <a:endParaRPr lang="en-US" sz="1400" dirty="0"/>
           </a:p>
-        </p:txBody>
-      </p:sp>
-      <p:sp>
-        <p:nvSpPr>
-          <p:cNvPr id="11" name="Text 8"/>
-          <p:cNvSpPr/>
-          <p:nvPr/>
-        </p:nvSpPr>
-        <p:spPr>
-          <a:xfrm>
-            <a:off x="411480" y="2743200"/>
-            <a:ext cx="3840480" cy="201168"/>
-          </a:xfrm>
-          <a:prstGeom prst="rect">
-            <a:avLst/>
-          </a:prstGeom>
-          <a:noFill/>
-          <a:ln/>
-        </p:spPr>
-        <p:txBody>
-          <a:bodyPr wrap="square" lIns="0" tIns="0" rIns="0" bIns="0" rtlCol="0" anchor="ctr"/>
-          <a:lstStyle/>
-          <a:p>
-            <a:pPr algn="ctr" indent="0" marL="0">
-              <a:buNone/>
-            </a:pPr>
-            <a:r>
-              <a:rPr lang="en-US" sz="1100" dirty="0">
-                <a:solidFill>
-                  <a:srgbClr val="A8C7FA"/>
-                </a:solidFill>
-                <a:latin typeface="Geist" pitchFamily="34" charset="0"/>
-                <a:ea typeface="Geist" pitchFamily="34" charset="-122"/>
-                <a:cs typeface="Geist" pitchFamily="34" charset="-120"/>
-              </a:rPr>
-              <a:t>top layer</a:t>
-            </a:r>
-            <a:endParaRPr lang="en-US" sz="1100" dirty="0"/>
+          <a:p>
+            <a:pPr>
+              <a:spcAft>
+                <a:spcPts val="600"/>
+              </a:spcAft>
+            </a:pPr>
+            <a:r>
+              <a:rPr lang="en-US" sz="1400" dirty="0">
+                <a:solidFill>
+                  <a:srgbClr val="FFFFFF"/>
+                </a:solidFill>
+                <a:latin typeface="Geist" pitchFamily="34" charset="0"/>
+                <a:ea typeface="Geist" pitchFamily="34" charset="-122"/>
+                <a:cs typeface="Geist" pitchFamily="34" charset="-120"/>
+              </a:rPr>
+              <a:t>720p ↔ 540p flipping stopped</a:t>
+            </a:r>
+            <a:endParaRPr lang="en-US" sz="1400" dirty="0"/>
+          </a:p>
+          <a:p>
+            <a:pPr>
+              <a:spcAft>
+                <a:spcPts val="600"/>
+              </a:spcAft>
+            </a:pPr>
+            <a:r>
+              <a:rPr lang="en-US" sz="1400" dirty="0">
+                <a:solidFill>
+                  <a:srgbClr val="FFFFFF"/>
+                </a:solidFill>
+                <a:latin typeface="Geist" pitchFamily="34" charset="0"/>
+                <a:ea typeface="Geist" pitchFamily="34" charset="-122"/>
+                <a:cs typeface="Geist" pitchFamily="34" charset="-120"/>
+              </a:rPr>
+              <a:t>Encoder recreate loop stopped</a:t>
+            </a:r>
+            <a:endParaRPr lang="en-US" sz="1400" dirty="0"/>
           </a:p>
         </p:txBody>
       </p:sp>
@@ -5368,8 +5611,8 @@
         </p:nvSpPr>
         <p:spPr>
           <a:xfrm>
-            <a:off x="868680" y="3090672"/>
-            <a:ext cx="2926080" cy="548640"/>
+            <a:off x="4663440" y="1965960"/>
+            <a:ext cx="4069080" cy="2148840"/>
           </a:xfrm>
           <a:prstGeom prst="rect">
             <a:avLst/>
@@ -5379,7 +5622,7 @@
           </a:solidFill>
           <a:ln w="12700">
             <a:solidFill>
-              <a:srgbClr val="22C55E"/>
+              <a:srgbClr val="1A3D7A"/>
             </a:solidFill>
             <a:prstDash val="solid"/>
           </a:ln>
@@ -5387,27 +5630,132 @@
       </p:sp>
       <p:sp>
         <p:nvSpPr>
-          <p:cNvPr id="13" name="Text 10"/>
-          <p:cNvSpPr/>
-          <p:nvPr/>
-        </p:nvSpPr>
-        <p:spPr>
-          <a:xfrm>
-            <a:off x="868680" y="3127248"/>
-            <a:ext cx="2926080" cy="274320"/>
-          </a:xfrm>
-          <a:prstGeom prst="rect">
-            <a:avLst/>
-          </a:prstGeom>
-          <a:noFill/>
-          <a:ln/>
-        </p:spPr>
-        <p:txBody>
-          <a:bodyPr wrap="square" lIns="0" tIns="0" rIns="0" bIns="0" rtlCol="0" anchor="ctr"/>
-          <a:lstStyle/>
-          <a:p>
-            <a:pPr algn="ctr" indent="0" marL="0">
-              <a:buNone/>
+          <p:cNvPr id="13" name="Shape 10"/>
+          <p:cNvSpPr/>
+          <p:nvPr/>
+        </p:nvSpPr>
+        <p:spPr>
+          <a:xfrm>
+            <a:off x="4663440" y="1965960"/>
+            <a:ext cx="73152" cy="2148840"/>
+          </a:xfrm>
+          <a:prstGeom prst="rect">
+            <a:avLst/>
+          </a:prstGeom>
+          <a:solidFill>
+            <a:srgbClr val="005FFF"/>
+          </a:solidFill>
+          <a:ln w="12700">
+            <a:solidFill>
+              <a:srgbClr val="005FFF"/>
+            </a:solidFill>
+            <a:prstDash val="solid"/>
+          </a:ln>
+        </p:spPr>
+      </p:sp>
+      <p:sp>
+        <p:nvSpPr>
+          <p:cNvPr id="14" name="Text 11"/>
+          <p:cNvSpPr/>
+          <p:nvPr/>
+        </p:nvSpPr>
+        <p:spPr>
+          <a:xfrm>
+            <a:off x="4892040" y="2084832"/>
+            <a:ext cx="3657600" cy="219456"/>
+          </a:xfrm>
+          <a:prstGeom prst="rect">
+            <a:avLst/>
+          </a:prstGeom>
+          <a:noFill/>
+          <a:ln/>
+        </p:spPr>
+        <p:txBody>
+          <a:bodyPr wrap="square" lIns="0" tIns="0" rIns="0" bIns="0" rtlCol="0" anchor="ctr"/>
+          <a:lstStyle/>
+          <a:p>
+            <a:pPr indent="0" marL="0">
+              <a:buNone/>
+            </a:pPr>
+            <a:r>
+              <a:rPr lang="en-US" sz="1100" spc="120" kern="0" dirty="0">
+                <a:solidFill>
+                  <a:srgbClr val="EF4444"/>
+                </a:solidFill>
+                <a:latin typeface="Geist" pitchFamily="34" charset="0"/>
+                <a:ea typeface="Geist" pitchFamily="34" charset="-122"/>
+                <a:cs typeface="Geist" pitchFamily="34" charset="-120"/>
+              </a:rPr>
+              <a:t>WHAT WAS LEFT</a:t>
+            </a:r>
+            <a:endParaRPr lang="en-US" sz="1100" dirty="0"/>
+          </a:p>
+        </p:txBody>
+      </p:sp>
+      <p:sp>
+        <p:nvSpPr>
+          <p:cNvPr id="15" name="Text 12"/>
+          <p:cNvSpPr/>
+          <p:nvPr/>
+        </p:nvSpPr>
+        <p:spPr>
+          <a:xfrm>
+            <a:off x="4892040" y="2340864"/>
+            <a:ext cx="3657600" cy="329184"/>
+          </a:xfrm>
+          <a:prstGeom prst="rect">
+            <a:avLst/>
+          </a:prstGeom>
+          <a:noFill/>
+          <a:ln/>
+        </p:spPr>
+        <p:txBody>
+          <a:bodyPr wrap="square" lIns="0" tIns="0" rIns="0" bIns="0" rtlCol="0" anchor="ctr"/>
+          <a:lstStyle/>
+          <a:p>
+            <a:pPr indent="0" marL="0">
+              <a:buNone/>
+            </a:pPr>
+            <a:r>
+              <a:rPr lang="en-US" sz="1800" dirty="0">
+                <a:solidFill>
+                  <a:srgbClr val="FFFFFF"/>
+                </a:solidFill>
+                <a:latin typeface="Geist" pitchFamily="34" charset="0"/>
+                <a:ea typeface="Geist" pitchFamily="34" charset="-122"/>
+                <a:cs typeface="Geist" pitchFamily="34" charset="-120"/>
+              </a:rPr>
+              <a:t>SFU still said poor</a:t>
+            </a:r>
+            <a:endParaRPr lang="en-US" sz="1800" dirty="0"/>
+          </a:p>
+        </p:txBody>
+      </p:sp>
+      <p:sp>
+        <p:nvSpPr>
+          <p:cNvPr id="16" name="Text 13"/>
+          <p:cNvSpPr/>
+          <p:nvPr/>
+        </p:nvSpPr>
+        <p:spPr>
+          <a:xfrm>
+            <a:off x="4892040" y="2788920"/>
+            <a:ext cx="3657600" cy="1143000"/>
+          </a:xfrm>
+          <a:prstGeom prst="rect">
+            <a:avLst/>
+          </a:prstGeom>
+          <a:noFill/>
+          <a:ln/>
+        </p:spPr>
+        <p:txBody>
+          <a:bodyPr wrap="square" lIns="0" tIns="0" rIns="0" bIns="0" rtlCol="0" anchor="t"/>
+          <a:lstStyle/>
+          <a:p>
+            <a:pPr>
+              <a:spcAft>
+                <a:spcPts val="600"/>
+              </a:spcAft>
             </a:pPr>
             <a:r>
               <a:rPr lang="en-US" sz="1400" dirty="0">
@@ -5418,61 +5766,60 @@
                 <a:ea typeface="Geist" pitchFamily="34" charset="-122"/>
                 <a:cs typeface="Geist" pitchFamily="34" charset="-120"/>
               </a:rPr>
-              <a:t>S1  ·  360p</a:t>
+              <a:t>Quality score never recovered</a:t>
             </a:r>
             <a:endParaRPr lang="en-US" sz="1400" dirty="0"/>
           </a:p>
-        </p:txBody>
-      </p:sp>
-      <p:sp>
-        <p:nvSpPr>
-          <p:cNvPr id="14" name="Text 11"/>
-          <p:cNvSpPr/>
-          <p:nvPr/>
-        </p:nvSpPr>
-        <p:spPr>
-          <a:xfrm>
-            <a:off x="868680" y="3383280"/>
-            <a:ext cx="2926080" cy="201168"/>
-          </a:xfrm>
-          <a:prstGeom prst="rect">
-            <a:avLst/>
-          </a:prstGeom>
-          <a:noFill/>
-          <a:ln/>
-        </p:spPr>
-        <p:txBody>
-          <a:bodyPr wrap="square" lIns="0" tIns="0" rIns="0" bIns="0" rtlCol="0" anchor="ctr"/>
-          <a:lstStyle/>
-          <a:p>
-            <a:pPr algn="ctr" indent="0" marL="0">
-              <a:buNone/>
-            </a:pPr>
-            <a:r>
-              <a:rPr lang="en-US" sz="1100" dirty="0">
-                <a:solidFill>
-                  <a:srgbClr val="A8C7FA"/>
-                </a:solidFill>
-                <a:latin typeface="Geist" pitchFamily="34" charset="0"/>
-                <a:ea typeface="Geist" pitchFamily="34" charset="-122"/>
-                <a:cs typeface="Geist" pitchFamily="34" charset="-120"/>
-              </a:rPr>
-              <a:t>mid layer</a:t>
-            </a:r>
-            <a:endParaRPr lang="en-US" sz="1100" dirty="0"/>
-          </a:p>
-        </p:txBody>
-      </p:sp>
-      <p:sp>
-        <p:nvSpPr>
-          <p:cNvPr id="15" name="Shape 12"/>
-          <p:cNvSpPr/>
-          <p:nvPr/>
-        </p:nvSpPr>
-        <p:spPr>
-          <a:xfrm>
-            <a:off x="1325880" y="3730752"/>
-            <a:ext cx="2011680" cy="548640"/>
+          <a:p>
+            <a:pPr>
+              <a:spcAft>
+                <a:spcPts val="600"/>
+              </a:spcAft>
+            </a:pPr>
+            <a:r>
+              <a:rPr lang="en-US" sz="1400" dirty="0">
+                <a:solidFill>
+                  <a:srgbClr val="FFFFFF"/>
+                </a:solidFill>
+                <a:latin typeface="Geist" pitchFamily="34" charset="0"/>
+                <a:ea typeface="Geist" pitchFamily="34" charset="-122"/>
+                <a:cs typeface="Geist" pitchFamily="34" charset="-120"/>
+              </a:rPr>
+              <a:t>Resolution switch was gone</a:t>
+            </a:r>
+            <a:endParaRPr lang="en-US" sz="1400" dirty="0"/>
+          </a:p>
+          <a:p>
+            <a:pPr>
+              <a:spcAft>
+                <a:spcPts val="600"/>
+              </a:spcAft>
+            </a:pPr>
+            <a:r>
+              <a:rPr lang="en-US" sz="1400" dirty="0">
+                <a:solidFill>
+                  <a:srgbClr val="FFFFFF"/>
+                </a:solidFill>
+                <a:latin typeface="Geist" pitchFamily="34" charset="0"/>
+                <a:ea typeface="Geist" pitchFamily="34" charset="-122"/>
+                <a:cs typeface="Geist" pitchFamily="34" charset="-120"/>
+              </a:rPr>
+              <a:t>The stream was still broken</a:t>
+            </a:r>
+            <a:endParaRPr lang="en-US" sz="1400" dirty="0"/>
+          </a:p>
+        </p:txBody>
+      </p:sp>
+      <p:sp>
+        <p:nvSpPr>
+          <p:cNvPr id="17" name="Shape 14"/>
+          <p:cNvSpPr/>
+          <p:nvPr/>
+        </p:nvSpPr>
+        <p:spPr>
+          <a:xfrm>
+            <a:off x="411480" y="4297680"/>
+            <a:ext cx="8321040" cy="548640"/>
           </a:xfrm>
           <a:prstGeom prst="rect">
             <a:avLst/>
@@ -5482,7 +5829,7 @@
           </a:solidFill>
           <a:ln w="12700">
             <a:solidFill>
-              <a:srgbClr val="22C55E"/>
+              <a:srgbClr val="005FFF"/>
             </a:solidFill>
             <a:prstDash val="solid"/>
           </a:ln>
@@ -5490,30 +5837,30 @@
       </p:sp>
       <p:sp>
         <p:nvSpPr>
-          <p:cNvPr id="16" name="Text 13"/>
-          <p:cNvSpPr/>
-          <p:nvPr/>
-        </p:nvSpPr>
-        <p:spPr>
-          <a:xfrm>
-            <a:off x="1325880" y="3767328"/>
-            <a:ext cx="2011680" cy="274320"/>
-          </a:xfrm>
-          <a:prstGeom prst="rect">
-            <a:avLst/>
-          </a:prstGeom>
-          <a:noFill/>
-          <a:ln/>
-        </p:spPr>
-        <p:txBody>
-          <a:bodyPr wrap="square" lIns="0" tIns="0" rIns="0" bIns="0" rtlCol="0" anchor="ctr"/>
-          <a:lstStyle/>
-          <a:p>
-            <a:pPr algn="ctr" indent="0" marL="0">
-              <a:buNone/>
-            </a:pPr>
-            <a:r>
-              <a:rPr lang="en-US" sz="1400" dirty="0">
+          <p:cNvPr id="18" name="Text 15"/>
+          <p:cNvSpPr/>
+          <p:nvPr/>
+        </p:nvSpPr>
+        <p:spPr>
+          <a:xfrm>
+            <a:off x="594360" y="4297680"/>
+            <a:ext cx="7955280" cy="548640"/>
+          </a:xfrm>
+          <a:prstGeom prst="rect">
+            <a:avLst/>
+          </a:prstGeom>
+          <a:noFill/>
+          <a:ln/>
+        </p:spPr>
+        <p:txBody>
+          <a:bodyPr wrap="square" lIns="0" tIns="0" rIns="0" bIns="0" rtlCol="0" anchor="ctr"/>
+          <a:lstStyle/>
+          <a:p>
+            <a:pPr indent="0" marL="0">
+              <a:buNone/>
+            </a:pPr>
+            <a:r>
+              <a:rPr lang="en-US" sz="1500" dirty="0">
                 <a:solidFill>
                   <a:srgbClr val="FFFFFF"/>
                 </a:solidFill>
@@ -5521,346 +5868,9 @@
                 <a:ea typeface="Geist" pitchFamily="34" charset="-122"/>
                 <a:cs typeface="Geist" pitchFamily="34" charset="-120"/>
               </a:rPr>
-              <a:t>S0  ·  180p</a:t>
-            </a:r>
-            <a:endParaRPr lang="en-US" sz="1400" dirty="0"/>
-          </a:p>
-        </p:txBody>
-      </p:sp>
-      <p:sp>
-        <p:nvSpPr>
-          <p:cNvPr id="17" name="Text 14"/>
-          <p:cNvSpPr/>
-          <p:nvPr/>
-        </p:nvSpPr>
-        <p:spPr>
-          <a:xfrm>
-            <a:off x="1325880" y="4023360"/>
-            <a:ext cx="2011680" cy="201168"/>
-          </a:xfrm>
-          <a:prstGeom prst="rect">
-            <a:avLst/>
-          </a:prstGeom>
-          <a:noFill/>
-          <a:ln/>
-        </p:spPr>
-        <p:txBody>
-          <a:bodyPr wrap="square" lIns="0" tIns="0" rIns="0" bIns="0" rtlCol="0" anchor="ctr"/>
-          <a:lstStyle/>
-          <a:p>
-            <a:pPr algn="ctr" indent="0" marL="0">
-              <a:buNone/>
-            </a:pPr>
-            <a:r>
-              <a:rPr lang="en-US" sz="1100" dirty="0">
-                <a:solidFill>
-                  <a:srgbClr val="A8C7FA"/>
-                </a:solidFill>
-                <a:latin typeface="Geist" pitchFamily="34" charset="0"/>
-                <a:ea typeface="Geist" pitchFamily="34" charset="-122"/>
-                <a:cs typeface="Geist" pitchFamily="34" charset="-120"/>
-              </a:rPr>
-              <a:t>base layer</a:t>
-            </a:r>
-            <a:endParaRPr lang="en-US" sz="1100" dirty="0"/>
-          </a:p>
-        </p:txBody>
-      </p:sp>
-      <p:sp>
-        <p:nvSpPr>
-          <p:cNvPr id="18" name="Text 15"/>
-          <p:cNvSpPr/>
-          <p:nvPr/>
-        </p:nvSpPr>
-        <p:spPr>
-          <a:xfrm>
-            <a:off x="4297680" y="3063240"/>
-            <a:ext cx="548640" cy="457200"/>
-          </a:xfrm>
-          <a:prstGeom prst="rect">
-            <a:avLst/>
-          </a:prstGeom>
-          <a:noFill/>
-          <a:ln/>
-        </p:spPr>
-        <p:txBody>
-          <a:bodyPr wrap="square" lIns="0" tIns="0" rIns="0" bIns="0" rtlCol="0" anchor="ctr"/>
-          <a:lstStyle/>
-          <a:p>
-            <a:pPr algn="ctr" indent="0" marL="0">
-              <a:buNone/>
-            </a:pPr>
-            <a:r>
-              <a:rPr lang="en-US" sz="2800" dirty="0">
-                <a:solidFill>
-                  <a:srgbClr val="005FFF"/>
-                </a:solidFill>
-                <a:latin typeface="Geist" pitchFamily="34" charset="0"/>
-                <a:ea typeface="Geist" pitchFamily="34" charset="-122"/>
-                <a:cs typeface="Geist" pitchFamily="34" charset="-120"/>
-              </a:rPr>
-              <a:t>→</a:t>
-            </a:r>
-            <a:endParaRPr lang="en-US" sz="2800" dirty="0"/>
-          </a:p>
-        </p:txBody>
-      </p:sp>
-      <p:sp>
-        <p:nvSpPr>
-          <p:cNvPr id="19" name="Text 16"/>
-          <p:cNvSpPr/>
-          <p:nvPr/>
-        </p:nvSpPr>
-        <p:spPr>
-          <a:xfrm>
-            <a:off x="4892040" y="1901952"/>
-            <a:ext cx="3840480" cy="201168"/>
-          </a:xfrm>
-          <a:prstGeom prst="rect">
-            <a:avLst/>
-          </a:prstGeom>
-          <a:noFill/>
-          <a:ln/>
-        </p:spPr>
-        <p:txBody>
-          <a:bodyPr wrap="square" lIns="0" tIns="0" rIns="0" bIns="0" rtlCol="0" anchor="ctr"/>
-          <a:lstStyle/>
-          <a:p>
-            <a:pPr indent="0" marL="0">
-              <a:buNone/>
-            </a:pPr>
-            <a:r>
-              <a:rPr lang="en-US" sz="1100" spc="120" kern="0" dirty="0">
-                <a:solidFill>
-                  <a:srgbClr val="EF4444"/>
-                </a:solidFill>
-                <a:latin typeface="Geist" pitchFamily="34" charset="0"/>
-                <a:ea typeface="Geist" pitchFamily="34" charset="-122"/>
-                <a:cs typeface="Geist" pitchFamily="34" charset="-120"/>
-              </a:rPr>
-              <a:t>ENCODER PRODUCED</a:t>
-            </a:r>
-            <a:endParaRPr lang="en-US" sz="1100" dirty="0"/>
-          </a:p>
-        </p:txBody>
-      </p:sp>
-      <p:sp>
-        <p:nvSpPr>
-          <p:cNvPr id="20" name="Text 17"/>
-          <p:cNvSpPr/>
-          <p:nvPr/>
-        </p:nvSpPr>
-        <p:spPr>
-          <a:xfrm>
-            <a:off x="4892040" y="2084832"/>
-            <a:ext cx="3840480" cy="292608"/>
-          </a:xfrm>
-          <a:prstGeom prst="rect">
-            <a:avLst/>
-          </a:prstGeom>
-          <a:noFill/>
-          <a:ln/>
-        </p:spPr>
-        <p:txBody>
-          <a:bodyPr wrap="square" lIns="0" tIns="0" rIns="0" bIns="0" rtlCol="0" anchor="ctr"/>
-          <a:lstStyle/>
-          <a:p>
-            <a:pPr indent="0" marL="0">
-              <a:buNone/>
-            </a:pPr>
-            <a:r>
-              <a:rPr lang="en-US" sz="1600" dirty="0">
-                <a:solidFill>
-                  <a:srgbClr val="FFFFFF"/>
-                </a:solidFill>
-                <a:latin typeface="Geist" pitchFamily="34" charset="0"/>
-                <a:ea typeface="Geist" pitchFamily="34" charset="-122"/>
-                <a:cs typeface="Geist" pitchFamily="34" charset="-120"/>
-              </a:rPr>
-              <a:t>1 flat stream</a:t>
-            </a:r>
-            <a:endParaRPr lang="en-US" sz="1600" dirty="0"/>
-          </a:p>
-        </p:txBody>
-      </p:sp>
-      <p:sp>
-        <p:nvSpPr>
-          <p:cNvPr id="21" name="Shape 18"/>
-          <p:cNvSpPr/>
-          <p:nvPr/>
-        </p:nvSpPr>
-        <p:spPr>
-          <a:xfrm>
-            <a:off x="4892040" y="2450592"/>
-            <a:ext cx="3840480" cy="1828800"/>
-          </a:xfrm>
-          <a:prstGeom prst="rect">
-            <a:avLst/>
-          </a:prstGeom>
-          <a:solidFill>
-            <a:srgbClr val="3A1A1A"/>
-          </a:solidFill>
-          <a:ln w="12700">
-            <a:solidFill>
-              <a:srgbClr val="EF4444"/>
-            </a:solidFill>
-            <a:prstDash val="solid"/>
-          </a:ln>
-        </p:spPr>
-      </p:sp>
-      <p:sp>
-        <p:nvSpPr>
-          <p:cNvPr id="22" name="Text 19"/>
-          <p:cNvSpPr/>
-          <p:nvPr/>
-        </p:nvSpPr>
-        <p:spPr>
-          <a:xfrm>
-            <a:off x="4892040" y="2880360"/>
-            <a:ext cx="3840480" cy="411480"/>
-          </a:xfrm>
-          <a:prstGeom prst="rect">
-            <a:avLst/>
-          </a:prstGeom>
-          <a:noFill/>
-          <a:ln/>
-        </p:spPr>
-        <p:txBody>
-          <a:bodyPr wrap="square" lIns="0" tIns="0" rIns="0" bIns="0" rtlCol="0" anchor="ctr"/>
-          <a:lstStyle/>
-          <a:p>
-            <a:pPr algn="ctr" indent="0" marL="0">
-              <a:buNone/>
-            </a:pPr>
-            <a:r>
-              <a:rPr lang="en-US" sz="2800" dirty="0">
-                <a:solidFill>
-                  <a:srgbClr val="FFFFFF"/>
-                </a:solidFill>
-                <a:latin typeface="Geist" pitchFamily="34" charset="0"/>
-                <a:ea typeface="Geist" pitchFamily="34" charset="-122"/>
-                <a:cs typeface="Geist" pitchFamily="34" charset="-120"/>
-              </a:rPr>
-              <a:t>720p only</a:t>
-            </a:r>
-            <a:endParaRPr lang="en-US" sz="2800" dirty="0"/>
-          </a:p>
-        </p:txBody>
-      </p:sp>
-      <p:sp>
-        <p:nvSpPr>
-          <p:cNvPr id="23" name="Text 20"/>
-          <p:cNvSpPr/>
-          <p:nvPr/>
-        </p:nvSpPr>
-        <p:spPr>
-          <a:xfrm>
-            <a:off x="5074920" y="3337560"/>
-            <a:ext cx="3474720" cy="320040"/>
-          </a:xfrm>
-          <a:prstGeom prst="rect">
-            <a:avLst/>
-          </a:prstGeom>
-          <a:noFill/>
-          <a:ln/>
-        </p:spPr>
-        <p:txBody>
-          <a:bodyPr wrap="square" lIns="0" tIns="0" rIns="0" bIns="0" rtlCol="0" anchor="ctr"/>
-          <a:lstStyle/>
-          <a:p>
-            <a:pPr algn="ctr" indent="0" marL="0">
-              <a:buNone/>
-            </a:pPr>
-            <a:r>
-              <a:rPr lang="en-US" sz="1300" dirty="0">
-                <a:solidFill>
-                  <a:srgbClr val="A8C7FA"/>
-                </a:solidFill>
-                <a:latin typeface="Geist" pitchFamily="34" charset="0"/>
-                <a:ea typeface="Geist" pitchFamily="34" charset="-122"/>
-                <a:cs typeface="Geist" pitchFamily="34" charset="-120"/>
-              </a:rPr>
-              <a:t>No S1  ·  No S0  ·  Nothing to split</a:t>
-            </a:r>
-            <a:endParaRPr lang="en-US" sz="1300" dirty="0"/>
-          </a:p>
-        </p:txBody>
-      </p:sp>
-      <p:sp>
-        <p:nvSpPr>
-          <p:cNvPr id="24" name="Text 21"/>
-          <p:cNvSpPr/>
-          <p:nvPr/>
-        </p:nvSpPr>
-        <p:spPr>
-          <a:xfrm>
-            <a:off x="5074920" y="3703320"/>
-            <a:ext cx="3474720" cy="274320"/>
-          </a:xfrm>
-          <a:prstGeom prst="rect">
-            <a:avLst/>
-          </a:prstGeom>
-          <a:noFill/>
-          <a:ln/>
-        </p:spPr>
-        <p:txBody>
-          <a:bodyPr wrap="square" lIns="0" tIns="0" rIns="0" bIns="0" rtlCol="0" anchor="ctr"/>
-          <a:lstStyle/>
-          <a:p>
-            <a:pPr algn="ctr" indent="0" marL="0">
-              <a:buNone/>
-            </a:pPr>
-            <a:r>
-              <a:rPr lang="en-US" sz="1200" dirty="0">
-                <a:solidFill>
-                  <a:srgbClr val="8AABB8"/>
-                </a:solidFill>
-                <a:latin typeface="Geist" pitchFamily="34" charset="0"/>
-                <a:ea typeface="Geist" pitchFamily="34" charset="-122"/>
-                <a:cs typeface="Geist" pitchFamily="34" charset="-120"/>
-              </a:rPr>
-              <a:t>~1.4 Mbps sent  —  not starved</a:t>
-            </a:r>
-            <a:endParaRPr lang="en-US" sz="1200" dirty="0"/>
-          </a:p>
-        </p:txBody>
-      </p:sp>
-      <p:sp>
-        <p:nvSpPr>
-          <p:cNvPr id="25" name="Text 22"/>
-          <p:cNvSpPr/>
-          <p:nvPr/>
-        </p:nvSpPr>
-        <p:spPr>
-          <a:xfrm>
-            <a:off x="411480" y="4407408"/>
-            <a:ext cx="8321040" cy="320040"/>
-          </a:xfrm>
-          <a:prstGeom prst="rect">
-            <a:avLst/>
-          </a:prstGeom>
-          <a:noFill/>
-          <a:ln/>
-        </p:spPr>
-        <p:txBody>
-          <a:bodyPr wrap="square" lIns="0" tIns="0" rIns="0" bIns="0" rtlCol="0" anchor="ctr"/>
-          <a:lstStyle/>
-          <a:p>
-            <a:pPr indent="0" marL="0">
-              <a:buNone/>
-            </a:pPr>
-            <a:r>
-              <a:rPr lang="en-US" sz="1400" dirty="0">
-                <a:solidFill>
-                  <a:srgbClr val="A8C7FA"/>
-                </a:solidFill>
-                <a:latin typeface="Geist" pitchFamily="34" charset="0"/>
-                <a:ea typeface="Geist" pitchFamily="34" charset="-122"/>
-                <a:cs typeface="Geist" pitchFamily="34" charset="-120"/>
-              </a:rPr>
-              <a:t>SFU expected three layers. Hardware sent one. Stream marked poor.</a:t>
-            </a:r>
-            <a:endParaRPr lang="en-US" sz="1400" dirty="0"/>
+              <a:t>The oscillation was real — and we stopped it. It was not the reason the SFU marked this stream as poor.</a:t>
+            </a:r>
+            <a:endParaRPr lang="en-US" sz="1500" dirty="0"/>
           </a:p>
         </p:txBody>
       </p:sp>
@@ -6044,7 +6054,7 @@
                 <a:ea typeface="Geist" pitchFamily="34" charset="-122"/>
                 <a:cs typeface="Geist" pitchFamily="34" charset="-120"/>
               </a:rPr>
-              <a:t>Why Those Symptoms Happened</a:t>
+              <a:t>71 kbps Was a WebRTC Stats Bug</a:t>
             </a:r>
             <a:endParaRPr lang="en-US" sz="3400" dirty="0"/>
           </a:p>
@@ -6084,17 +6094,17 @@
         <p:spPr>
           <a:xfrm>
             <a:off x="411480" y="1965960"/>
-            <a:ext cx="502920" cy="658368"/>
+            <a:ext cx="4069080" cy="2011680"/>
           </a:xfrm>
           <a:prstGeom prst="rect">
             <a:avLst/>
           </a:prstGeom>
           <a:solidFill>
-            <a:srgbClr val="005FFF"/>
+            <a:srgbClr val="0B2347"/>
           </a:solidFill>
           <a:ln w="12700">
             <a:solidFill>
-              <a:srgbClr val="005FFF"/>
+              <a:srgbClr val="1A3D7A"/>
             </a:solidFill>
             <a:prstDash val="solid"/>
           </a:ln>
@@ -6108,24 +6118,63 @@
         </p:nvSpPr>
         <p:spPr>
           <a:xfrm>
-            <a:off x="411480" y="1965960"/>
-            <a:ext cx="502920" cy="658368"/>
-          </a:xfrm>
-          <a:prstGeom prst="rect">
-            <a:avLst/>
-          </a:prstGeom>
-          <a:noFill/>
-          <a:ln/>
-        </p:spPr>
-        <p:txBody>
-          <a:bodyPr wrap="square" lIns="0" tIns="0" rIns="0" bIns="0" rtlCol="0" anchor="ctr"/>
-          <a:lstStyle/>
-          <a:p>
-            <a:pPr algn="ctr" indent="0" marL="0">
-              <a:buNone/>
-            </a:pPr>
-            <a:r>
-              <a:rPr lang="en-US" sz="1300" dirty="0">
+            <a:off x="594360" y="2084832"/>
+            <a:ext cx="3703320" cy="201168"/>
+          </a:xfrm>
+          <a:prstGeom prst="rect">
+            <a:avLst/>
+          </a:prstGeom>
+          <a:noFill/>
+          <a:ln/>
+        </p:spPr>
+        <p:txBody>
+          <a:bodyPr wrap="square" lIns="0" tIns="0" rIns="0" bIns="0" rtlCol="0" anchor="ctr"/>
+          <a:lstStyle/>
+          <a:p>
+            <a:pPr indent="0" marL="0">
+              <a:buNone/>
+            </a:pPr>
+            <a:r>
+              <a:rPr lang="en-US" sz="1100" spc="120" kern="0" dirty="0">
+                <a:solidFill>
+                  <a:srgbClr val="EF4444"/>
+                </a:solidFill>
+                <a:latin typeface="Geist" pitchFamily="34" charset="0"/>
+                <a:ea typeface="Geist" pitchFamily="34" charset="-122"/>
+                <a:cs typeface="Geist" pitchFamily="34" charset="-120"/>
+              </a:rPr>
+              <a:t>WHAT STATS SAID</a:t>
+            </a:r>
+            <a:endParaRPr lang="en-US" sz="1100" dirty="0"/>
+          </a:p>
+        </p:txBody>
+      </p:sp>
+      <p:sp>
+        <p:nvSpPr>
+          <p:cNvPr id="9" name="Text 6"/>
+          <p:cNvSpPr/>
+          <p:nvPr/>
+        </p:nvSpPr>
+        <p:spPr>
+          <a:xfrm>
+            <a:off x="594360" y="2331720"/>
+            <a:ext cx="3703320" cy="640080"/>
+          </a:xfrm>
+          <a:prstGeom prst="rect">
+            <a:avLst/>
+          </a:prstGeom>
+          <a:noFill/>
+          <a:ln/>
+        </p:spPr>
+        <p:txBody>
+          <a:bodyPr wrap="square" lIns="0" tIns="0" rIns="0" bIns="0" rtlCol="0" anchor="ctr"/>
+          <a:lstStyle/>
+          <a:p>
+            <a:pPr indent="0" marL="0">
+              <a:buNone/>
+            </a:pPr>
+            <a:r>
+              <a:rPr lang="en-US" sz="4000" dirty="0">
                 <a:solidFill>
                   <a:srgbClr val="FFFFFF"/>
                 </a:solidFill>
@@ -6133,22 +6182,22 @@
                 <a:ea typeface="Geist" pitchFamily="34" charset="-122"/>
                 <a:cs typeface="Geist" pitchFamily="34" charset="-120"/>
               </a:rPr>
-              <a:t>01</a:t>
-            </a:r>
-            <a:endParaRPr lang="en-US" sz="1300" dirty="0"/>
-          </a:p>
-        </p:txBody>
-      </p:sp>
-      <p:sp>
-        <p:nvSpPr>
-          <p:cNvPr id="9" name="Text 6"/>
-          <p:cNvSpPr/>
-          <p:nvPr/>
-        </p:nvSpPr>
-        <p:spPr>
-          <a:xfrm>
-            <a:off x="1051560" y="2002536"/>
-            <a:ext cx="7498080" cy="256032"/>
+              <a:t>71 kbps</a:t>
+            </a:r>
+            <a:endParaRPr lang="en-US" sz="4000" dirty="0"/>
+          </a:p>
+        </p:txBody>
+      </p:sp>
+      <p:sp>
+        <p:nvSpPr>
+          <p:cNvPr id="10" name="Text 7"/>
+          <p:cNvSpPr/>
+          <p:nvPr/>
+        </p:nvSpPr>
+        <p:spPr>
+          <a:xfrm>
+            <a:off x="594360" y="3017520"/>
+            <a:ext cx="3703320" cy="731520"/>
           </a:xfrm>
           <a:prstGeom prst="rect">
             <a:avLst/>
@@ -6172,48 +6221,26 @@
                 <a:ea typeface="Geist" pitchFamily="34" charset="-122"/>
                 <a:cs typeface="Geist" pitchFamily="34" charset="-120"/>
               </a:rPr>
-              <a:t>SFU marked the stream as poor</a:t>
+              <a:t>targetBitrate at 720×1280</a:t>
             </a:r>
             <a:endParaRPr lang="en-US" sz="1400" dirty="0"/>
           </a:p>
-        </p:txBody>
-      </p:sp>
-      <p:sp>
-        <p:nvSpPr>
-          <p:cNvPr id="10" name="Text 7"/>
-          <p:cNvSpPr/>
-          <p:nvPr/>
-        </p:nvSpPr>
-        <p:spPr>
-          <a:xfrm>
-            <a:off x="1051560" y="2276856"/>
-            <a:ext cx="7498080" cy="292608"/>
-          </a:xfrm>
-          <a:prstGeom prst="rect">
-            <a:avLst/>
-          </a:prstGeom>
-          <a:noFill/>
-          <a:ln/>
-        </p:spPr>
-        <p:txBody>
-          <a:bodyPr wrap="square" lIns="0" tIns="0" rIns="0" bIns="0" rtlCol="0" anchor="ctr"/>
-          <a:lstStyle/>
           <a:p>
             <a:pPr indent="0" marL="0">
               <a:buNone/>
             </a:pPr>
             <a:r>
-              <a:rPr lang="en-US" sz="1500" dirty="0">
-                <a:solidFill>
-                  <a:srgbClr val="FFFFFF"/>
-                </a:solidFill>
-                <a:latin typeface="Geist" pitchFamily="34" charset="0"/>
-                <a:ea typeface="Geist" pitchFamily="34" charset="-122"/>
-                <a:cs typeface="Geist" pitchFamily="34" charset="-120"/>
-              </a:rPr>
-              <a:t>SFU expected 3 spatial layers. Hardware sent 1.</a:t>
-            </a:r>
-            <a:endParaRPr lang="en-US" sz="1500" dirty="0"/>
+              <a:rPr lang="en-US" sz="1400" dirty="0">
+                <a:solidFill>
+                  <a:srgbClr val="A8C7FA"/>
+                </a:solidFill>
+                <a:latin typeface="Geist" pitchFamily="34" charset="0"/>
+                <a:ea typeface="Geist" pitchFamily="34" charset="-122"/>
+                <a:cs typeface="Geist" pitchFamily="34" charset="-120"/>
+              </a:rPr>
+              <a:t>Looked like the encoder was starved</a:t>
+            </a:r>
+            <a:endParaRPr lang="en-US" sz="1400" dirty="0"/>
           </a:p>
         </p:txBody>
       </p:sp>
@@ -6225,292 +6252,8 @@
         </p:nvSpPr>
         <p:spPr>
           <a:xfrm>
-            <a:off x="411480" y="2743200"/>
-            <a:ext cx="502920" cy="658368"/>
-          </a:xfrm>
-          <a:prstGeom prst="rect">
-            <a:avLst/>
-          </a:prstGeom>
-          <a:solidFill>
-            <a:srgbClr val="005FFF"/>
-          </a:solidFill>
-          <a:ln w="12700">
-            <a:solidFill>
-              <a:srgbClr val="005FFF"/>
-            </a:solidFill>
-            <a:prstDash val="solid"/>
-          </a:ln>
-        </p:spPr>
-      </p:sp>
-      <p:sp>
-        <p:nvSpPr>
-          <p:cNvPr id="12" name="Text 9"/>
-          <p:cNvSpPr/>
-          <p:nvPr/>
-        </p:nvSpPr>
-        <p:spPr>
-          <a:xfrm>
-            <a:off x="411480" y="2743200"/>
-            <a:ext cx="502920" cy="658368"/>
-          </a:xfrm>
-          <a:prstGeom prst="rect">
-            <a:avLst/>
-          </a:prstGeom>
-          <a:noFill/>
-          <a:ln/>
-        </p:spPr>
-        <p:txBody>
-          <a:bodyPr wrap="square" lIns="0" tIns="0" rIns="0" bIns="0" rtlCol="0" anchor="ctr"/>
-          <a:lstStyle/>
-          <a:p>
-            <a:pPr algn="ctr" indent="0" marL="0">
-              <a:buNone/>
-            </a:pPr>
-            <a:r>
-              <a:rPr lang="en-US" sz="1300" dirty="0">
-                <a:solidFill>
-                  <a:srgbClr val="FFFFFF"/>
-                </a:solidFill>
-                <a:latin typeface="Geist" pitchFamily="34" charset="0"/>
-                <a:ea typeface="Geist" pitchFamily="34" charset="-122"/>
-                <a:cs typeface="Geist" pitchFamily="34" charset="-120"/>
-              </a:rPr>
-              <a:t>02</a:t>
-            </a:r>
-            <a:endParaRPr lang="en-US" sz="1300" dirty="0"/>
-          </a:p>
-        </p:txBody>
-      </p:sp>
-      <p:sp>
-        <p:nvSpPr>
-          <p:cNvPr id="13" name="Text 10"/>
-          <p:cNvSpPr/>
-          <p:nvPr/>
-        </p:nvSpPr>
-        <p:spPr>
-          <a:xfrm>
-            <a:off x="1051560" y="2779776"/>
-            <a:ext cx="7498080" cy="256032"/>
-          </a:xfrm>
-          <a:prstGeom prst="rect">
-            <a:avLst/>
-          </a:prstGeom>
-          <a:noFill/>
-          <a:ln/>
-        </p:spPr>
-        <p:txBody>
-          <a:bodyPr wrap="square" lIns="0" tIns="0" rIns="0" bIns="0" rtlCol="0" anchor="ctr"/>
-          <a:lstStyle/>
-          <a:p>
-            <a:pPr indent="0" marL="0">
-              <a:buNone/>
-            </a:pPr>
-            <a:r>
-              <a:rPr lang="en-US" sz="1400" dirty="0">
-                <a:solidFill>
-                  <a:srgbClr val="A8C7FA"/>
-                </a:solidFill>
-                <a:latin typeface="Geist" pitchFamily="34" charset="0"/>
-                <a:ea typeface="Geist" pitchFamily="34" charset="-122"/>
-                <a:cs typeface="Geist" pitchFamily="34" charset="-120"/>
-              </a:rPr>
-              <a:t>Encoder re-created in a loop</a:t>
-            </a:r>
-            <a:endParaRPr lang="en-US" sz="1400" dirty="0"/>
-          </a:p>
-        </p:txBody>
-      </p:sp>
-      <p:sp>
-        <p:nvSpPr>
-          <p:cNvPr id="14" name="Text 11"/>
-          <p:cNvSpPr/>
-          <p:nvPr/>
-        </p:nvSpPr>
-        <p:spPr>
-          <a:xfrm>
-            <a:off x="1051560" y="3054096"/>
-            <a:ext cx="7498080" cy="292608"/>
-          </a:xfrm>
-          <a:prstGeom prst="rect">
-            <a:avLst/>
-          </a:prstGeom>
-          <a:noFill/>
-          <a:ln/>
-        </p:spPr>
-        <p:txBody>
-          <a:bodyPr wrap="square" lIns="0" tIns="0" rIns="0" bIns="0" rtlCol="0" anchor="ctr"/>
-          <a:lstStyle/>
-          <a:p>
-            <a:pPr indent="0" marL="0">
-              <a:buNone/>
-            </a:pPr>
-            <a:r>
-              <a:rPr lang="en-US" sz="1500" dirty="0">
-                <a:solidFill>
-                  <a:srgbClr val="FFFFFF"/>
-                </a:solidFill>
-                <a:latin typeface="Geist" pitchFamily="34" charset="0"/>
-                <a:ea typeface="Geist" pitchFamily="34" charset="-122"/>
-                <a:cs typeface="Geist" pitchFamily="34" charset="-120"/>
-              </a:rPr>
-              <a:t>QualityScaler flipped 720p ↔ 540p every 5–10s. Each flip recreates the HW encoder twice.</a:t>
-            </a:r>
-            <a:endParaRPr lang="en-US" sz="1500" dirty="0"/>
-          </a:p>
-        </p:txBody>
-      </p:sp>
-      <p:sp>
-        <p:nvSpPr>
-          <p:cNvPr id="15" name="Shape 12"/>
-          <p:cNvSpPr/>
-          <p:nvPr/>
-        </p:nvSpPr>
-        <p:spPr>
-          <a:xfrm>
-            <a:off x="411480" y="3520440"/>
-            <a:ext cx="502920" cy="658368"/>
-          </a:xfrm>
-          <a:prstGeom prst="rect">
-            <a:avLst/>
-          </a:prstGeom>
-          <a:solidFill>
-            <a:srgbClr val="005FFF"/>
-          </a:solidFill>
-          <a:ln w="12700">
-            <a:solidFill>
-              <a:srgbClr val="005FFF"/>
-            </a:solidFill>
-            <a:prstDash val="solid"/>
-          </a:ln>
-        </p:spPr>
-      </p:sp>
-      <p:sp>
-        <p:nvSpPr>
-          <p:cNvPr id="16" name="Text 13"/>
-          <p:cNvSpPr/>
-          <p:nvPr/>
-        </p:nvSpPr>
-        <p:spPr>
-          <a:xfrm>
-            <a:off x="411480" y="3520440"/>
-            <a:ext cx="502920" cy="658368"/>
-          </a:xfrm>
-          <a:prstGeom prst="rect">
-            <a:avLst/>
-          </a:prstGeom>
-          <a:noFill/>
-          <a:ln/>
-        </p:spPr>
-        <p:txBody>
-          <a:bodyPr wrap="square" lIns="0" tIns="0" rIns="0" bIns="0" rtlCol="0" anchor="ctr"/>
-          <a:lstStyle/>
-          <a:p>
-            <a:pPr algn="ctr" indent="0" marL="0">
-              <a:buNone/>
-            </a:pPr>
-            <a:r>
-              <a:rPr lang="en-US" sz="1300" dirty="0">
-                <a:solidFill>
-                  <a:srgbClr val="FFFFFF"/>
-                </a:solidFill>
-                <a:latin typeface="Geist" pitchFamily="34" charset="0"/>
-                <a:ea typeface="Geist" pitchFamily="34" charset="-122"/>
-                <a:cs typeface="Geist" pitchFamily="34" charset="-120"/>
-              </a:rPr>
-              <a:t>03</a:t>
-            </a:r>
-            <a:endParaRPr lang="en-US" sz="1300" dirty="0"/>
-          </a:p>
-        </p:txBody>
-      </p:sp>
-      <p:sp>
-        <p:nvSpPr>
-          <p:cNvPr id="17" name="Text 14"/>
-          <p:cNvSpPr/>
-          <p:nvPr/>
-        </p:nvSpPr>
-        <p:spPr>
-          <a:xfrm>
-            <a:off x="1051560" y="3557016"/>
-            <a:ext cx="7498080" cy="256032"/>
-          </a:xfrm>
-          <a:prstGeom prst="rect">
-            <a:avLst/>
-          </a:prstGeom>
-          <a:noFill/>
-          <a:ln/>
-        </p:spPr>
-        <p:txBody>
-          <a:bodyPr wrap="square" lIns="0" tIns="0" rIns="0" bIns="0" rtlCol="0" anchor="ctr"/>
-          <a:lstStyle/>
-          <a:p>
-            <a:pPr indent="0" marL="0">
-              <a:buNone/>
-            </a:pPr>
-            <a:r>
-              <a:rPr lang="en-US" sz="1400" dirty="0">
-                <a:solidFill>
-                  <a:srgbClr val="A8C7FA"/>
-                </a:solidFill>
-                <a:latin typeface="Geist" pitchFamily="34" charset="0"/>
-                <a:ea typeface="Geist" pitchFamily="34" charset="-122"/>
-                <a:cs typeface="Geist" pitchFamily="34" charset="-120"/>
-              </a:rPr>
-              <a:t>Stats looked starved</a:t>
-            </a:r>
-            <a:endParaRPr lang="en-US" sz="1400" dirty="0"/>
-          </a:p>
-        </p:txBody>
-      </p:sp>
-      <p:sp>
-        <p:nvSpPr>
-          <p:cNvPr id="18" name="Text 15"/>
-          <p:cNvSpPr/>
-          <p:nvPr/>
-        </p:nvSpPr>
-        <p:spPr>
-          <a:xfrm>
-            <a:off x="1051560" y="3831336"/>
-            <a:ext cx="7498080" cy="292608"/>
-          </a:xfrm>
-          <a:prstGeom prst="rect">
-            <a:avLst/>
-          </a:prstGeom>
-          <a:noFill/>
-          <a:ln/>
-        </p:spPr>
-        <p:txBody>
-          <a:bodyPr wrap="square" lIns="0" tIns="0" rIns="0" bIns="0" rtlCol="0" anchor="ctr"/>
-          <a:lstStyle/>
-          <a:p>
-            <a:pPr indent="0" marL="0">
-              <a:buNone/>
-            </a:pPr>
-            <a:r>
-              <a:rPr lang="en-US" sz="1500" dirty="0">
-                <a:solidFill>
-                  <a:srgbClr val="FFFFFF"/>
-                </a:solidFill>
-                <a:latin typeface="Geist" pitchFamily="34" charset="0"/>
-                <a:ea typeface="Geist" pitchFamily="34" charset="-122"/>
-                <a:cs typeface="Geist" pitchFamily="34" charset="-120"/>
-              </a:rPr>
-              <a:t>VP9 SVC stats bug — reports only the base layer, not the total (~1.5 Mbps).</a:t>
-            </a:r>
-            <a:endParaRPr lang="en-US" sz="1500" dirty="0"/>
-          </a:p>
-        </p:txBody>
-      </p:sp>
-      <p:sp>
-        <p:nvSpPr>
-          <p:cNvPr id="19" name="Shape 16"/>
-          <p:cNvSpPr/>
-          <p:nvPr/>
-        </p:nvSpPr>
-        <p:spPr>
-          <a:xfrm>
-            <a:off x="411480" y="4343400"/>
-            <a:ext cx="8321040" cy="502920"/>
+            <a:off x="4663440" y="1965960"/>
+            <a:ext cx="4069080" cy="2011680"/>
           </a:xfrm>
           <a:prstGeom prst="rect">
             <a:avLst/>
@@ -6528,14 +6271,14 @@
       </p:sp>
       <p:sp>
         <p:nvSpPr>
-          <p:cNvPr id="20" name="Text 17"/>
-          <p:cNvSpPr/>
-          <p:nvPr/>
-        </p:nvSpPr>
-        <p:spPr>
-          <a:xfrm>
-            <a:off x="594360" y="4343400"/>
-            <a:ext cx="7955280" cy="502920"/>
+          <p:cNvPr id="12" name="Text 9"/>
+          <p:cNvSpPr/>
+          <p:nvPr/>
+        </p:nvSpPr>
+        <p:spPr>
+          <a:xfrm>
+            <a:off x="4846320" y="2084832"/>
+            <a:ext cx="3703320" cy="201168"/>
           </a:xfrm>
           <a:prstGeom prst="rect">
             <a:avLst/>
@@ -6551,7 +6294,46 @@
               <a:buNone/>
             </a:pPr>
             <a:r>
-              <a:rPr lang="en-US" sz="1300" dirty="0">
+              <a:rPr lang="en-US" sz="1100" spc="120" kern="0" dirty="0">
+                <a:solidFill>
+                  <a:srgbClr val="22C55E"/>
+                </a:solidFill>
+                <a:latin typeface="Geist" pitchFamily="34" charset="0"/>
+                <a:ea typeface="Geist" pitchFamily="34" charset="-122"/>
+                <a:cs typeface="Geist" pitchFamily="34" charset="-120"/>
+              </a:rPr>
+              <a:t>WHAT WAS ACTUALLY SENT</a:t>
+            </a:r>
+            <a:endParaRPr lang="en-US" sz="1100" dirty="0"/>
+          </a:p>
+        </p:txBody>
+      </p:sp>
+      <p:sp>
+        <p:nvSpPr>
+          <p:cNvPr id="13" name="Text 10"/>
+          <p:cNvSpPr/>
+          <p:nvPr/>
+        </p:nvSpPr>
+        <p:spPr>
+          <a:xfrm>
+            <a:off x="4846320" y="2331720"/>
+            <a:ext cx="3703320" cy="640080"/>
+          </a:xfrm>
+          <a:prstGeom prst="rect">
+            <a:avLst/>
+          </a:prstGeom>
+          <a:noFill/>
+          <a:ln/>
+        </p:spPr>
+        <p:txBody>
+          <a:bodyPr wrap="square" lIns="0" tIns="0" rIns="0" bIns="0" rtlCol="0" anchor="ctr"/>
+          <a:lstStyle/>
+          <a:p>
+            <a:pPr indent="0" marL="0">
+              <a:buNone/>
+            </a:pPr>
+            <a:r>
+              <a:rPr lang="en-US" sz="4000" dirty="0">
                 <a:solidFill>
                   <a:srgbClr val="FFFFFF"/>
                 </a:solidFill>
@@ -6559,9 +6341,129 @@
                 <a:ea typeface="Geist" pitchFamily="34" charset="-122"/>
                 <a:cs typeface="Geist" pitchFamily="34" charset="-120"/>
               </a:rPr>
-              <a:t>Software VP9 never hit 01 or 02 — it produces real L3T3 layers and never tears down the encoder.</a:t>
-            </a:r>
-            <a:endParaRPr lang="en-US" sz="1300" dirty="0"/>
+              <a:t>~1.4 Mbps</a:t>
+            </a:r>
+            <a:endParaRPr lang="en-US" sz="4000" dirty="0"/>
+          </a:p>
+        </p:txBody>
+      </p:sp>
+      <p:sp>
+        <p:nvSpPr>
+          <p:cNvPr id="14" name="Text 11"/>
+          <p:cNvSpPr/>
+          <p:nvPr/>
+        </p:nvSpPr>
+        <p:spPr>
+          <a:xfrm>
+            <a:off x="4846320" y="3017520"/>
+            <a:ext cx="3703320" cy="731520"/>
+          </a:xfrm>
+          <a:prstGeom prst="rect">
+            <a:avLst/>
+          </a:prstGeom>
+          <a:noFill/>
+          <a:ln/>
+        </p:spPr>
+        <p:txBody>
+          <a:bodyPr wrap="square" lIns="0" tIns="0" rIns="0" bIns="0" rtlCol="0" anchor="ctr"/>
+          <a:lstStyle/>
+          <a:p>
+            <a:pPr indent="0" marL="0">
+              <a:buNone/>
+            </a:pPr>
+            <a:r>
+              <a:rPr lang="en-US" sz="1400" dirty="0">
+                <a:solidFill>
+                  <a:srgbClr val="A8C7FA"/>
+                </a:solidFill>
+                <a:latin typeface="Geist" pitchFamily="34" charset="0"/>
+                <a:ea typeface="Geist" pitchFamily="34" charset="-122"/>
+                <a:cs typeface="Geist" pitchFamily="34" charset="-120"/>
+              </a:rPr>
+              <a:t>bytesSent  ·  SFU cap 1.5 Mbps</a:t>
+            </a:r>
+            <a:endParaRPr lang="en-US" sz="1400" dirty="0"/>
+          </a:p>
+          <a:p>
+            <a:pPr indent="0" marL="0">
+              <a:buNone/>
+            </a:pPr>
+            <a:r>
+              <a:rPr lang="en-US" sz="1400" dirty="0">
+                <a:solidFill>
+                  <a:srgbClr val="A8C7FA"/>
+                </a:solidFill>
+                <a:latin typeface="Geist" pitchFamily="34" charset="0"/>
+                <a:ea typeface="Geist" pitchFamily="34" charset="-122"/>
+                <a:cs typeface="Geist" pitchFamily="34" charset="-120"/>
+              </a:rPr>
+              <a:t>BWE ~3 Mbps  —  not starved</a:t>
+            </a:r>
+            <a:endParaRPr lang="en-US" sz="1400" dirty="0"/>
+          </a:p>
+        </p:txBody>
+      </p:sp>
+      <p:sp>
+        <p:nvSpPr>
+          <p:cNvPr id="15" name="Shape 12"/>
+          <p:cNvSpPr/>
+          <p:nvPr/>
+        </p:nvSpPr>
+        <p:spPr>
+          <a:xfrm>
+            <a:off x="411480" y="4114800"/>
+            <a:ext cx="8321040" cy="777240"/>
+          </a:xfrm>
+          <a:prstGeom prst="rect">
+            <a:avLst/>
+          </a:prstGeom>
+          <a:solidFill>
+            <a:srgbClr val="0B2347"/>
+          </a:solidFill>
+          <a:ln w="12700">
+            <a:solidFill>
+              <a:srgbClr val="005FFF"/>
+            </a:solidFill>
+            <a:prstDash val="solid"/>
+          </a:ln>
+        </p:spPr>
+      </p:sp>
+      <p:sp>
+        <p:nvSpPr>
+          <p:cNvPr id="16" name="Text 13"/>
+          <p:cNvSpPr/>
+          <p:nvPr/>
+        </p:nvSpPr>
+        <p:spPr>
+          <a:xfrm>
+            <a:off x="594360" y="4114800"/>
+            <a:ext cx="7955280" cy="777240"/>
+          </a:xfrm>
+          <a:prstGeom prst="rect">
+            <a:avLst/>
+          </a:prstGeom>
+          <a:noFill/>
+          <a:ln/>
+        </p:spPr>
+        <p:txBody>
+          <a:bodyPr wrap="square" lIns="0" tIns="0" rIns="0" bIns="0" rtlCol="0" anchor="ctr"/>
+          <a:lstStyle/>
+          <a:p>
+            <a:pPr indent="0" marL="0">
+              <a:buNone/>
+            </a:pPr>
+            <a:r>
+              <a:rPr lang="en-US" sz="1400" dirty="0">
+                <a:solidFill>
+                  <a:srgbClr val="FFFFFF"/>
+                </a:solidFill>
+                <a:latin typeface="Geist" pitchFamily="34" charset="0"/>
+                <a:ea typeface="Geist" pitchFamily="34" charset="-122"/>
+                <a:cs typeface="Geist" pitchFamily="34" charset="-120"/>
+              </a:rPr>
+              <a:t>send_statistics_proxy.cc reports GetSpatialLayerSum(*simulcast_index) — the base spatial layer only, on single-SSRC VP9 SVC. The 71 kbps figure was a reporting artifact. Also not the real problem.</a:t>
+            </a:r>
+            <a:endParaRPr lang="en-US" sz="1400" dirty="0"/>
           </a:p>
         </p:txBody>
       </p:sp>
@@ -6675,24 +6577,102 @@
       </p:sp>
       <p:sp>
         <p:nvSpPr>
-          <p:cNvPr id="4" name="Shape 1"/>
-          <p:cNvSpPr/>
-          <p:nvPr/>
-        </p:nvSpPr>
-        <p:spPr>
-          <a:xfrm>
-            <a:off x="411480" y="1645920"/>
-            <a:ext cx="502920" cy="502920"/>
+          <p:cNvPr id="4" name="Text 1"/>
+          <p:cNvSpPr/>
+          <p:nvPr/>
+        </p:nvSpPr>
+        <p:spPr>
+          <a:xfrm>
+            <a:off x="411480" y="777240"/>
+            <a:ext cx="5486400" cy="256032"/>
+          </a:xfrm>
+          <a:prstGeom prst="rect">
+            <a:avLst/>
+          </a:prstGeom>
+          <a:noFill/>
+          <a:ln/>
+        </p:spPr>
+        <p:txBody>
+          <a:bodyPr wrap="square" lIns="0" tIns="0" rIns="0" bIns="0" rtlCol="0" anchor="ctr"/>
+          <a:lstStyle/>
+          <a:p>
+            <a:pPr indent="0" marL="0">
+              <a:buNone/>
+            </a:pPr>
+            <a:r>
+              <a:rPr lang="en-US" sz="1000" spc="150" kern="0" dirty="0">
+                <a:solidFill>
+                  <a:srgbClr val="A8C7FA"/>
+                </a:solidFill>
+                <a:latin typeface="Geist" pitchFamily="34" charset="0"/>
+                <a:ea typeface="Geist" pitchFamily="34" charset="-122"/>
+                <a:cs typeface="Geist" pitchFamily="34" charset="-120"/>
+              </a:rPr>
+              <a:t>DEBUGGING</a:t>
+            </a:r>
+            <a:endParaRPr lang="en-US" sz="1000" dirty="0"/>
+          </a:p>
+        </p:txBody>
+      </p:sp>
+      <p:sp>
+        <p:nvSpPr>
+          <p:cNvPr id="5" name="Text 2"/>
+          <p:cNvSpPr/>
+          <p:nvPr/>
+        </p:nvSpPr>
+        <p:spPr>
+          <a:xfrm>
+            <a:off x="411480" y="1005840"/>
+            <a:ext cx="8321040" cy="749808"/>
+          </a:xfrm>
+          <a:prstGeom prst="rect">
+            <a:avLst/>
+          </a:prstGeom>
+          <a:noFill/>
+          <a:ln/>
+        </p:spPr>
+        <p:txBody>
+          <a:bodyPr wrap="square" lIns="0" tIns="0" rIns="0" bIns="0" rtlCol="0" anchor="ctr"/>
+          <a:lstStyle/>
+          <a:p>
+            <a:pPr indent="0" marL="0">
+              <a:buNone/>
+            </a:pPr>
+            <a:r>
+              <a:rPr lang="en-US" sz="3400" dirty="0">
+                <a:solidFill>
+                  <a:srgbClr val="FFFFFF"/>
+                </a:solidFill>
+                <a:latin typeface="Geist" pitchFamily="34" charset="0"/>
+                <a:ea typeface="Geist" pitchFamily="34" charset="-122"/>
+                <a:cs typeface="Geist" pitchFamily="34" charset="-120"/>
+              </a:rPr>
+              <a:t>Asked for 3 Layers — Encoder Sent 1</a:t>
+            </a:r>
+            <a:endParaRPr lang="en-US" sz="3400" dirty="0"/>
+          </a:p>
+        </p:txBody>
+      </p:sp>
+      <p:sp>
+        <p:nvSpPr>
+          <p:cNvPr id="6" name="Shape 3"/>
+          <p:cNvSpPr/>
+          <p:nvPr/>
+        </p:nvSpPr>
+        <p:spPr>
+          <a:xfrm>
+            <a:off x="411480" y="1783080"/>
+            <a:ext cx="8321040" cy="10973"/>
           </a:xfrm>
           <a:prstGeom prst="rect">
             <a:avLst/>
           </a:prstGeom>
           <a:solidFill>
-            <a:srgbClr val="005FFF"/>
+            <a:srgbClr val="1E3A6E"/>
           </a:solidFill>
           <a:ln w="12700">
             <a:solidFill>
-              <a:srgbClr val="005FFF"/>
+              <a:srgbClr val="1E3A6E"/>
             </a:solidFill>
             <a:prstDash val="solid"/>
           </a:ln>
@@ -6700,14 +6680,117 @@
       </p:sp>
       <p:sp>
         <p:nvSpPr>
-          <p:cNvPr id="5" name="Text 2"/>
-          <p:cNvSpPr/>
-          <p:nvPr/>
-        </p:nvSpPr>
-        <p:spPr>
-          <a:xfrm>
-            <a:off x="411480" y="1645920"/>
-            <a:ext cx="502920" cy="502920"/>
+          <p:cNvPr id="7" name="Text 4"/>
+          <p:cNvSpPr/>
+          <p:nvPr/>
+        </p:nvSpPr>
+        <p:spPr>
+          <a:xfrm>
+            <a:off x="411480" y="1901952"/>
+            <a:ext cx="3840480" cy="201168"/>
+          </a:xfrm>
+          <a:prstGeom prst="rect">
+            <a:avLst/>
+          </a:prstGeom>
+          <a:noFill/>
+          <a:ln/>
+        </p:spPr>
+        <p:txBody>
+          <a:bodyPr wrap="square" lIns="0" tIns="0" rIns="0" bIns="0" rtlCol="0" anchor="ctr"/>
+          <a:lstStyle/>
+          <a:p>
+            <a:pPr indent="0" marL="0">
+              <a:buNone/>
+            </a:pPr>
+            <a:r>
+              <a:rPr lang="en-US" sz="1100" spc="120" kern="0" dirty="0">
+                <a:solidFill>
+                  <a:srgbClr val="22C55E"/>
+                </a:solidFill>
+                <a:latin typeface="Geist" pitchFamily="34" charset="0"/>
+                <a:ea typeface="Geist" pitchFamily="34" charset="-122"/>
+                <a:cs typeface="Geist" pitchFamily="34" charset="-120"/>
+              </a:rPr>
+              <a:t>ASKED FOR</a:t>
+            </a:r>
+            <a:endParaRPr lang="en-US" sz="1100" dirty="0"/>
+          </a:p>
+        </p:txBody>
+      </p:sp>
+      <p:sp>
+        <p:nvSpPr>
+          <p:cNvPr id="8" name="Text 5"/>
+          <p:cNvSpPr/>
+          <p:nvPr/>
+        </p:nvSpPr>
+        <p:spPr>
+          <a:xfrm>
+            <a:off x="411480" y="2084832"/>
+            <a:ext cx="3840480" cy="292608"/>
+          </a:xfrm>
+          <a:prstGeom prst="rect">
+            <a:avLst/>
+          </a:prstGeom>
+          <a:noFill/>
+          <a:ln/>
+        </p:spPr>
+        <p:txBody>
+          <a:bodyPr wrap="square" lIns="0" tIns="0" rIns="0" bIns="0" rtlCol="0" anchor="ctr"/>
+          <a:lstStyle/>
+          <a:p>
+            <a:pPr indent="0" marL="0">
+              <a:buNone/>
+            </a:pPr>
+            <a:r>
+              <a:rPr lang="en-US" sz="1600" dirty="0">
+                <a:solidFill>
+                  <a:srgbClr val="FFFFFF"/>
+                </a:solidFill>
+                <a:latin typeface="Geist" pitchFamily="34" charset="0"/>
+                <a:ea typeface="Geist" pitchFamily="34" charset="-122"/>
+                <a:cs typeface="Geist" pitchFamily="34" charset="-120"/>
+              </a:rPr>
+              <a:t>L3T3_KEY</a:t>
+            </a:r>
+            <a:endParaRPr lang="en-US" sz="1600" dirty="0"/>
+          </a:p>
+        </p:txBody>
+      </p:sp>
+      <p:sp>
+        <p:nvSpPr>
+          <p:cNvPr id="9" name="Shape 6"/>
+          <p:cNvSpPr/>
+          <p:nvPr/>
+        </p:nvSpPr>
+        <p:spPr>
+          <a:xfrm>
+            <a:off x="411480" y="2450592"/>
+            <a:ext cx="3840480" cy="548640"/>
+          </a:xfrm>
+          <a:prstGeom prst="rect">
+            <a:avLst/>
+          </a:prstGeom>
+          <a:solidFill>
+            <a:srgbClr val="0B2347"/>
+          </a:solidFill>
+          <a:ln w="12700">
+            <a:solidFill>
+              <a:srgbClr val="22C55E"/>
+            </a:solidFill>
+            <a:prstDash val="solid"/>
+          </a:ln>
+        </p:spPr>
+      </p:sp>
+      <p:sp>
+        <p:nvSpPr>
+          <p:cNvPr id="10" name="Text 7"/>
+          <p:cNvSpPr/>
+          <p:nvPr/>
+        </p:nvSpPr>
+        <p:spPr>
+          <a:xfrm>
+            <a:off x="411480" y="2487168"/>
+            <a:ext cx="3840480" cy="274320"/>
           </a:xfrm>
           <a:prstGeom prst="rect">
             <a:avLst/>
@@ -6723,6 +6806,368 @@
               <a:buNone/>
             </a:pPr>
             <a:r>
+              <a:rPr lang="en-US" sz="1400" dirty="0">
+                <a:solidFill>
+                  <a:srgbClr val="FFFFFF"/>
+                </a:solidFill>
+                <a:latin typeface="Geist" pitchFamily="34" charset="0"/>
+                <a:ea typeface="Geist" pitchFamily="34" charset="-122"/>
+                <a:cs typeface="Geist" pitchFamily="34" charset="-120"/>
+              </a:rPr>
+              <a:t>S2  ·  720p</a:t>
+            </a:r>
+            <a:endParaRPr lang="en-US" sz="1400" dirty="0"/>
+          </a:p>
+        </p:txBody>
+      </p:sp>
+      <p:sp>
+        <p:nvSpPr>
+          <p:cNvPr id="11" name="Text 8"/>
+          <p:cNvSpPr/>
+          <p:nvPr/>
+        </p:nvSpPr>
+        <p:spPr>
+          <a:xfrm>
+            <a:off x="411480" y="2743200"/>
+            <a:ext cx="3840480" cy="201168"/>
+          </a:xfrm>
+          <a:prstGeom prst="rect">
+            <a:avLst/>
+          </a:prstGeom>
+          <a:noFill/>
+          <a:ln/>
+        </p:spPr>
+        <p:txBody>
+          <a:bodyPr wrap="square" lIns="0" tIns="0" rIns="0" bIns="0" rtlCol="0" anchor="ctr"/>
+          <a:lstStyle/>
+          <a:p>
+            <a:pPr algn="ctr" indent="0" marL="0">
+              <a:buNone/>
+            </a:pPr>
+            <a:r>
+              <a:rPr lang="en-US" sz="1100" dirty="0">
+                <a:solidFill>
+                  <a:srgbClr val="A8C7FA"/>
+                </a:solidFill>
+                <a:latin typeface="Geist" pitchFamily="34" charset="0"/>
+                <a:ea typeface="Geist" pitchFamily="34" charset="-122"/>
+                <a:cs typeface="Geist" pitchFamily="34" charset="-120"/>
+              </a:rPr>
+              <a:t>top layer</a:t>
+            </a:r>
+            <a:endParaRPr lang="en-US" sz="1100" dirty="0"/>
+          </a:p>
+        </p:txBody>
+      </p:sp>
+      <p:sp>
+        <p:nvSpPr>
+          <p:cNvPr id="12" name="Shape 9"/>
+          <p:cNvSpPr/>
+          <p:nvPr/>
+        </p:nvSpPr>
+        <p:spPr>
+          <a:xfrm>
+            <a:off x="868680" y="3090672"/>
+            <a:ext cx="2926080" cy="548640"/>
+          </a:xfrm>
+          <a:prstGeom prst="rect">
+            <a:avLst/>
+          </a:prstGeom>
+          <a:solidFill>
+            <a:srgbClr val="0B2347"/>
+          </a:solidFill>
+          <a:ln w="12700">
+            <a:solidFill>
+              <a:srgbClr val="22C55E"/>
+            </a:solidFill>
+            <a:prstDash val="solid"/>
+          </a:ln>
+        </p:spPr>
+      </p:sp>
+      <p:sp>
+        <p:nvSpPr>
+          <p:cNvPr id="13" name="Text 10"/>
+          <p:cNvSpPr/>
+          <p:nvPr/>
+        </p:nvSpPr>
+        <p:spPr>
+          <a:xfrm>
+            <a:off x="868680" y="3127248"/>
+            <a:ext cx="2926080" cy="274320"/>
+          </a:xfrm>
+          <a:prstGeom prst="rect">
+            <a:avLst/>
+          </a:prstGeom>
+          <a:noFill/>
+          <a:ln/>
+        </p:spPr>
+        <p:txBody>
+          <a:bodyPr wrap="square" lIns="0" tIns="0" rIns="0" bIns="0" rtlCol="0" anchor="ctr"/>
+          <a:lstStyle/>
+          <a:p>
+            <a:pPr algn="ctr" indent="0" marL="0">
+              <a:buNone/>
+            </a:pPr>
+            <a:r>
+              <a:rPr lang="en-US" sz="1400" dirty="0">
+                <a:solidFill>
+                  <a:srgbClr val="FFFFFF"/>
+                </a:solidFill>
+                <a:latin typeface="Geist" pitchFamily="34" charset="0"/>
+                <a:ea typeface="Geist" pitchFamily="34" charset="-122"/>
+                <a:cs typeface="Geist" pitchFamily="34" charset="-120"/>
+              </a:rPr>
+              <a:t>S1  ·  360p</a:t>
+            </a:r>
+            <a:endParaRPr lang="en-US" sz="1400" dirty="0"/>
+          </a:p>
+        </p:txBody>
+      </p:sp>
+      <p:sp>
+        <p:nvSpPr>
+          <p:cNvPr id="14" name="Text 11"/>
+          <p:cNvSpPr/>
+          <p:nvPr/>
+        </p:nvSpPr>
+        <p:spPr>
+          <a:xfrm>
+            <a:off x="868680" y="3383280"/>
+            <a:ext cx="2926080" cy="201168"/>
+          </a:xfrm>
+          <a:prstGeom prst="rect">
+            <a:avLst/>
+          </a:prstGeom>
+          <a:noFill/>
+          <a:ln/>
+        </p:spPr>
+        <p:txBody>
+          <a:bodyPr wrap="square" lIns="0" tIns="0" rIns="0" bIns="0" rtlCol="0" anchor="ctr"/>
+          <a:lstStyle/>
+          <a:p>
+            <a:pPr algn="ctr" indent="0" marL="0">
+              <a:buNone/>
+            </a:pPr>
+            <a:r>
+              <a:rPr lang="en-US" sz="1100" dirty="0">
+                <a:solidFill>
+                  <a:srgbClr val="A8C7FA"/>
+                </a:solidFill>
+                <a:latin typeface="Geist" pitchFamily="34" charset="0"/>
+                <a:ea typeface="Geist" pitchFamily="34" charset="-122"/>
+                <a:cs typeface="Geist" pitchFamily="34" charset="-120"/>
+              </a:rPr>
+              <a:t>mid layer</a:t>
+            </a:r>
+            <a:endParaRPr lang="en-US" sz="1100" dirty="0"/>
+          </a:p>
+        </p:txBody>
+      </p:sp>
+      <p:sp>
+        <p:nvSpPr>
+          <p:cNvPr id="15" name="Shape 12"/>
+          <p:cNvSpPr/>
+          <p:nvPr/>
+        </p:nvSpPr>
+        <p:spPr>
+          <a:xfrm>
+            <a:off x="1325880" y="3730752"/>
+            <a:ext cx="2011680" cy="548640"/>
+          </a:xfrm>
+          <a:prstGeom prst="rect">
+            <a:avLst/>
+          </a:prstGeom>
+          <a:solidFill>
+            <a:srgbClr val="0B2347"/>
+          </a:solidFill>
+          <a:ln w="12700">
+            <a:solidFill>
+              <a:srgbClr val="22C55E"/>
+            </a:solidFill>
+            <a:prstDash val="solid"/>
+          </a:ln>
+        </p:spPr>
+      </p:sp>
+      <p:sp>
+        <p:nvSpPr>
+          <p:cNvPr id="16" name="Text 13"/>
+          <p:cNvSpPr/>
+          <p:nvPr/>
+        </p:nvSpPr>
+        <p:spPr>
+          <a:xfrm>
+            <a:off x="1325880" y="3767328"/>
+            <a:ext cx="2011680" cy="274320"/>
+          </a:xfrm>
+          <a:prstGeom prst="rect">
+            <a:avLst/>
+          </a:prstGeom>
+          <a:noFill/>
+          <a:ln/>
+        </p:spPr>
+        <p:txBody>
+          <a:bodyPr wrap="square" lIns="0" tIns="0" rIns="0" bIns="0" rtlCol="0" anchor="ctr"/>
+          <a:lstStyle/>
+          <a:p>
+            <a:pPr algn="ctr" indent="0" marL="0">
+              <a:buNone/>
+            </a:pPr>
+            <a:r>
+              <a:rPr lang="en-US" sz="1400" dirty="0">
+                <a:solidFill>
+                  <a:srgbClr val="FFFFFF"/>
+                </a:solidFill>
+                <a:latin typeface="Geist" pitchFamily="34" charset="0"/>
+                <a:ea typeface="Geist" pitchFamily="34" charset="-122"/>
+                <a:cs typeface="Geist" pitchFamily="34" charset="-120"/>
+              </a:rPr>
+              <a:t>S0  ·  180p</a:t>
+            </a:r>
+            <a:endParaRPr lang="en-US" sz="1400" dirty="0"/>
+          </a:p>
+        </p:txBody>
+      </p:sp>
+      <p:sp>
+        <p:nvSpPr>
+          <p:cNvPr id="17" name="Text 14"/>
+          <p:cNvSpPr/>
+          <p:nvPr/>
+        </p:nvSpPr>
+        <p:spPr>
+          <a:xfrm>
+            <a:off x="1325880" y="4023360"/>
+            <a:ext cx="2011680" cy="201168"/>
+          </a:xfrm>
+          <a:prstGeom prst="rect">
+            <a:avLst/>
+          </a:prstGeom>
+          <a:noFill/>
+          <a:ln/>
+        </p:spPr>
+        <p:txBody>
+          <a:bodyPr wrap="square" lIns="0" tIns="0" rIns="0" bIns="0" rtlCol="0" anchor="ctr"/>
+          <a:lstStyle/>
+          <a:p>
+            <a:pPr algn="ctr" indent="0" marL="0">
+              <a:buNone/>
+            </a:pPr>
+            <a:r>
+              <a:rPr lang="en-US" sz="1100" dirty="0">
+                <a:solidFill>
+                  <a:srgbClr val="A8C7FA"/>
+                </a:solidFill>
+                <a:latin typeface="Geist" pitchFamily="34" charset="0"/>
+                <a:ea typeface="Geist" pitchFamily="34" charset="-122"/>
+                <a:cs typeface="Geist" pitchFamily="34" charset="-120"/>
+              </a:rPr>
+              <a:t>base layer</a:t>
+            </a:r>
+            <a:endParaRPr lang="en-US" sz="1100" dirty="0"/>
+          </a:p>
+        </p:txBody>
+      </p:sp>
+      <p:sp>
+        <p:nvSpPr>
+          <p:cNvPr id="18" name="Text 15"/>
+          <p:cNvSpPr/>
+          <p:nvPr/>
+        </p:nvSpPr>
+        <p:spPr>
+          <a:xfrm>
+            <a:off x="4297680" y="3063240"/>
+            <a:ext cx="548640" cy="457200"/>
+          </a:xfrm>
+          <a:prstGeom prst="rect">
+            <a:avLst/>
+          </a:prstGeom>
+          <a:noFill/>
+          <a:ln/>
+        </p:spPr>
+        <p:txBody>
+          <a:bodyPr wrap="square" lIns="0" tIns="0" rIns="0" bIns="0" rtlCol="0" anchor="ctr"/>
+          <a:lstStyle/>
+          <a:p>
+            <a:pPr algn="ctr" indent="0" marL="0">
+              <a:buNone/>
+            </a:pPr>
+            <a:r>
+              <a:rPr lang="en-US" sz="2800" dirty="0">
+                <a:solidFill>
+                  <a:srgbClr val="005FFF"/>
+                </a:solidFill>
+                <a:latin typeface="Geist" pitchFamily="34" charset="0"/>
+                <a:ea typeface="Geist" pitchFamily="34" charset="-122"/>
+                <a:cs typeface="Geist" pitchFamily="34" charset="-120"/>
+              </a:rPr>
+              <a:t>→</a:t>
+            </a:r>
+            <a:endParaRPr lang="en-US" sz="2800" dirty="0"/>
+          </a:p>
+        </p:txBody>
+      </p:sp>
+      <p:sp>
+        <p:nvSpPr>
+          <p:cNvPr id="19" name="Text 16"/>
+          <p:cNvSpPr/>
+          <p:nvPr/>
+        </p:nvSpPr>
+        <p:spPr>
+          <a:xfrm>
+            <a:off x="4892040" y="1901952"/>
+            <a:ext cx="3840480" cy="201168"/>
+          </a:xfrm>
+          <a:prstGeom prst="rect">
+            <a:avLst/>
+          </a:prstGeom>
+          <a:noFill/>
+          <a:ln/>
+        </p:spPr>
+        <p:txBody>
+          <a:bodyPr wrap="square" lIns="0" tIns="0" rIns="0" bIns="0" rtlCol="0" anchor="ctr"/>
+          <a:lstStyle/>
+          <a:p>
+            <a:pPr indent="0" marL="0">
+              <a:buNone/>
+            </a:pPr>
+            <a:r>
+              <a:rPr lang="en-US" sz="1100" spc="120" kern="0" dirty="0">
+                <a:solidFill>
+                  <a:srgbClr val="EF4444"/>
+                </a:solidFill>
+                <a:latin typeface="Geist" pitchFamily="34" charset="0"/>
+                <a:ea typeface="Geist" pitchFamily="34" charset="-122"/>
+                <a:cs typeface="Geist" pitchFamily="34" charset="-120"/>
+              </a:rPr>
+              <a:t>ENCODER PRODUCED</a:t>
+            </a:r>
+            <a:endParaRPr lang="en-US" sz="1100" dirty="0"/>
+          </a:p>
+        </p:txBody>
+      </p:sp>
+      <p:sp>
+        <p:nvSpPr>
+          <p:cNvPr id="20" name="Text 17"/>
+          <p:cNvSpPr/>
+          <p:nvPr/>
+        </p:nvSpPr>
+        <p:spPr>
+          <a:xfrm>
+            <a:off x="4892040" y="2084832"/>
+            <a:ext cx="3840480" cy="292608"/>
+          </a:xfrm>
+          <a:prstGeom prst="rect">
+            <a:avLst/>
+          </a:prstGeom>
+          <a:noFill/>
+          <a:ln/>
+        </p:spPr>
+        <p:txBody>
+          <a:bodyPr wrap="square" lIns="0" tIns="0" rIns="0" bIns="0" rtlCol="0" anchor="ctr"/>
+          <a:lstStyle/>
+          <a:p>
+            <a:pPr indent="0" marL="0">
+              <a:buNone/>
+            </a:pPr>
+            <a:r>
               <a:rPr lang="en-US" sz="1600" dirty="0">
                 <a:solidFill>
                   <a:srgbClr val="FFFFFF"/>
@@ -6731,7 +7176,7 @@
                 <a:ea typeface="Geist" pitchFamily="34" charset="-122"/>
                 <a:cs typeface="Geist" pitchFamily="34" charset="-120"/>
               </a:rPr>
-              <a:t>03</a:t>
+              <a:t>1 flat stream</a:t>
             </a:r>
             <a:endParaRPr lang="en-US" sz="1600" dirty="0"/>
           </a:p>
@@ -6739,14 +7184,156 @@
       </p:sp>
       <p:sp>
         <p:nvSpPr>
-          <p:cNvPr id="6" name="Text 3"/>
-          <p:cNvSpPr/>
-          <p:nvPr/>
-        </p:nvSpPr>
-        <p:spPr>
-          <a:xfrm>
-            <a:off x="411480" y="2240280"/>
-            <a:ext cx="6400800" cy="1280160"/>
+          <p:cNvPr id="21" name="Shape 18"/>
+          <p:cNvSpPr/>
+          <p:nvPr/>
+        </p:nvSpPr>
+        <p:spPr>
+          <a:xfrm>
+            <a:off x="4892040" y="2450592"/>
+            <a:ext cx="3840480" cy="1828800"/>
+          </a:xfrm>
+          <a:prstGeom prst="rect">
+            <a:avLst/>
+          </a:prstGeom>
+          <a:solidFill>
+            <a:srgbClr val="3A1A1A"/>
+          </a:solidFill>
+          <a:ln w="12700">
+            <a:solidFill>
+              <a:srgbClr val="EF4444"/>
+            </a:solidFill>
+            <a:prstDash val="solid"/>
+          </a:ln>
+        </p:spPr>
+      </p:sp>
+      <p:sp>
+        <p:nvSpPr>
+          <p:cNvPr id="22" name="Text 19"/>
+          <p:cNvSpPr/>
+          <p:nvPr/>
+        </p:nvSpPr>
+        <p:spPr>
+          <a:xfrm>
+            <a:off x="4892040" y="2880360"/>
+            <a:ext cx="3840480" cy="411480"/>
+          </a:xfrm>
+          <a:prstGeom prst="rect">
+            <a:avLst/>
+          </a:prstGeom>
+          <a:noFill/>
+          <a:ln/>
+        </p:spPr>
+        <p:txBody>
+          <a:bodyPr wrap="square" lIns="0" tIns="0" rIns="0" bIns="0" rtlCol="0" anchor="ctr"/>
+          <a:lstStyle/>
+          <a:p>
+            <a:pPr algn="ctr" indent="0" marL="0">
+              <a:buNone/>
+            </a:pPr>
+            <a:r>
+              <a:rPr lang="en-US" sz="2800" dirty="0">
+                <a:solidFill>
+                  <a:srgbClr val="FFFFFF"/>
+                </a:solidFill>
+                <a:latin typeface="Geist" pitchFamily="34" charset="0"/>
+                <a:ea typeface="Geist" pitchFamily="34" charset="-122"/>
+                <a:cs typeface="Geist" pitchFamily="34" charset="-120"/>
+              </a:rPr>
+              <a:t>720p only</a:t>
+            </a:r>
+            <a:endParaRPr lang="en-US" sz="2800" dirty="0"/>
+          </a:p>
+        </p:txBody>
+      </p:sp>
+      <p:sp>
+        <p:nvSpPr>
+          <p:cNvPr id="23" name="Text 20"/>
+          <p:cNvSpPr/>
+          <p:nvPr/>
+        </p:nvSpPr>
+        <p:spPr>
+          <a:xfrm>
+            <a:off x="5074920" y="3337560"/>
+            <a:ext cx="3474720" cy="320040"/>
+          </a:xfrm>
+          <a:prstGeom prst="rect">
+            <a:avLst/>
+          </a:prstGeom>
+          <a:noFill/>
+          <a:ln/>
+        </p:spPr>
+        <p:txBody>
+          <a:bodyPr wrap="square" lIns="0" tIns="0" rIns="0" bIns="0" rtlCol="0" anchor="ctr"/>
+          <a:lstStyle/>
+          <a:p>
+            <a:pPr algn="ctr" indent="0" marL="0">
+              <a:buNone/>
+            </a:pPr>
+            <a:r>
+              <a:rPr lang="en-US" sz="1300" dirty="0">
+                <a:solidFill>
+                  <a:srgbClr val="A8C7FA"/>
+                </a:solidFill>
+                <a:latin typeface="Geist" pitchFamily="34" charset="0"/>
+                <a:ea typeface="Geist" pitchFamily="34" charset="-122"/>
+                <a:cs typeface="Geist" pitchFamily="34" charset="-120"/>
+              </a:rPr>
+              <a:t>No S1  ·  No S0  ·  Nothing to split</a:t>
+            </a:r>
+            <a:endParaRPr lang="en-US" sz="1300" dirty="0"/>
+          </a:p>
+        </p:txBody>
+      </p:sp>
+      <p:sp>
+        <p:nvSpPr>
+          <p:cNvPr id="24" name="Text 21"/>
+          <p:cNvSpPr/>
+          <p:nvPr/>
+        </p:nvSpPr>
+        <p:spPr>
+          <a:xfrm>
+            <a:off x="5074920" y="3703320"/>
+            <a:ext cx="3474720" cy="274320"/>
+          </a:xfrm>
+          <a:prstGeom prst="rect">
+            <a:avLst/>
+          </a:prstGeom>
+          <a:noFill/>
+          <a:ln/>
+        </p:spPr>
+        <p:txBody>
+          <a:bodyPr wrap="square" lIns="0" tIns="0" rIns="0" bIns="0" rtlCol="0" anchor="ctr"/>
+          <a:lstStyle/>
+          <a:p>
+            <a:pPr algn="ctr" indent="0" marL="0">
+              <a:buNone/>
+            </a:pPr>
+            <a:r>
+              <a:rPr lang="en-US" sz="1200" dirty="0">
+                <a:solidFill>
+                  <a:srgbClr val="8AABB8"/>
+                </a:solidFill>
+                <a:latin typeface="Geist" pitchFamily="34" charset="0"/>
+                <a:ea typeface="Geist" pitchFamily="34" charset="-122"/>
+                <a:cs typeface="Geist" pitchFamily="34" charset="-120"/>
+              </a:rPr>
+              <a:t>~1.4 Mbps sent  —  not starved</a:t>
+            </a:r>
+            <a:endParaRPr lang="en-US" sz="1200" dirty="0"/>
+          </a:p>
+        </p:txBody>
+      </p:sp>
+      <p:sp>
+        <p:nvSpPr>
+          <p:cNvPr id="25" name="Text 22"/>
+          <p:cNvSpPr/>
+          <p:nvPr/>
+        </p:nvSpPr>
+        <p:spPr>
+          <a:xfrm>
+            <a:off x="411480" y="4407408"/>
+            <a:ext cx="8321040" cy="320040"/>
           </a:xfrm>
           <a:prstGeom prst="rect">
             <a:avLst/>
@@ -6762,34 +7349,17 @@
               <a:buNone/>
             </a:pPr>
             <a:r>
-              <a:rPr lang="en-US" sz="4800" dirty="0">
-                <a:solidFill>
-                  <a:srgbClr val="FFFFFF"/>
-                </a:solidFill>
-                <a:latin typeface="Geist" pitchFamily="34" charset="0"/>
-                <a:ea typeface="Geist" pitchFamily="34" charset="-122"/>
-                <a:cs typeface="Geist" pitchFamily="34" charset="-120"/>
-              </a:rPr>
-              <a:t>Querying Hardware</a:t>
-            </a:r>
-            <a:endParaRPr lang="en-US" sz="4800" dirty="0"/>
-          </a:p>
-          <a:p>
-            <a:pPr indent="0" marL="0">
-              <a:buNone/>
-            </a:pPr>
-            <a:r>
-              <a:rPr lang="en-US" sz="4800" dirty="0">
-                <a:solidFill>
-                  <a:srgbClr val="FFFFFF"/>
-                </a:solidFill>
-                <a:latin typeface="Geist" pitchFamily="34" charset="0"/>
-                <a:ea typeface="Geist" pitchFamily="34" charset="-122"/>
-                <a:cs typeface="Geist" pitchFamily="34" charset="-120"/>
-              </a:rPr>
-              <a:t>Capabilities</a:t>
-            </a:r>
-            <a:endParaRPr lang="en-US" sz="4800" dirty="0"/>
+              <a:rPr lang="en-US" sz="1400" dirty="0">
+                <a:solidFill>
+                  <a:srgbClr val="A8C7FA"/>
+                </a:solidFill>
+                <a:latin typeface="Geist" pitchFamily="34" charset="0"/>
+                <a:ea typeface="Geist" pitchFamily="34" charset="-122"/>
+                <a:cs typeface="Geist" pitchFamily="34" charset="-120"/>
+              </a:rPr>
+              <a:t>SFU expected three layers. Hardware sent one. Stream marked poor.</a:t>
+            </a:r>
+            <a:endParaRPr lang="en-US" sz="1400" dirty="0"/>
           </a:p>
         </p:txBody>
       </p:sp>
@@ -6934,7 +7504,7 @@
                 <a:ea typeface="Geist" pitchFamily="34" charset="-122"/>
                 <a:cs typeface="Geist" pitchFamily="34" charset="-120"/>
               </a:rPr>
-              <a:t>HARDWARE CAPABILITIES</a:t>
+              <a:t>DEBUGGING</a:t>
             </a:r>
             <a:endParaRPr lang="en-US" sz="1000" dirty="0"/>
           </a:p>
@@ -6973,7 +7543,7 @@
                 <a:ea typeface="Geist" pitchFamily="34" charset="-122"/>
                 <a:cs typeface="Geist" pitchFamily="34" charset="-120"/>
               </a:rPr>
-              <a:t>MediaCodec SVC Support — Temporal Only</a:t>
+              <a:t>The Real Problem</a:t>
             </a:r>
             <a:endParaRPr lang="en-US" sz="3400" dirty="0"/>
           </a:p>
@@ -7006,14 +7576,78 @@
       </p:sp>
       <p:sp>
         <p:nvSpPr>
-          <p:cNvPr id="7" name="Shape 4"/>
-          <p:cNvSpPr/>
-          <p:nvPr/>
-        </p:nvSpPr>
-        <p:spPr>
-          <a:xfrm>
-            <a:off x="411480" y="1901952"/>
-            <a:ext cx="36576" cy="347472"/>
+          <p:cNvPr id="7" name="Text 4"/>
+          <p:cNvSpPr/>
+          <p:nvPr/>
+        </p:nvSpPr>
+        <p:spPr>
+          <a:xfrm>
+            <a:off x="411480" y="1874520"/>
+            <a:ext cx="8321040" cy="292608"/>
+          </a:xfrm>
+          <a:prstGeom prst="rect">
+            <a:avLst/>
+          </a:prstGeom>
+          <a:noFill/>
+          <a:ln/>
+        </p:spPr>
+        <p:txBody>
+          <a:bodyPr wrap="square" lIns="0" tIns="0" rIns="0" bIns="0" rtlCol="0" anchor="ctr"/>
+          <a:lstStyle/>
+          <a:p>
+            <a:pPr indent="0" marL="0">
+              <a:buNone/>
+            </a:pPr>
+            <a:r>
+              <a:rPr lang="en-US" sz="1300" dirty="0">
+                <a:solidFill>
+                  <a:srgbClr val="A8C7FA"/>
+                </a:solidFill>
+                <a:latin typeface="Geist" pitchFamily="34" charset="0"/>
+                <a:ea typeface="Geist" pitchFamily="34" charset="-122"/>
+                <a:cs typeface="Geist" pitchFamily="34" charset="-120"/>
+              </a:rPr>
+              <a:t>We stopped the thrashing loop. The 71 kbps figure was a stats bug. The SFU was still right — the stream was broken.</a:t>
+            </a:r>
+            <a:endParaRPr lang="en-US" sz="1300" dirty="0"/>
+          </a:p>
+        </p:txBody>
+      </p:sp>
+      <p:sp>
+        <p:nvSpPr>
+          <p:cNvPr id="8" name="Shape 5"/>
+          <p:cNvSpPr/>
+          <p:nvPr/>
+        </p:nvSpPr>
+        <p:spPr>
+          <a:xfrm>
+            <a:off x="411480" y="2286000"/>
+            <a:ext cx="4069080" cy="1965960"/>
+          </a:xfrm>
+          <a:prstGeom prst="rect">
+            <a:avLst/>
+          </a:prstGeom>
+          <a:solidFill>
+            <a:srgbClr val="0B2347"/>
+          </a:solidFill>
+          <a:ln w="12700">
+            <a:solidFill>
+              <a:srgbClr val="EF4444"/>
+            </a:solidFill>
+            <a:prstDash val="solid"/>
+          </a:ln>
+        </p:spPr>
+      </p:sp>
+      <p:sp>
+        <p:nvSpPr>
+          <p:cNvPr id="9" name="Shape 6"/>
+          <p:cNvSpPr/>
+          <p:nvPr/>
+        </p:nvSpPr>
+        <p:spPr>
+          <a:xfrm>
+            <a:off x="411480" y="2286000"/>
+            <a:ext cx="73152" cy="1965960"/>
           </a:xfrm>
           <a:prstGeom prst="rect">
             <a:avLst/>
@@ -7031,14 +7665,14 @@
       </p:sp>
       <p:sp>
         <p:nvSpPr>
-          <p:cNvPr id="8" name="Text 5"/>
-          <p:cNvSpPr/>
-          <p:nvPr/>
-        </p:nvSpPr>
-        <p:spPr>
-          <a:xfrm>
-            <a:off x="548640" y="1901952"/>
-            <a:ext cx="3931920" cy="347472"/>
+          <p:cNvPr id="10" name="Text 7"/>
+          <p:cNvSpPr/>
+          <p:nvPr/>
+        </p:nvSpPr>
+        <p:spPr>
+          <a:xfrm>
+            <a:off x="640080" y="2395728"/>
+            <a:ext cx="3657600" cy="201168"/>
           </a:xfrm>
           <a:prstGeom prst="rect">
             <a:avLst/>
@@ -7054,15 +7688,93 @@
               <a:buNone/>
             </a:pPr>
             <a:r>
+              <a:rPr lang="en-US" sz="1100" spc="120" kern="0" dirty="0">
+                <a:solidFill>
+                  <a:srgbClr val="EF4444"/>
+                </a:solidFill>
+                <a:latin typeface="Geist" pitchFamily="34" charset="0"/>
+                <a:ea typeface="Geist" pitchFamily="34" charset="-122"/>
+                <a:cs typeface="Geist" pitchFamily="34" charset="-120"/>
+              </a:rPr>
+              <a:t>HARDWARE VP9</a:t>
+            </a:r>
+            <a:endParaRPr lang="en-US" sz="1100" dirty="0"/>
+          </a:p>
+        </p:txBody>
+      </p:sp>
+      <p:sp>
+        <p:nvSpPr>
+          <p:cNvPr id="11" name="Text 8"/>
+          <p:cNvSpPr/>
+          <p:nvPr/>
+        </p:nvSpPr>
+        <p:spPr>
+          <a:xfrm>
+            <a:off x="640080" y="2633472"/>
+            <a:ext cx="3657600" cy="292608"/>
+          </a:xfrm>
+          <a:prstGeom prst="rect">
+            <a:avLst/>
+          </a:prstGeom>
+          <a:noFill/>
+          <a:ln/>
+        </p:spPr>
+        <p:txBody>
+          <a:bodyPr wrap="square" lIns="0" tIns="0" rIns="0" bIns="0" rtlCol="0" anchor="ctr"/>
+          <a:lstStyle/>
+          <a:p>
+            <a:pPr indent="0" marL="0">
+              <a:buNone/>
+            </a:pPr>
+            <a:r>
+              <a:rPr lang="en-US" sz="1800" dirty="0">
+                <a:solidFill>
+                  <a:srgbClr val="FFFFFF"/>
+                </a:solidFill>
+                <a:latin typeface="Geist" pitchFamily="34" charset="0"/>
+                <a:ea typeface="Geist" pitchFamily="34" charset="-122"/>
+                <a:cs typeface="Geist" pitchFamily="34" charset="-120"/>
+              </a:rPr>
+              <a:t>Temporal layers only</a:t>
+            </a:r>
+            <a:endParaRPr lang="en-US" sz="1800" dirty="0"/>
+          </a:p>
+        </p:txBody>
+      </p:sp>
+      <p:sp>
+        <p:nvSpPr>
+          <p:cNvPr id="12" name="Text 9"/>
+          <p:cNvSpPr/>
+          <p:nvPr/>
+        </p:nvSpPr>
+        <p:spPr>
+          <a:xfrm>
+            <a:off x="640080" y="2999232"/>
+            <a:ext cx="3657600" cy="1097280"/>
+          </a:xfrm>
+          <a:prstGeom prst="rect">
+            <a:avLst/>
+          </a:prstGeom>
+          <a:noFill/>
+          <a:ln/>
+        </p:spPr>
+        <p:txBody>
+          <a:bodyPr wrap="square" lIns="0" tIns="0" rIns="0" bIns="0" rtlCol="0" anchor="ctr"/>
+          <a:lstStyle/>
+          <a:p>
+            <a:pPr indent="0" marL="0">
+              <a:buNone/>
+            </a:pPr>
+            <a:r>
               <a:rPr lang="en-US" sz="1400" dirty="0">
                 <a:solidFill>
-                  <a:srgbClr val="22C55E"/>
-                </a:solidFill>
-                <a:latin typeface="Geist" pitchFamily="34" charset="0"/>
-                <a:ea typeface="Geist" pitchFamily="34" charset="-122"/>
-                <a:cs typeface="Geist" pitchFamily="34" charset="-120"/>
-              </a:rPr>
-              <a:t>What You Can Query</a:t>
+                  <a:srgbClr val="8AABB8"/>
+                </a:solidFill>
+                <a:latin typeface="Geist" pitchFamily="34" charset="0"/>
+                <a:ea typeface="Geist" pitchFamily="34" charset="-122"/>
+                <a:cs typeface="Geist" pitchFamily="34" charset="-120"/>
+              </a:rPr>
+              <a:t>Asked L3T3_KEY. Encoder sent one flat 720p stream. Wrapper hardcodes num_spatial_layers = 1. SFU expected three layers and marked the stream poor.</a:t>
             </a:r>
             <a:endParaRPr lang="en-US" sz="1400" dirty="0"/>
           </a:p>
@@ -7070,103 +7782,24 @@
       </p:sp>
       <p:sp>
         <p:nvSpPr>
-          <p:cNvPr id="9" name="Text 6"/>
-          <p:cNvSpPr/>
-          <p:nvPr/>
-        </p:nvSpPr>
-        <p:spPr>
-          <a:xfrm>
-            <a:off x="548640" y="2331720"/>
-            <a:ext cx="3931920" cy="1645920"/>
-          </a:xfrm>
-          <a:prstGeom prst="rect">
-            <a:avLst/>
-          </a:prstGeom>
-          <a:noFill/>
-          <a:ln/>
-        </p:spPr>
-        <p:txBody>
-          <a:bodyPr wrap="square" lIns="0" tIns="0" rIns="0" bIns="0" rtlCol="0" anchor="t"/>
-          <a:lstStyle/>
-          <a:p>
-            <a:pPr>
-              <a:spcAft>
-                <a:spcPts val="700"/>
-              </a:spcAft>
-            </a:pPr>
-            <a:r>
-              <a:rPr lang="en-US" sz="1400" dirty="0">
-                <a:solidFill>
-                  <a:srgbClr val="FFFFFF"/>
-                </a:solidFill>
-                <a:latin typeface="Geist" pitchFamily="34" charset="0"/>
-                <a:ea typeface="Geist" pitchFamily="34" charset="-122"/>
-                <a:cs typeface="Geist" pitchFamily="34" charset="-120"/>
-              </a:rPr>
-              <a:t>Supported resolutions &amp; bitrates</a:t>
-            </a:r>
-            <a:endParaRPr lang="en-US" sz="1400" dirty="0"/>
-          </a:p>
-          <a:p>
-            <a:pPr>
-              <a:spcAft>
-                <a:spcPts val="700"/>
-              </a:spcAft>
-            </a:pPr>
-            <a:r>
-              <a:rPr lang="en-US" sz="1400" dirty="0">
-                <a:solidFill>
-                  <a:srgbClr val="FFFFFF"/>
-                </a:solidFill>
-                <a:latin typeface="Geist" pitchFamily="34" charset="0"/>
-                <a:ea typeface="Geist" pitchFamily="34" charset="-122"/>
-                <a:cs typeface="Geist" pitchFamily="34" charset="-120"/>
-              </a:rPr>
-              <a:t>Profile levels</a:t>
-            </a:r>
-            <a:endParaRPr lang="en-US" sz="1400" dirty="0"/>
-          </a:p>
-          <a:p>
-            <a:pPr>
-              <a:spcAft>
-                <a:spcPts val="700"/>
-              </a:spcAft>
-            </a:pPr>
-            <a:r>
-              <a:rPr lang="en-US" sz="1400" dirty="0">
-                <a:solidFill>
-                  <a:srgbClr val="FFFFFF"/>
-                </a:solidFill>
-                <a:latin typeface="Geist" pitchFamily="34" charset="0"/>
-                <a:ea typeface="Geist" pitchFamily="34" charset="-122"/>
-                <a:cs typeface="Geist" pitchFamily="34" charset="-120"/>
-              </a:rPr>
-              <a:t>Temporal layering schemas (KEY_TEMPORAL_LAYERING)</a:t>
-            </a:r>
-            <a:endParaRPr lang="en-US" sz="1400" dirty="0"/>
-          </a:p>
-        </p:txBody>
-      </p:sp>
-      <p:sp>
-        <p:nvSpPr>
-          <p:cNvPr id="10" name="Shape 7"/>
-          <p:cNvSpPr/>
-          <p:nvPr/>
-        </p:nvSpPr>
-        <p:spPr>
-          <a:xfrm>
-            <a:off x="4590288" y="1874520"/>
-            <a:ext cx="10973" cy="2286000"/>
+          <p:cNvPr id="13" name="Shape 10"/>
+          <p:cNvSpPr/>
+          <p:nvPr/>
+        </p:nvSpPr>
+        <p:spPr>
+          <a:xfrm>
+            <a:off x="4663440" y="2286000"/>
+            <a:ext cx="4069080" cy="1965960"/>
           </a:xfrm>
           <a:prstGeom prst="rect">
             <a:avLst/>
           </a:prstGeom>
           <a:solidFill>
-            <a:srgbClr val="1E3A6E"/>
+            <a:srgbClr val="0B2347"/>
           </a:solidFill>
           <a:ln w="12700">
             <a:solidFill>
-              <a:srgbClr val="1E3A6E"/>
+              <a:srgbClr val="1A3D7A"/>
             </a:solidFill>
             <a:prstDash val="solid"/>
           </a:ln>
@@ -7174,14 +7807,14 @@
       </p:sp>
       <p:sp>
         <p:nvSpPr>
-          <p:cNvPr id="11" name="Shape 8"/>
-          <p:cNvSpPr/>
-          <p:nvPr/>
-        </p:nvSpPr>
-        <p:spPr>
-          <a:xfrm>
-            <a:off x="4709160" y="1901952"/>
-            <a:ext cx="36576" cy="347472"/>
+          <p:cNvPr id="14" name="Shape 11"/>
+          <p:cNvSpPr/>
+          <p:nvPr/>
+        </p:nvSpPr>
+        <p:spPr>
+          <a:xfrm>
+            <a:off x="4663440" y="2286000"/>
+            <a:ext cx="73152" cy="1965960"/>
           </a:xfrm>
           <a:prstGeom prst="rect">
             <a:avLst/>
@@ -7199,14 +7832,14 @@
       </p:sp>
       <p:sp>
         <p:nvSpPr>
-          <p:cNvPr id="12" name="Text 9"/>
-          <p:cNvSpPr/>
-          <p:nvPr/>
-        </p:nvSpPr>
-        <p:spPr>
-          <a:xfrm>
-            <a:off x="4846320" y="1901952"/>
-            <a:ext cx="3931920" cy="347472"/>
+          <p:cNvPr id="15" name="Text 12"/>
+          <p:cNvSpPr/>
+          <p:nvPr/>
+        </p:nvSpPr>
+        <p:spPr>
+          <a:xfrm>
+            <a:off x="4892040" y="2395728"/>
+            <a:ext cx="3657600" cy="201168"/>
           </a:xfrm>
           <a:prstGeom prst="rect">
             <a:avLst/>
@@ -7222,15 +7855,93 @@
               <a:buNone/>
             </a:pPr>
             <a:r>
+              <a:rPr lang="en-US" sz="1100" spc="120" kern="0" dirty="0">
+                <a:solidFill>
+                  <a:srgbClr val="22C55E"/>
+                </a:solidFill>
+                <a:latin typeface="Geist" pitchFamily="34" charset="0"/>
+                <a:ea typeface="Geist" pitchFamily="34" charset="-122"/>
+                <a:cs typeface="Geist" pitchFamily="34" charset="-120"/>
+              </a:rPr>
+              <a:t>SOFTWARE VP9</a:t>
+            </a:r>
+            <a:endParaRPr lang="en-US" sz="1100" dirty="0"/>
+          </a:p>
+        </p:txBody>
+      </p:sp>
+      <p:sp>
+        <p:nvSpPr>
+          <p:cNvPr id="16" name="Text 13"/>
+          <p:cNvSpPr/>
+          <p:nvPr/>
+        </p:nvSpPr>
+        <p:spPr>
+          <a:xfrm>
+            <a:off x="4892040" y="2633472"/>
+            <a:ext cx="3657600" cy="292608"/>
+          </a:xfrm>
+          <a:prstGeom prst="rect">
+            <a:avLst/>
+          </a:prstGeom>
+          <a:noFill/>
+          <a:ln/>
+        </p:spPr>
+        <p:txBody>
+          <a:bodyPr wrap="square" lIns="0" tIns="0" rIns="0" bIns="0" rtlCol="0" anchor="ctr"/>
+          <a:lstStyle/>
+          <a:p>
+            <a:pPr indent="0" marL="0">
+              <a:buNone/>
+            </a:pPr>
+            <a:r>
+              <a:rPr lang="en-US" sz="1800" dirty="0">
+                <a:solidFill>
+                  <a:srgbClr val="FFFFFF"/>
+                </a:solidFill>
+                <a:latin typeface="Geist" pitchFamily="34" charset="0"/>
+                <a:ea typeface="Geist" pitchFamily="34" charset="-122"/>
+                <a:cs typeface="Geist" pitchFamily="34" charset="-120"/>
+              </a:rPr>
+              <a:t>This never happens</a:t>
+            </a:r>
+            <a:endParaRPr lang="en-US" sz="1800" dirty="0"/>
+          </a:p>
+        </p:txBody>
+      </p:sp>
+      <p:sp>
+        <p:nvSpPr>
+          <p:cNvPr id="17" name="Text 14"/>
+          <p:cNvSpPr/>
+          <p:nvPr/>
+        </p:nvSpPr>
+        <p:spPr>
+          <a:xfrm>
+            <a:off x="4892040" y="2999232"/>
+            <a:ext cx="3657600" cy="1097280"/>
+          </a:xfrm>
+          <a:prstGeom prst="rect">
+            <a:avLst/>
+          </a:prstGeom>
+          <a:noFill/>
+          <a:ln/>
+        </p:spPr>
+        <p:txBody>
+          <a:bodyPr wrap="square" lIns="0" tIns="0" rIns="0" bIns="0" rtlCol="0" anchor="ctr"/>
+          <a:lstStyle/>
+          <a:p>
+            <a:pPr indent="0" marL="0">
+              <a:buNone/>
+            </a:pPr>
+            <a:r>
               <a:rPr lang="en-US" sz="1400" dirty="0">
                 <a:solidFill>
-                  <a:srgbClr val="EF4444"/>
-                </a:solidFill>
-                <a:latin typeface="Geist" pitchFamily="34" charset="0"/>
-                <a:ea typeface="Geist" pitchFamily="34" charset="-122"/>
-                <a:cs typeface="Geist" pitchFamily="34" charset="-120"/>
-              </a:rPr>
-              <a:t>What You Can't</a:t>
+                  <a:srgbClr val="8AABB8"/>
+                </a:solidFill>
+                <a:latin typeface="Geist" pitchFamily="34" charset="0"/>
+                <a:ea typeface="Geist" pitchFamily="34" charset="-122"/>
+                <a:cs typeface="Geist" pitchFamily="34" charset="-120"/>
+              </a:rPr>
+              <a:t>libvpx produces real L3T3 — all three spatial layers. It scales in-place. No encoder teardown. SFU quality stays stable.</a:t>
             </a:r>
             <a:endParaRPr lang="en-US" sz="1400" dirty="0"/>
           </a:p>
@@ -7238,93 +7949,14 @@
       </p:sp>
       <p:sp>
         <p:nvSpPr>
-          <p:cNvPr id="13" name="Text 10"/>
-          <p:cNvSpPr/>
-          <p:nvPr/>
-        </p:nvSpPr>
-        <p:spPr>
-          <a:xfrm>
-            <a:off x="4846320" y="2331720"/>
-            <a:ext cx="3931920" cy="1645920"/>
-          </a:xfrm>
-          <a:prstGeom prst="rect">
-            <a:avLst/>
-          </a:prstGeom>
-          <a:noFill/>
-          <a:ln/>
-        </p:spPr>
-        <p:txBody>
-          <a:bodyPr wrap="square" lIns="0" tIns="0" rIns="0" bIns="0" rtlCol="0" anchor="t"/>
-          <a:lstStyle/>
-          <a:p>
-            <a:pPr>
-              <a:spcAft>
-                <a:spcPts val="700"/>
-              </a:spcAft>
-            </a:pPr>
-            <a:r>
-              <a:rPr lang="en-US" sz="1400" dirty="0">
-                <a:solidFill>
-                  <a:srgbClr val="FFFFFF"/>
-                </a:solidFill>
-                <a:latin typeface="Geist" pitchFamily="34" charset="0"/>
-                <a:ea typeface="Geist" pitchFamily="34" charset="-122"/>
-                <a:cs typeface="Geist" pitchFamily="34" charset="-120"/>
-              </a:rPr>
-              <a:t>Spatial layer support</a:t>
-            </a:r>
-            <a:endParaRPr lang="en-US" sz="1400" dirty="0"/>
-          </a:p>
-          <a:p>
-            <a:pPr>
-              <a:spcAft>
-                <a:spcPts val="700"/>
-              </a:spcAft>
-            </a:pPr>
-            <a:r>
-              <a:rPr lang="en-US" sz="1400" dirty="0">
-                <a:solidFill>
-                  <a:srgbClr val="FFFFFF"/>
-                </a:solidFill>
-                <a:latin typeface="Geist" pitchFamily="34" charset="0"/>
-                <a:ea typeface="Geist" pitchFamily="34" charset="-122"/>
-                <a:cs typeface="Geist" pitchFamily="34" charset="-120"/>
-              </a:rPr>
-              <a:t>"Does this encoder do L3T3?"</a:t>
-            </a:r>
-            <a:endParaRPr lang="en-US" sz="1400" dirty="0"/>
-          </a:p>
-          <a:p>
-            <a:pPr>
-              <a:spcAft>
-                <a:spcPts val="700"/>
-              </a:spcAft>
-            </a:pPr>
-            <a:r>
-              <a:rPr lang="en-US" sz="1400" dirty="0">
-                <a:solidFill>
-                  <a:srgbClr val="FFFFFF"/>
-                </a:solidFill>
-                <a:latin typeface="Geist" pitchFamily="34" charset="0"/>
-                <a:ea typeface="Geist" pitchFamily="34" charset="-122"/>
-                <a:cs typeface="Geist" pitchFamily="34" charset="-120"/>
-              </a:rPr>
-              <a:t>Multi-resolution SVC capability</a:t>
-            </a:r>
-            <a:endParaRPr lang="en-US" sz="1400" dirty="0"/>
-          </a:p>
-        </p:txBody>
-      </p:sp>
-      <p:sp>
-        <p:nvSpPr>
-          <p:cNvPr id="14" name="Shape 11"/>
-          <p:cNvSpPr/>
-          <p:nvPr/>
-        </p:nvSpPr>
-        <p:spPr>
-          <a:xfrm>
-            <a:off x="411480" y="4023360"/>
-            <a:ext cx="8321040" cy="822960"/>
+          <p:cNvPr id="18" name="Shape 15"/>
+          <p:cNvSpPr/>
+          <p:nvPr/>
+        </p:nvSpPr>
+        <p:spPr>
+          <a:xfrm>
+            <a:off x="411480" y="4434840"/>
+            <a:ext cx="8321040" cy="457200"/>
           </a:xfrm>
           <a:prstGeom prst="rect">
             <a:avLst/>
@@ -7342,14 +7974,14 @@
       </p:sp>
       <p:sp>
         <p:nvSpPr>
-          <p:cNvPr id="15" name="Text 12"/>
-          <p:cNvSpPr/>
-          <p:nvPr/>
-        </p:nvSpPr>
-        <p:spPr>
-          <a:xfrm>
-            <a:off x="594360" y="4114800"/>
-            <a:ext cx="7955280" cy="640080"/>
+          <p:cNvPr id="19" name="Text 16"/>
+          <p:cNvSpPr/>
+          <p:nvPr/>
+        </p:nvSpPr>
+        <p:spPr>
+          <a:xfrm>
+            <a:off x="594360" y="4434840"/>
+            <a:ext cx="7955280" cy="457200"/>
           </a:xfrm>
           <a:prstGeom prst="rect">
             <a:avLst/>
@@ -7365,17 +7997,17 @@
               <a:buNone/>
             </a:pPr>
             <a:r>
-              <a:rPr lang="en-US" sz="1250" dirty="0">
-                <a:solidFill>
-                  <a:srgbClr val="A8C7FA"/>
-                </a:solidFill>
-                <a:latin typeface="Geist" pitchFamily="34" charset="0"/>
-                <a:ea typeface="Geist" pitchFamily="34" charset="-122"/>
-                <a:cs typeface="Geist" pitchFamily="34" charset="-120"/>
-              </a:rPr>
-              <a:t>Android 17 (API 37) adds getSupportedLayeringSchemas() — but only returns temporal schemas like webrtc.svc.l1tN. The platform confirms: hardware SVC = temporal only.</a:t>
-            </a:r>
-            <a:endParaRPr lang="en-US" sz="1250" dirty="0"/>
+              <a:rPr lang="en-US" sz="1400" dirty="0">
+                <a:solidFill>
+                  <a:srgbClr val="FFFFFF"/>
+                </a:solidFill>
+                <a:latin typeface="Geist" pitchFamily="34" charset="0"/>
+                <a:ea typeface="Geist" pitchFamily="34" charset="-122"/>
+                <a:cs typeface="Geist" pitchFamily="34" charset="-120"/>
+              </a:rPr>
+              <a:t>The encoder cannot produce spatial layers. That is what the SFU was scoring. Everything else was noise.</a:t>
+            </a:r>
+            <a:endParaRPr lang="en-US" sz="1400" dirty="0"/>
           </a:p>
         </p:txBody>
       </p:sp>
@@ -7545,7 +8177,7 @@
                 <a:ea typeface="Geist" pitchFamily="34" charset="-122"/>
                 <a:cs typeface="Geist" pitchFamily="34" charset="-120"/>
               </a:rPr>
-              <a:t>04</a:t>
+              <a:t>03</a:t>
             </a:r>
             <a:endParaRPr lang="en-US" sz="1600" dirty="0"/>
           </a:p>
@@ -7560,7 +8192,7 @@
         <p:spPr>
           <a:xfrm>
             <a:off x="411480" y="2240280"/>
-            <a:ext cx="6400800" cy="1097280"/>
+            <a:ext cx="6400800" cy="1280160"/>
           </a:xfrm>
           <a:prstGeom prst="rect">
             <a:avLst/>
@@ -7576,7 +8208,7 @@
               <a:buNone/>
             </a:pPr>
             <a:r>
-              <a:rPr lang="en-US" sz="5400" dirty="0">
+              <a:rPr lang="en-US" sz="4800" dirty="0">
                 <a:solidFill>
                   <a:srgbClr val="FFFFFF"/>
                 </a:solidFill>
@@ -7584,9 +8216,26 @@
                 <a:ea typeface="Geist" pitchFamily="34" charset="-122"/>
                 <a:cs typeface="Geist" pitchFamily="34" charset="-120"/>
               </a:rPr>
-              <a:t>Way Forward</a:t>
-            </a:r>
-            <a:endParaRPr lang="en-US" sz="5400" dirty="0"/>
+              <a:t>Querying Hardware</a:t>
+            </a:r>
+            <a:endParaRPr lang="en-US" sz="4800" dirty="0"/>
+          </a:p>
+          <a:p>
+            <a:pPr indent="0" marL="0">
+              <a:buNone/>
+            </a:pPr>
+            <a:r>
+              <a:rPr lang="en-US" sz="4800" dirty="0">
+                <a:solidFill>
+                  <a:srgbClr val="FFFFFF"/>
+                </a:solidFill>
+                <a:latin typeface="Geist" pitchFamily="34" charset="0"/>
+                <a:ea typeface="Geist" pitchFamily="34" charset="-122"/>
+                <a:cs typeface="Geist" pitchFamily="34" charset="-120"/>
+              </a:rPr>
+              <a:t>Capabilities</a:t>
+            </a:r>
+            <a:endParaRPr lang="en-US" sz="4800" dirty="0"/>
           </a:p>
         </p:txBody>
       </p:sp>
@@ -7731,7 +8380,7 @@
                 <a:ea typeface="Geist" pitchFamily="34" charset="-122"/>
                 <a:cs typeface="Geist" pitchFamily="34" charset="-120"/>
               </a:rPr>
-              <a:t>WAY FORWARD</a:t>
+              <a:t>HARDWARE CAPABILITIES</a:t>
             </a:r>
             <a:endParaRPr lang="en-US" sz="1000" dirty="0"/>
           </a:p>
@@ -7770,7 +8419,7 @@
                 <a:ea typeface="Geist" pitchFamily="34" charset="-122"/>
                 <a:cs typeface="Geist" pitchFamily="34" charset="-120"/>
               </a:rPr>
-              <a:t>Software VP9 (libvpx) — Pros &amp; Cons</a:t>
+              <a:t>MediaCodec SVC Support — Temporal Only</a:t>
             </a:r>
             <a:endParaRPr lang="en-US" sz="3400" dirty="0"/>
           </a:p>
@@ -7859,7 +8508,7 @@
                 <a:ea typeface="Geist" pitchFamily="34" charset="-122"/>
                 <a:cs typeface="Geist" pitchFamily="34" charset="-120"/>
               </a:rPr>
-              <a:t>✓ Pros</a:t>
+              <a:t>What You Can Query</a:t>
             </a:r>
             <a:endParaRPr lang="en-US" sz="1400" dirty="0"/>
           </a:p>
@@ -7874,7 +8523,7 @@
         <p:spPr>
           <a:xfrm>
             <a:off x="548640" y="2331720"/>
-            <a:ext cx="3931920" cy="1828800"/>
+            <a:ext cx="3931920" cy="1645920"/>
           </a:xfrm>
           <a:prstGeom prst="rect">
             <a:avLst/>
@@ -7888,7 +8537,7 @@
           <a:p>
             <a:pPr>
               <a:spcAft>
-                <a:spcPts val="800"/>
+                <a:spcPts val="700"/>
               </a:spcAft>
             </a:pPr>
             <a:r>
@@ -7900,14 +8549,14 @@
                 <a:ea typeface="Geist" pitchFamily="34" charset="-122"/>
                 <a:cs typeface="Geist" pitchFamily="34" charset="-120"/>
               </a:rPr>
-              <a:t>True L3T3 — all 3 spatial layers</a:t>
+              <a:t>Supported resolutions &amp; bitrates</a:t>
             </a:r>
             <a:endParaRPr lang="en-US" sz="1400" dirty="0"/>
           </a:p>
           <a:p>
             <a:pPr>
               <a:spcAft>
-                <a:spcPts val="800"/>
+                <a:spcPts val="700"/>
               </a:spcAft>
             </a:pPr>
             <a:r>
@@ -7919,14 +8568,14 @@
                 <a:ea typeface="Geist" pitchFamily="34" charset="-122"/>
                 <a:cs typeface="Geist" pitchFamily="34" charset="-120"/>
               </a:rPr>
-              <a:t>No encoder re-creation issues</a:t>
+              <a:t>Profile levels</a:t>
             </a:r>
             <a:endParaRPr lang="en-US" sz="1400" dirty="0"/>
           </a:p>
           <a:p>
             <a:pPr>
               <a:spcAft>
-                <a:spcPts val="800"/>
+                <a:spcPts val="700"/>
               </a:spcAft>
             </a:pPr>
             <a:r>
@@ -7938,7 +8587,7 @@
                 <a:ea typeface="Geist" pitchFamily="34" charset="-122"/>
                 <a:cs typeface="Geist" pitchFamily="34" charset="-120"/>
               </a:rPr>
-              <a:t>SFU quality stays stable</a:t>
+              <a:t>Temporal layering schemas (KEY_TEMPORAL_LAYERING)</a:t>
             </a:r>
             <a:endParaRPr lang="en-US" sz="1400" dirty="0"/>
           </a:p>
@@ -8027,7 +8676,7 @@
                 <a:ea typeface="Geist" pitchFamily="34" charset="-122"/>
                 <a:cs typeface="Geist" pitchFamily="34" charset="-120"/>
               </a:rPr>
-              <a:t>✗ Cons</a:t>
+              <a:t>What You Can't</a:t>
             </a:r>
             <a:endParaRPr lang="en-US" sz="1400" dirty="0"/>
           </a:p>
@@ -8042,7 +8691,7 @@
         <p:spPr>
           <a:xfrm>
             <a:off x="4846320" y="2331720"/>
-            <a:ext cx="3931920" cy="1828800"/>
+            <a:ext cx="3931920" cy="1645920"/>
           </a:xfrm>
           <a:prstGeom prst="rect">
             <a:avLst/>
@@ -8056,7 +8705,7 @@
           <a:p>
             <a:pPr>
               <a:spcAft>
-                <a:spcPts val="800"/>
+                <a:spcPts val="700"/>
               </a:spcAft>
             </a:pPr>
             <a:r>
@@ -8068,14 +8717,14 @@
                 <a:ea typeface="Geist" pitchFamily="34" charset="-122"/>
                 <a:cs typeface="Geist" pitchFamily="34" charset="-120"/>
               </a:rPr>
-              <a:t>High CPU → qualityLimitationReason: cpu</a:t>
+              <a:t>Spatial layer support</a:t>
             </a:r>
             <a:endParaRPr lang="en-US" sz="1400" dirty="0"/>
           </a:p>
           <a:p>
             <a:pPr>
               <a:spcAft>
-                <a:spcPts val="800"/>
+                <a:spcPts val="700"/>
               </a:spcAft>
             </a:pPr>
             <a:r>
@@ -8087,14 +8736,14 @@
                 <a:ea typeface="Geist" pitchFamily="34" charset="-122"/>
                 <a:cs typeface="Geist" pitchFamily="34" charset="-120"/>
               </a:rPr>
-              <a:t>Battery drains significantly faster</a:t>
+              <a:t>"Does this encoder do L3T3?"</a:t>
             </a:r>
             <a:endParaRPr lang="en-US" sz="1400" dirty="0"/>
           </a:p>
           <a:p>
             <a:pPr>
               <a:spcAft>
-                <a:spcPts val="800"/>
+                <a:spcPts val="700"/>
               </a:spcAft>
             </a:pPr>
             <a:r>
@@ -8106,7 +8755,7 @@
                 <a:ea typeface="Geist" pitchFamily="34" charset="-122"/>
                 <a:cs typeface="Geist" pitchFamily="34" charset="-120"/>
               </a:rPr>
-              <a:t>Frame rate may drop under load</a:t>
+              <a:t>Multi-resolution SVC capability</a:t>
             </a:r>
             <a:endParaRPr lang="en-US" sz="1400" dirty="0"/>
           </a:p>
@@ -8114,14 +8763,39 @@
       </p:sp>
       <p:sp>
         <p:nvSpPr>
-          <p:cNvPr id="14" name="Text 11"/>
-          <p:cNvSpPr/>
-          <p:nvPr/>
-        </p:nvSpPr>
-        <p:spPr>
-          <a:xfrm>
-            <a:off x="411480" y="4389120"/>
-            <a:ext cx="8321040" cy="365760"/>
+          <p:cNvPr id="14" name="Shape 11"/>
+          <p:cNvSpPr/>
+          <p:nvPr/>
+        </p:nvSpPr>
+        <p:spPr>
+          <a:xfrm>
+            <a:off x="411480" y="4023360"/>
+            <a:ext cx="8321040" cy="822960"/>
+          </a:xfrm>
+          <a:prstGeom prst="rect">
+            <a:avLst/>
+          </a:prstGeom>
+          <a:solidFill>
+            <a:srgbClr val="0B2347"/>
+          </a:solidFill>
+          <a:ln w="12700">
+            <a:solidFill>
+              <a:srgbClr val="005FFF"/>
+            </a:solidFill>
+            <a:prstDash val="solid"/>
+          </a:ln>
+        </p:spPr>
+      </p:sp>
+      <p:sp>
+        <p:nvSpPr>
+          <p:cNvPr id="15" name="Text 12"/>
+          <p:cNvSpPr/>
+          <p:nvPr/>
+        </p:nvSpPr>
+        <p:spPr>
+          <a:xfrm>
+            <a:off x="594360" y="4114800"/>
+            <a:ext cx="7955280" cy="640080"/>
           </a:xfrm>
           <a:prstGeom prst="rect">
             <a:avLst/>
@@ -8137,7 +8811,7 @@
               <a:buNone/>
             </a:pPr>
             <a:r>
-              <a:rPr lang="en-US" sz="1300" dirty="0">
+              <a:rPr lang="en-US" sz="1250" dirty="0">
                 <a:solidFill>
                   <a:srgbClr val="A8C7FA"/>
                 </a:solidFill>
@@ -8145,9 +8819,9 @@
                 <a:ea typeface="Geist" pitchFamily="34" charset="-122"/>
                 <a:cs typeface="Geist" pitchFamily="34" charset="-120"/>
               </a:rPr>
-              <a:t>Today's only complete fix for spatial SVC — but the CPU/battery cost is real on mobile.</a:t>
-            </a:r>
-            <a:endParaRPr lang="en-US" sz="1300" dirty="0"/>
+              <a:t>Android 17 (API 37) adds getSupportedLayeringSchemas() — but only returns temporal schemas like webrtc.svc.l1tN. The platform confirms: hardware SVC = temporal only.</a:t>
+            </a:r>
+            <a:endParaRPr lang="en-US" sz="1250" dirty="0"/>
           </a:p>
         </p:txBody>
       </p:sp>
@@ -8261,6 +8935,217 @@
       </p:sp>
       <p:sp>
         <p:nvSpPr>
+          <p:cNvPr id="4" name="Shape 1"/>
+          <p:cNvSpPr/>
+          <p:nvPr/>
+        </p:nvSpPr>
+        <p:spPr>
+          <a:xfrm>
+            <a:off x="411480" y="1645920"/>
+            <a:ext cx="502920" cy="502920"/>
+          </a:xfrm>
+          <a:prstGeom prst="rect">
+            <a:avLst/>
+          </a:prstGeom>
+          <a:solidFill>
+            <a:srgbClr val="005FFF"/>
+          </a:solidFill>
+          <a:ln w="12700">
+            <a:solidFill>
+              <a:srgbClr val="005FFF"/>
+            </a:solidFill>
+            <a:prstDash val="solid"/>
+          </a:ln>
+        </p:spPr>
+      </p:sp>
+      <p:sp>
+        <p:nvSpPr>
+          <p:cNvPr id="5" name="Text 2"/>
+          <p:cNvSpPr/>
+          <p:nvPr/>
+        </p:nvSpPr>
+        <p:spPr>
+          <a:xfrm>
+            <a:off x="411480" y="1645920"/>
+            <a:ext cx="502920" cy="502920"/>
+          </a:xfrm>
+          <a:prstGeom prst="rect">
+            <a:avLst/>
+          </a:prstGeom>
+          <a:noFill/>
+          <a:ln/>
+        </p:spPr>
+        <p:txBody>
+          <a:bodyPr wrap="square" lIns="0" tIns="0" rIns="0" bIns="0" rtlCol="0" anchor="ctr"/>
+          <a:lstStyle/>
+          <a:p>
+            <a:pPr algn="ctr" indent="0" marL="0">
+              <a:buNone/>
+            </a:pPr>
+            <a:r>
+              <a:rPr lang="en-US" sz="1600" dirty="0">
+                <a:solidFill>
+                  <a:srgbClr val="FFFFFF"/>
+                </a:solidFill>
+                <a:latin typeface="Geist" pitchFamily="34" charset="0"/>
+                <a:ea typeface="Geist" pitchFamily="34" charset="-122"/>
+                <a:cs typeface="Geist" pitchFamily="34" charset="-120"/>
+              </a:rPr>
+              <a:t>04</a:t>
+            </a:r>
+            <a:endParaRPr lang="en-US" sz="1600" dirty="0"/>
+          </a:p>
+        </p:txBody>
+      </p:sp>
+      <p:sp>
+        <p:nvSpPr>
+          <p:cNvPr id="6" name="Text 3"/>
+          <p:cNvSpPr/>
+          <p:nvPr/>
+        </p:nvSpPr>
+        <p:spPr>
+          <a:xfrm>
+            <a:off x="411480" y="2240280"/>
+            <a:ext cx="6400800" cy="1097280"/>
+          </a:xfrm>
+          <a:prstGeom prst="rect">
+            <a:avLst/>
+          </a:prstGeom>
+          <a:noFill/>
+          <a:ln/>
+        </p:spPr>
+        <p:txBody>
+          <a:bodyPr wrap="square" lIns="0" tIns="0" rIns="0" bIns="0" rtlCol="0" anchor="ctr"/>
+          <a:lstStyle/>
+          <a:p>
+            <a:pPr indent="0" marL="0">
+              <a:buNone/>
+            </a:pPr>
+            <a:r>
+              <a:rPr lang="en-US" sz="5400" dirty="0">
+                <a:solidFill>
+                  <a:srgbClr val="FFFFFF"/>
+                </a:solidFill>
+                <a:latin typeface="Geist" pitchFamily="34" charset="0"/>
+                <a:ea typeface="Geist" pitchFamily="34" charset="-122"/>
+                <a:cs typeface="Geist" pitchFamily="34" charset="-120"/>
+              </a:rPr>
+              <a:t>Way Forward</a:t>
+            </a:r>
+            <a:endParaRPr lang="en-US" sz="5400" dirty="0"/>
+          </a:p>
+        </p:txBody>
+      </p:sp>
+    </p:spTree>
+  </p:cSld>
+  <p:clrMapOvr>
+    <a:masterClrMapping/>
+  </p:clrMapOvr>
+</p:sld>
+</file>
+
+<file path=ppt/slides/slide19.xml><?xml version="1.0" encoding="utf-8"?>
+<p:sld xmlns:a="http://schemas.openxmlformats.org/drawingml/2006/main" xmlns:r="http://schemas.openxmlformats.org/officeDocument/2006/relationships" xmlns:p="http://schemas.openxmlformats.org/presentationml/2006/main">
+  <p:cSld name="Slide 19">
+    <p:bg>
+      <p:bgPr>
+        <a:blipFill dpi="0" rotWithShape="1">
+          <a:blip r:embed="rId1">
+            <a:lum/>
+          </a:blip>
+          <a:srcRect/>
+          <a:stretch>
+            <a:fillRect/>
+          </a:stretch>
+        </a:blipFill>
+        <a:effectLst/>
+      </p:bgPr>
+    </p:bg>
+    <p:spTree>
+      <p:nvGrpSpPr>
+        <p:cNvPr id="1" name=""/>
+        <p:cNvGrpSpPr/>
+        <p:nvPr/>
+      </p:nvGrpSpPr>
+      <p:grpSpPr>
+        <a:xfrm>
+          <a:off x="0" y="0"/>
+          <a:ext cx="0" cy="0"/>
+          <a:chOff x="0" y="0"/>
+          <a:chExt cx="0" cy="0"/>
+        </a:xfrm>
+      </p:grpSpPr>
+      <p:pic>
+        <p:nvPicPr>
+          <p:cNvPr id="2" name="Image 0" descr="preencoded.png">    </p:cNvPr>
+          <p:cNvPicPr>
+            <a:picLocks noChangeAspect="1"/>
+          </p:cNvPicPr>
+          <p:nvPr/>
+        </p:nvPicPr>
+        <p:blipFill>
+          <a:blip r:embed="rId2">
+            <a:extLst>
+              <a:ext uri="{96DAC541-7B7A-43D3-8B79-37D633B846F1}">
+                <asvg:svgBlip xmlns:asvg="http://schemas.microsoft.com/office/drawing/2016/SVG/main" r:embed="rId3"/>
+              </a:ext>
+            </a:extLst>
+          </a:blip>
+          <a:stretch>
+            <a:fillRect/>
+          </a:stretch>
+        </p:blipFill>
+        <p:spPr>
+          <a:xfrm>
+            <a:off x="228600" y="4709160"/>
+            <a:ext cx="256032" cy="256032"/>
+          </a:xfrm>
+          <a:prstGeom prst="rect">
+            <a:avLst/>
+          </a:prstGeom>
+        </p:spPr>
+      </p:pic>
+      <p:sp>
+        <p:nvSpPr>
+          <p:cNvPr id="3" name="Text 0"/>
+          <p:cNvSpPr/>
+          <p:nvPr/>
+        </p:nvSpPr>
+        <p:spPr>
+          <a:xfrm>
+            <a:off x="8046720" y="164592"/>
+            <a:ext cx="914400" cy="228600"/>
+          </a:xfrm>
+          <a:prstGeom prst="rect">
+            <a:avLst/>
+          </a:prstGeom>
+          <a:noFill/>
+          <a:ln/>
+        </p:spPr>
+        <p:txBody>
+          <a:bodyPr wrap="square" lIns="0" tIns="0" rIns="0" bIns="0" rtlCol="0" anchor="ctr"/>
+          <a:lstStyle/>
+          <a:p>
+            <a:pPr algn="r" indent="0" marL="0">
+              <a:buNone/>
+            </a:pPr>
+            <a:r>
+              <a:rPr lang="en-US" sz="900" dirty="0">
+                <a:solidFill>
+                  <a:srgbClr val="A8C7FA"/>
+                </a:solidFill>
+                <a:latin typeface="Geist" pitchFamily="34" charset="0"/>
+                <a:ea typeface="Geist" pitchFamily="34" charset="-122"/>
+                <a:cs typeface="Geist" pitchFamily="34" charset="-120"/>
+              </a:rPr>
+              <a:t>Aug 2026</a:t>
+            </a:r>
+            <a:endParaRPr lang="en-US" sz="900" dirty="0"/>
+          </a:p>
+        </p:txBody>
+      </p:sp>
+      <p:sp>
+        <p:nvSpPr>
           <p:cNvPr id="4" name="Text 1"/>
           <p:cNvSpPr/>
           <p:nvPr/>
@@ -8331,7 +9216,7 @@
                 <a:ea typeface="Geist" pitchFamily="34" charset="-122"/>
                 <a:cs typeface="Geist" pitchFamily="34" charset="-120"/>
               </a:rPr>
-              <a:t>Production Data — Android Is the Outlier</a:t>
+              <a:t>Software VP9 (libvpx) — Pros &amp; Cons</a:t>
             </a:r>
             <a:endParaRPr lang="en-US" sz="3400" dirty="0"/>
           </a:p>
@@ -8364,6 +9249,1101 @@
       </p:sp>
       <p:sp>
         <p:nvSpPr>
+          <p:cNvPr id="7" name="Shape 4"/>
+          <p:cNvSpPr/>
+          <p:nvPr/>
+        </p:nvSpPr>
+        <p:spPr>
+          <a:xfrm>
+            <a:off x="411480" y="1901952"/>
+            <a:ext cx="36576" cy="347472"/>
+          </a:xfrm>
+          <a:prstGeom prst="rect">
+            <a:avLst/>
+          </a:prstGeom>
+          <a:solidFill>
+            <a:srgbClr val="005FFF"/>
+          </a:solidFill>
+          <a:ln w="12700">
+            <a:solidFill>
+              <a:srgbClr val="005FFF"/>
+            </a:solidFill>
+            <a:prstDash val="solid"/>
+          </a:ln>
+        </p:spPr>
+      </p:sp>
+      <p:sp>
+        <p:nvSpPr>
+          <p:cNvPr id="8" name="Text 5"/>
+          <p:cNvSpPr/>
+          <p:nvPr/>
+        </p:nvSpPr>
+        <p:spPr>
+          <a:xfrm>
+            <a:off x="548640" y="1901952"/>
+            <a:ext cx="3931920" cy="347472"/>
+          </a:xfrm>
+          <a:prstGeom prst="rect">
+            <a:avLst/>
+          </a:prstGeom>
+          <a:noFill/>
+          <a:ln/>
+        </p:spPr>
+        <p:txBody>
+          <a:bodyPr wrap="square" lIns="0" tIns="0" rIns="0" bIns="0" rtlCol="0" anchor="ctr"/>
+          <a:lstStyle/>
+          <a:p>
+            <a:pPr indent="0" marL="0">
+              <a:buNone/>
+            </a:pPr>
+            <a:r>
+              <a:rPr lang="en-US" sz="1400" dirty="0">
+                <a:solidFill>
+                  <a:srgbClr val="22C55E"/>
+                </a:solidFill>
+                <a:latin typeface="Geist" pitchFamily="34" charset="0"/>
+                <a:ea typeface="Geist" pitchFamily="34" charset="-122"/>
+                <a:cs typeface="Geist" pitchFamily="34" charset="-120"/>
+              </a:rPr>
+              <a:t>✓ Pros</a:t>
+            </a:r>
+            <a:endParaRPr lang="en-US" sz="1400" dirty="0"/>
+          </a:p>
+        </p:txBody>
+      </p:sp>
+      <p:sp>
+        <p:nvSpPr>
+          <p:cNvPr id="9" name="Text 6"/>
+          <p:cNvSpPr/>
+          <p:nvPr/>
+        </p:nvSpPr>
+        <p:spPr>
+          <a:xfrm>
+            <a:off x="548640" y="2331720"/>
+            <a:ext cx="3931920" cy="1828800"/>
+          </a:xfrm>
+          <a:prstGeom prst="rect">
+            <a:avLst/>
+          </a:prstGeom>
+          <a:noFill/>
+          <a:ln/>
+        </p:spPr>
+        <p:txBody>
+          <a:bodyPr wrap="square" lIns="0" tIns="0" rIns="0" bIns="0" rtlCol="0" anchor="t"/>
+          <a:lstStyle/>
+          <a:p>
+            <a:pPr>
+              <a:spcAft>
+                <a:spcPts val="800"/>
+              </a:spcAft>
+            </a:pPr>
+            <a:r>
+              <a:rPr lang="en-US" sz="1400" dirty="0">
+                <a:solidFill>
+                  <a:srgbClr val="FFFFFF"/>
+                </a:solidFill>
+                <a:latin typeface="Geist" pitchFamily="34" charset="0"/>
+                <a:ea typeface="Geist" pitchFamily="34" charset="-122"/>
+                <a:cs typeface="Geist" pitchFamily="34" charset="-120"/>
+              </a:rPr>
+              <a:t>True L3T3 — all 3 spatial layers</a:t>
+            </a:r>
+            <a:endParaRPr lang="en-US" sz="1400" dirty="0"/>
+          </a:p>
+          <a:p>
+            <a:pPr>
+              <a:spcAft>
+                <a:spcPts val="800"/>
+              </a:spcAft>
+            </a:pPr>
+            <a:r>
+              <a:rPr lang="en-US" sz="1400" dirty="0">
+                <a:solidFill>
+                  <a:srgbClr val="FFFFFF"/>
+                </a:solidFill>
+                <a:latin typeface="Geist" pitchFamily="34" charset="0"/>
+                <a:ea typeface="Geist" pitchFamily="34" charset="-122"/>
+                <a:cs typeface="Geist" pitchFamily="34" charset="-120"/>
+              </a:rPr>
+              <a:t>No encoder re-creation issues</a:t>
+            </a:r>
+            <a:endParaRPr lang="en-US" sz="1400" dirty="0"/>
+          </a:p>
+          <a:p>
+            <a:pPr>
+              <a:spcAft>
+                <a:spcPts val="800"/>
+              </a:spcAft>
+            </a:pPr>
+            <a:r>
+              <a:rPr lang="en-US" sz="1400" dirty="0">
+                <a:solidFill>
+                  <a:srgbClr val="FFFFFF"/>
+                </a:solidFill>
+                <a:latin typeface="Geist" pitchFamily="34" charset="0"/>
+                <a:ea typeface="Geist" pitchFamily="34" charset="-122"/>
+                <a:cs typeface="Geist" pitchFamily="34" charset="-120"/>
+              </a:rPr>
+              <a:t>SFU quality stays stable</a:t>
+            </a:r>
+            <a:endParaRPr lang="en-US" sz="1400" dirty="0"/>
+          </a:p>
+        </p:txBody>
+      </p:sp>
+      <p:sp>
+        <p:nvSpPr>
+          <p:cNvPr id="10" name="Shape 7"/>
+          <p:cNvSpPr/>
+          <p:nvPr/>
+        </p:nvSpPr>
+        <p:spPr>
+          <a:xfrm>
+            <a:off x="4590288" y="1874520"/>
+            <a:ext cx="10973" cy="2286000"/>
+          </a:xfrm>
+          <a:prstGeom prst="rect">
+            <a:avLst/>
+          </a:prstGeom>
+          <a:solidFill>
+            <a:srgbClr val="1E3A6E"/>
+          </a:solidFill>
+          <a:ln w="12700">
+            <a:solidFill>
+              <a:srgbClr val="1E3A6E"/>
+            </a:solidFill>
+            <a:prstDash val="solid"/>
+          </a:ln>
+        </p:spPr>
+      </p:sp>
+      <p:sp>
+        <p:nvSpPr>
+          <p:cNvPr id="11" name="Shape 8"/>
+          <p:cNvSpPr/>
+          <p:nvPr/>
+        </p:nvSpPr>
+        <p:spPr>
+          <a:xfrm>
+            <a:off x="4709160" y="1901952"/>
+            <a:ext cx="36576" cy="347472"/>
+          </a:xfrm>
+          <a:prstGeom prst="rect">
+            <a:avLst/>
+          </a:prstGeom>
+          <a:solidFill>
+            <a:srgbClr val="005FFF"/>
+          </a:solidFill>
+          <a:ln w="12700">
+            <a:solidFill>
+              <a:srgbClr val="005FFF"/>
+            </a:solidFill>
+            <a:prstDash val="solid"/>
+          </a:ln>
+        </p:spPr>
+      </p:sp>
+      <p:sp>
+        <p:nvSpPr>
+          <p:cNvPr id="12" name="Text 9"/>
+          <p:cNvSpPr/>
+          <p:nvPr/>
+        </p:nvSpPr>
+        <p:spPr>
+          <a:xfrm>
+            <a:off x="4846320" y="1901952"/>
+            <a:ext cx="3931920" cy="347472"/>
+          </a:xfrm>
+          <a:prstGeom prst="rect">
+            <a:avLst/>
+          </a:prstGeom>
+          <a:noFill/>
+          <a:ln/>
+        </p:spPr>
+        <p:txBody>
+          <a:bodyPr wrap="square" lIns="0" tIns="0" rIns="0" bIns="0" rtlCol="0" anchor="ctr"/>
+          <a:lstStyle/>
+          <a:p>
+            <a:pPr indent="0" marL="0">
+              <a:buNone/>
+            </a:pPr>
+            <a:r>
+              <a:rPr lang="en-US" sz="1400" dirty="0">
+                <a:solidFill>
+                  <a:srgbClr val="EF4444"/>
+                </a:solidFill>
+                <a:latin typeface="Geist" pitchFamily="34" charset="0"/>
+                <a:ea typeface="Geist" pitchFamily="34" charset="-122"/>
+                <a:cs typeface="Geist" pitchFamily="34" charset="-120"/>
+              </a:rPr>
+              <a:t>✗ Cons</a:t>
+            </a:r>
+            <a:endParaRPr lang="en-US" sz="1400" dirty="0"/>
+          </a:p>
+        </p:txBody>
+      </p:sp>
+      <p:sp>
+        <p:nvSpPr>
+          <p:cNvPr id="13" name="Text 10"/>
+          <p:cNvSpPr/>
+          <p:nvPr/>
+        </p:nvSpPr>
+        <p:spPr>
+          <a:xfrm>
+            <a:off x="4846320" y="2331720"/>
+            <a:ext cx="3931920" cy="1828800"/>
+          </a:xfrm>
+          <a:prstGeom prst="rect">
+            <a:avLst/>
+          </a:prstGeom>
+          <a:noFill/>
+          <a:ln/>
+        </p:spPr>
+        <p:txBody>
+          <a:bodyPr wrap="square" lIns="0" tIns="0" rIns="0" bIns="0" rtlCol="0" anchor="t"/>
+          <a:lstStyle/>
+          <a:p>
+            <a:pPr>
+              <a:spcAft>
+                <a:spcPts val="800"/>
+              </a:spcAft>
+            </a:pPr>
+            <a:r>
+              <a:rPr lang="en-US" sz="1400" dirty="0">
+                <a:solidFill>
+                  <a:srgbClr val="FFFFFF"/>
+                </a:solidFill>
+                <a:latin typeface="Geist" pitchFamily="34" charset="0"/>
+                <a:ea typeface="Geist" pitchFamily="34" charset="-122"/>
+                <a:cs typeface="Geist" pitchFamily="34" charset="-120"/>
+              </a:rPr>
+              <a:t>High CPU → qualityLimitationReason: cpu</a:t>
+            </a:r>
+            <a:endParaRPr lang="en-US" sz="1400" dirty="0"/>
+          </a:p>
+          <a:p>
+            <a:pPr>
+              <a:spcAft>
+                <a:spcPts val="800"/>
+              </a:spcAft>
+            </a:pPr>
+            <a:r>
+              <a:rPr lang="en-US" sz="1400" dirty="0">
+                <a:solidFill>
+                  <a:srgbClr val="FFFFFF"/>
+                </a:solidFill>
+                <a:latin typeface="Geist" pitchFamily="34" charset="0"/>
+                <a:ea typeface="Geist" pitchFamily="34" charset="-122"/>
+                <a:cs typeface="Geist" pitchFamily="34" charset="-120"/>
+              </a:rPr>
+              <a:t>Battery drains significantly faster</a:t>
+            </a:r>
+            <a:endParaRPr lang="en-US" sz="1400" dirty="0"/>
+          </a:p>
+          <a:p>
+            <a:pPr>
+              <a:spcAft>
+                <a:spcPts val="800"/>
+              </a:spcAft>
+            </a:pPr>
+            <a:r>
+              <a:rPr lang="en-US" sz="1400" dirty="0">
+                <a:solidFill>
+                  <a:srgbClr val="FFFFFF"/>
+                </a:solidFill>
+                <a:latin typeface="Geist" pitchFamily="34" charset="0"/>
+                <a:ea typeface="Geist" pitchFamily="34" charset="-122"/>
+                <a:cs typeface="Geist" pitchFamily="34" charset="-120"/>
+              </a:rPr>
+              <a:t>Frame rate may drop under load</a:t>
+            </a:r>
+            <a:endParaRPr lang="en-US" sz="1400" dirty="0"/>
+          </a:p>
+        </p:txBody>
+      </p:sp>
+      <p:sp>
+        <p:nvSpPr>
+          <p:cNvPr id="14" name="Text 11"/>
+          <p:cNvSpPr/>
+          <p:nvPr/>
+        </p:nvSpPr>
+        <p:spPr>
+          <a:xfrm>
+            <a:off x="411480" y="4389120"/>
+            <a:ext cx="8321040" cy="365760"/>
+          </a:xfrm>
+          <a:prstGeom prst="rect">
+            <a:avLst/>
+          </a:prstGeom>
+          <a:noFill/>
+          <a:ln/>
+        </p:spPr>
+        <p:txBody>
+          <a:bodyPr wrap="square" lIns="0" tIns="0" rIns="0" bIns="0" rtlCol="0" anchor="ctr"/>
+          <a:lstStyle/>
+          <a:p>
+            <a:pPr indent="0" marL="0">
+              <a:buNone/>
+            </a:pPr>
+            <a:r>
+              <a:rPr lang="en-US" sz="1300" dirty="0">
+                <a:solidFill>
+                  <a:srgbClr val="A8C7FA"/>
+                </a:solidFill>
+                <a:latin typeface="Geist" pitchFamily="34" charset="0"/>
+                <a:ea typeface="Geist" pitchFamily="34" charset="-122"/>
+                <a:cs typeface="Geist" pitchFamily="34" charset="-120"/>
+              </a:rPr>
+              <a:t>Today's only complete fix for spatial SVC — but the CPU/battery cost is real on mobile.</a:t>
+            </a:r>
+            <a:endParaRPr lang="en-US" sz="1300" dirty="0"/>
+          </a:p>
+        </p:txBody>
+      </p:sp>
+    </p:spTree>
+  </p:cSld>
+  <p:clrMapOvr>
+    <a:masterClrMapping/>
+  </p:clrMapOvr>
+</p:sld>
+</file>
+
+<file path=ppt/slides/slide2.xml><?xml version="1.0" encoding="utf-8"?>
+<p:sld xmlns:a="http://schemas.openxmlformats.org/drawingml/2006/main" xmlns:r="http://schemas.openxmlformats.org/officeDocument/2006/relationships" xmlns:p="http://schemas.openxmlformats.org/presentationml/2006/main">
+  <p:cSld name="Slide 2">
+    <p:bg>
+      <p:bgPr>
+        <a:blipFill dpi="0" rotWithShape="1">
+          <a:blip r:embed="rId1">
+            <a:lum/>
+          </a:blip>
+          <a:srcRect/>
+          <a:stretch>
+            <a:fillRect/>
+          </a:stretch>
+        </a:blipFill>
+        <a:effectLst/>
+      </p:bgPr>
+    </p:bg>
+    <p:spTree>
+      <p:nvGrpSpPr>
+        <p:cNvPr id="1" name=""/>
+        <p:cNvGrpSpPr/>
+        <p:nvPr/>
+      </p:nvGrpSpPr>
+      <p:grpSpPr>
+        <a:xfrm>
+          <a:off x="0" y="0"/>
+          <a:ext cx="0" cy="0"/>
+          <a:chOff x="0" y="0"/>
+          <a:chExt cx="0" cy="0"/>
+        </a:xfrm>
+      </p:grpSpPr>
+      <p:pic>
+        <p:nvPicPr>
+          <p:cNvPr id="2" name="Image 0" descr="preencoded.png">    </p:cNvPr>
+          <p:cNvPicPr>
+            <a:picLocks noChangeAspect="1"/>
+          </p:cNvPicPr>
+          <p:nvPr/>
+        </p:nvPicPr>
+        <p:blipFill>
+          <a:blip r:embed="rId2">
+            <a:extLst>
+              <a:ext uri="{96DAC541-7B7A-43D3-8B79-37D633B846F1}">
+                <asvg:svgBlip xmlns:asvg="http://schemas.microsoft.com/office/drawing/2016/SVG/main" r:embed="rId3"/>
+              </a:ext>
+            </a:extLst>
+          </a:blip>
+          <a:stretch>
+            <a:fillRect/>
+          </a:stretch>
+        </p:blipFill>
+        <p:spPr>
+          <a:xfrm>
+            <a:off x="228600" y="4709160"/>
+            <a:ext cx="256032" cy="256032"/>
+          </a:xfrm>
+          <a:prstGeom prst="rect">
+            <a:avLst/>
+          </a:prstGeom>
+        </p:spPr>
+      </p:pic>
+      <p:sp>
+        <p:nvSpPr>
+          <p:cNvPr id="3" name="Text 0"/>
+          <p:cNvSpPr/>
+          <p:nvPr/>
+        </p:nvSpPr>
+        <p:spPr>
+          <a:xfrm>
+            <a:off x="8046720" y="164592"/>
+            <a:ext cx="914400" cy="228600"/>
+          </a:xfrm>
+          <a:prstGeom prst="rect">
+            <a:avLst/>
+          </a:prstGeom>
+          <a:noFill/>
+          <a:ln/>
+        </p:spPr>
+        <p:txBody>
+          <a:bodyPr wrap="square" lIns="0" tIns="0" rIns="0" bIns="0" rtlCol="0" anchor="ctr"/>
+          <a:lstStyle/>
+          <a:p>
+            <a:pPr algn="r" indent="0" marL="0">
+              <a:buNone/>
+            </a:pPr>
+            <a:r>
+              <a:rPr lang="en-US" sz="900" dirty="0">
+                <a:solidFill>
+                  <a:srgbClr val="A8C7FA"/>
+                </a:solidFill>
+                <a:latin typeface="Geist" pitchFamily="34" charset="0"/>
+                <a:ea typeface="Geist" pitchFamily="34" charset="-122"/>
+                <a:cs typeface="Geist" pitchFamily="34" charset="-120"/>
+              </a:rPr>
+              <a:t>Aug 2026</a:t>
+            </a:r>
+            <a:endParaRPr lang="en-US" sz="900" dirty="0"/>
+          </a:p>
+        </p:txBody>
+      </p:sp>
+      <p:sp>
+        <p:nvSpPr>
+          <p:cNvPr id="4" name="Text 1"/>
+          <p:cNvSpPr/>
+          <p:nvPr/>
+        </p:nvSpPr>
+        <p:spPr>
+          <a:xfrm>
+            <a:off x="365760" y="201168"/>
+            <a:ext cx="3657600" cy="201168"/>
+          </a:xfrm>
+          <a:prstGeom prst="rect">
+            <a:avLst/>
+          </a:prstGeom>
+          <a:noFill/>
+          <a:ln/>
+        </p:spPr>
+        <p:txBody>
+          <a:bodyPr wrap="square" lIns="0" tIns="0" rIns="0" bIns="0" rtlCol="0" anchor="ctr"/>
+          <a:lstStyle/>
+          <a:p>
+            <a:pPr indent="0" marL="0">
+              <a:buNone/>
+            </a:pPr>
+            <a:r>
+              <a:rPr lang="en-US" sz="1000" spc="150" kern="0" dirty="0">
+                <a:solidFill>
+                  <a:srgbClr val="A8C7FA"/>
+                </a:solidFill>
+                <a:latin typeface="Geist" pitchFamily="34" charset="0"/>
+                <a:ea typeface="Geist" pitchFamily="34" charset="-122"/>
+                <a:cs typeface="Geist" pitchFamily="34" charset="-120"/>
+              </a:rPr>
+              <a:t>STREAM</a:t>
+            </a:r>
+            <a:endParaRPr lang="en-US" sz="1000" dirty="0"/>
+          </a:p>
+        </p:txBody>
+      </p:sp>
+      <p:sp>
+        <p:nvSpPr>
+          <p:cNvPr id="5" name="Text 2"/>
+          <p:cNvSpPr/>
+          <p:nvPr/>
+        </p:nvSpPr>
+        <p:spPr>
+          <a:xfrm>
+            <a:off x="365760" y="402336"/>
+            <a:ext cx="8229600" cy="457200"/>
+          </a:xfrm>
+          <a:prstGeom prst="rect">
+            <a:avLst/>
+          </a:prstGeom>
+          <a:noFill/>
+          <a:ln/>
+        </p:spPr>
+        <p:txBody>
+          <a:bodyPr wrap="square" lIns="0" tIns="0" rIns="0" bIns="0" rtlCol="0" anchor="ctr"/>
+          <a:lstStyle/>
+          <a:p>
+            <a:pPr indent="0" marL="0">
+              <a:buNone/>
+            </a:pPr>
+            <a:r>
+              <a:rPr lang="en-US" sz="2800" dirty="0">
+                <a:solidFill>
+                  <a:srgbClr val="FFFFFF"/>
+                </a:solidFill>
+                <a:latin typeface="Geist" pitchFamily="34" charset="0"/>
+                <a:ea typeface="Geist" pitchFamily="34" charset="-122"/>
+                <a:cs typeface="Geist" pitchFamily="34" charset="-120"/>
+              </a:rPr>
+              <a:t>Stream Products</a:t>
+            </a:r>
+            <a:endParaRPr lang="en-US" sz="2800" dirty="0"/>
+          </a:p>
+        </p:txBody>
+      </p:sp>
+      <p:pic>
+        <p:nvPicPr>
+          <p:cNvPr id="6" name="Image 1" descr="/Users/pratimmallick/Projects/Stream/stream-video-android/docs/talks/build-assets/icon-chat.png">    </p:cNvPr>
+          <p:cNvPicPr>
+            <a:picLocks noChangeAspect="1"/>
+          </p:cNvPicPr>
+          <p:nvPr/>
+        </p:nvPicPr>
+        <p:blipFill>
+          <a:blip r:embed="rId4"/>
+          <a:stretch>
+            <a:fillRect/>
+          </a:stretch>
+        </p:blipFill>
+        <p:spPr>
+          <a:xfrm>
+            <a:off x="1202436" y="960120"/>
+            <a:ext cx="384048" cy="384048"/>
+          </a:xfrm>
+          <a:prstGeom prst="rect">
+            <a:avLst/>
+          </a:prstGeom>
+        </p:spPr>
+      </p:pic>
+      <p:sp>
+        <p:nvSpPr>
+          <p:cNvPr id="7" name="Text 3"/>
+          <p:cNvSpPr/>
+          <p:nvPr/>
+        </p:nvSpPr>
+        <p:spPr>
+          <a:xfrm>
+            <a:off x="365760" y="1389888"/>
+            <a:ext cx="2057400" cy="256032"/>
+          </a:xfrm>
+          <a:prstGeom prst="rect">
+            <a:avLst/>
+          </a:prstGeom>
+          <a:noFill/>
+          <a:ln/>
+        </p:spPr>
+        <p:txBody>
+          <a:bodyPr wrap="square" lIns="0" tIns="0" rIns="0" bIns="0" rtlCol="0" anchor="ctr"/>
+          <a:lstStyle/>
+          <a:p>
+            <a:pPr algn="ctr" indent="0" marL="0">
+              <a:buNone/>
+            </a:pPr>
+            <a:r>
+              <a:rPr lang="en-US" sz="1000" spc="60" kern="0" dirty="0">
+                <a:solidFill>
+                  <a:srgbClr val="A8C7FA"/>
+                </a:solidFill>
+                <a:latin typeface="Geist" pitchFamily="34" charset="0"/>
+                <a:ea typeface="Geist" pitchFamily="34" charset="-122"/>
+                <a:cs typeface="Geist" pitchFamily="34" charset="-120"/>
+              </a:rPr>
+              <a:t>CHAT MESSAGING</a:t>
+            </a:r>
+            <a:endParaRPr lang="en-US" sz="1000" dirty="0"/>
+          </a:p>
+        </p:txBody>
+      </p:sp>
+      <p:pic>
+        <p:nvPicPr>
+          <p:cNvPr id="8" name="Image 2" descr="/Users/pratimmallick/Projects/Stream/stream-video-android/docs/talks/build-assets/product-chat.png">    </p:cNvPr>
+          <p:cNvPicPr>
+            <a:picLocks noChangeAspect="1"/>
+          </p:cNvPicPr>
+          <p:nvPr/>
+        </p:nvPicPr>
+        <p:blipFill>
+          <a:blip r:embed="rId5"/>
+          <a:stretch>
+            <a:fillRect/>
+          </a:stretch>
+        </p:blipFill>
+        <p:spPr>
+          <a:xfrm>
+            <a:off x="486556" y="1719072"/>
+            <a:ext cx="1815807" cy="3063240"/>
+          </a:xfrm>
+          <a:prstGeom prst="rect">
+            <a:avLst/>
+          </a:prstGeom>
+        </p:spPr>
+      </p:pic>
+      <p:pic>
+        <p:nvPicPr>
+          <p:cNvPr id="9" name="Image 3" descr="/Users/pratimmallick/Projects/Stream/stream-video-android/docs/talks/build-assets/icon-video.png">    </p:cNvPr>
+          <p:cNvPicPr>
+            <a:picLocks noChangeAspect="1"/>
+          </p:cNvPicPr>
+          <p:nvPr/>
+        </p:nvPicPr>
+        <p:blipFill>
+          <a:blip r:embed="rId6"/>
+          <a:stretch>
+            <a:fillRect/>
+          </a:stretch>
+        </p:blipFill>
+        <p:spPr>
+          <a:xfrm>
+            <a:off x="3396996" y="960120"/>
+            <a:ext cx="384048" cy="384048"/>
+          </a:xfrm>
+          <a:prstGeom prst="rect">
+            <a:avLst/>
+          </a:prstGeom>
+        </p:spPr>
+      </p:pic>
+      <p:sp>
+        <p:nvSpPr>
+          <p:cNvPr id="10" name="Text 4"/>
+          <p:cNvSpPr/>
+          <p:nvPr/>
+        </p:nvSpPr>
+        <p:spPr>
+          <a:xfrm>
+            <a:off x="2560320" y="1389888"/>
+            <a:ext cx="2057400" cy="256032"/>
+          </a:xfrm>
+          <a:prstGeom prst="rect">
+            <a:avLst/>
+          </a:prstGeom>
+          <a:noFill/>
+          <a:ln/>
+        </p:spPr>
+        <p:txBody>
+          <a:bodyPr wrap="square" lIns="0" tIns="0" rIns="0" bIns="0" rtlCol="0" anchor="ctr"/>
+          <a:lstStyle/>
+          <a:p>
+            <a:pPr algn="ctr" indent="0" marL="0">
+              <a:buNone/>
+            </a:pPr>
+            <a:r>
+              <a:rPr lang="en-US" sz="1000" spc="60" kern="0" dirty="0">
+                <a:solidFill>
+                  <a:srgbClr val="A8C7FA"/>
+                </a:solidFill>
+                <a:latin typeface="Geist" pitchFamily="34" charset="0"/>
+                <a:ea typeface="Geist" pitchFamily="34" charset="-122"/>
+                <a:cs typeface="Geist" pitchFamily="34" charset="-120"/>
+              </a:rPr>
+              <a:t>VIDEO &amp; AUDIO</a:t>
+            </a:r>
+            <a:endParaRPr lang="en-US" sz="1000" dirty="0"/>
+          </a:p>
+        </p:txBody>
+      </p:sp>
+      <p:pic>
+        <p:nvPicPr>
+          <p:cNvPr id="11" name="Image 4" descr="/Users/pratimmallick/Projects/Stream/stream-video-android/docs/talks/build-assets/product-video.png">    </p:cNvPr>
+          <p:cNvPicPr>
+            <a:picLocks noChangeAspect="1"/>
+          </p:cNvPicPr>
+          <p:nvPr/>
+        </p:nvPicPr>
+        <p:blipFill>
+          <a:blip r:embed="rId7"/>
+          <a:stretch>
+            <a:fillRect/>
+          </a:stretch>
+        </p:blipFill>
+        <p:spPr>
+          <a:xfrm>
+            <a:off x="2829193" y="1719072"/>
+            <a:ext cx="1519654" cy="3063240"/>
+          </a:xfrm>
+          <a:prstGeom prst="rect">
+            <a:avLst/>
+          </a:prstGeom>
+        </p:spPr>
+      </p:pic>
+      <p:pic>
+        <p:nvPicPr>
+          <p:cNvPr id="12" name="Image 5" descr="/Users/pratimmallick/Projects/Stream/stream-video-android/docs/talks/build-assets/icon-feeds.png">    </p:cNvPr>
+          <p:cNvPicPr>
+            <a:picLocks noChangeAspect="1"/>
+          </p:cNvPicPr>
+          <p:nvPr/>
+        </p:nvPicPr>
+        <p:blipFill>
+          <a:blip r:embed="rId8"/>
+          <a:stretch>
+            <a:fillRect/>
+          </a:stretch>
+        </p:blipFill>
+        <p:spPr>
+          <a:xfrm>
+            <a:off x="5591556" y="960120"/>
+            <a:ext cx="384048" cy="384048"/>
+          </a:xfrm>
+          <a:prstGeom prst="rect">
+            <a:avLst/>
+          </a:prstGeom>
+        </p:spPr>
+      </p:pic>
+      <p:sp>
+        <p:nvSpPr>
+          <p:cNvPr id="13" name="Text 5"/>
+          <p:cNvSpPr/>
+          <p:nvPr/>
+        </p:nvSpPr>
+        <p:spPr>
+          <a:xfrm>
+            <a:off x="4754880" y="1389888"/>
+            <a:ext cx="2057400" cy="256032"/>
+          </a:xfrm>
+          <a:prstGeom prst="rect">
+            <a:avLst/>
+          </a:prstGeom>
+          <a:noFill/>
+          <a:ln/>
+        </p:spPr>
+        <p:txBody>
+          <a:bodyPr wrap="square" lIns="0" tIns="0" rIns="0" bIns="0" rtlCol="0" anchor="ctr"/>
+          <a:lstStyle/>
+          <a:p>
+            <a:pPr algn="ctr" indent="0" marL="0">
+              <a:buNone/>
+            </a:pPr>
+            <a:r>
+              <a:rPr lang="en-US" sz="1000" spc="60" kern="0" dirty="0">
+                <a:solidFill>
+                  <a:srgbClr val="A8C7FA"/>
+                </a:solidFill>
+                <a:latin typeface="Geist" pitchFamily="34" charset="0"/>
+                <a:ea typeface="Geist" pitchFamily="34" charset="-122"/>
+                <a:cs typeface="Geist" pitchFamily="34" charset="-120"/>
+              </a:rPr>
+              <a:t>ACTIVITY FEEDS</a:t>
+            </a:r>
+            <a:endParaRPr lang="en-US" sz="1000" dirty="0"/>
+          </a:p>
+        </p:txBody>
+      </p:sp>
+      <p:pic>
+        <p:nvPicPr>
+          <p:cNvPr id="14" name="Image 6" descr="/Users/pratimmallick/Projects/Stream/stream-video-android/docs/talks/build-assets/product-feeds.png">    </p:cNvPr>
+          <p:cNvPicPr>
+            <a:picLocks noChangeAspect="1"/>
+          </p:cNvPicPr>
+          <p:nvPr/>
+        </p:nvPicPr>
+        <p:blipFill>
+          <a:blip r:embed="rId9"/>
+          <a:stretch>
+            <a:fillRect/>
+          </a:stretch>
+        </p:blipFill>
+        <p:spPr>
+          <a:xfrm>
+            <a:off x="5077599" y="1719072"/>
+            <a:ext cx="1411962" cy="3063240"/>
+          </a:xfrm>
+          <a:prstGeom prst="rect">
+            <a:avLst/>
+          </a:prstGeom>
+        </p:spPr>
+      </p:pic>
+      <p:pic>
+        <p:nvPicPr>
+          <p:cNvPr id="15" name="Image 7" descr="/Users/pratimmallick/Projects/Stream/stream-video-android/docs/talks/build-assets/icon-mod.png">    </p:cNvPr>
+          <p:cNvPicPr>
+            <a:picLocks noChangeAspect="1"/>
+          </p:cNvPicPr>
+          <p:nvPr/>
+        </p:nvPicPr>
+        <p:blipFill>
+          <a:blip r:embed="rId10"/>
+          <a:stretch>
+            <a:fillRect/>
+          </a:stretch>
+        </p:blipFill>
+        <p:spPr>
+          <a:xfrm>
+            <a:off x="7786116" y="960120"/>
+            <a:ext cx="384048" cy="384048"/>
+          </a:xfrm>
+          <a:prstGeom prst="rect">
+            <a:avLst/>
+          </a:prstGeom>
+        </p:spPr>
+      </p:pic>
+      <p:sp>
+        <p:nvSpPr>
+          <p:cNvPr id="16" name="Text 6"/>
+          <p:cNvSpPr/>
+          <p:nvPr/>
+        </p:nvSpPr>
+        <p:spPr>
+          <a:xfrm>
+            <a:off x="6949440" y="1389888"/>
+            <a:ext cx="2057400" cy="256032"/>
+          </a:xfrm>
+          <a:prstGeom prst="rect">
+            <a:avLst/>
+          </a:prstGeom>
+          <a:noFill/>
+          <a:ln/>
+        </p:spPr>
+        <p:txBody>
+          <a:bodyPr wrap="square" lIns="0" tIns="0" rIns="0" bIns="0" rtlCol="0" anchor="ctr"/>
+          <a:lstStyle/>
+          <a:p>
+            <a:pPr algn="ctr" indent="0" marL="0">
+              <a:buNone/>
+            </a:pPr>
+            <a:r>
+              <a:rPr lang="en-US" sz="1000" spc="60" kern="0" dirty="0">
+                <a:solidFill>
+                  <a:srgbClr val="A8C7FA"/>
+                </a:solidFill>
+                <a:latin typeface="Geist" pitchFamily="34" charset="0"/>
+                <a:ea typeface="Geist" pitchFamily="34" charset="-122"/>
+                <a:cs typeface="Geist" pitchFamily="34" charset="-120"/>
+              </a:rPr>
+              <a:t>AUTO MODERATION</a:t>
+            </a:r>
+            <a:endParaRPr lang="en-US" sz="1000" dirty="0"/>
+          </a:p>
+        </p:txBody>
+      </p:sp>
+      <p:pic>
+        <p:nvPicPr>
+          <p:cNvPr id="17" name="Image 8" descr="/Users/pratimmallick/Projects/Stream/stream-video-android/docs/talks/build-assets/product-mod.png">    </p:cNvPr>
+          <p:cNvPicPr>
+            <a:picLocks noChangeAspect="1"/>
+          </p:cNvPicPr>
+          <p:nvPr/>
+        </p:nvPicPr>
+        <p:blipFill>
+          <a:blip r:embed="rId11"/>
+          <a:stretch>
+            <a:fillRect/>
+          </a:stretch>
+        </p:blipFill>
+        <p:spPr>
+          <a:xfrm>
+            <a:off x="6995160" y="1719072"/>
+            <a:ext cx="1965960" cy="2058428"/>
+          </a:xfrm>
+          <a:prstGeom prst="rect">
+            <a:avLst/>
+          </a:prstGeom>
+        </p:spPr>
+      </p:pic>
+    </p:spTree>
+  </p:cSld>
+  <p:clrMapOvr>
+    <a:masterClrMapping/>
+  </p:clrMapOvr>
+</p:sld>
+</file>
+
+<file path=ppt/slides/slide20.xml><?xml version="1.0" encoding="utf-8"?>
+<p:sld xmlns:a="http://schemas.openxmlformats.org/drawingml/2006/main" xmlns:r="http://schemas.openxmlformats.org/officeDocument/2006/relationships" xmlns:p="http://schemas.openxmlformats.org/presentationml/2006/main">
+  <p:cSld name="Slide 20">
+    <p:bg>
+      <p:bgPr>
+        <a:blipFill dpi="0" rotWithShape="1">
+          <a:blip r:embed="rId1">
+            <a:lum/>
+          </a:blip>
+          <a:srcRect/>
+          <a:stretch>
+            <a:fillRect/>
+          </a:stretch>
+        </a:blipFill>
+        <a:effectLst/>
+      </p:bgPr>
+    </p:bg>
+    <p:spTree>
+      <p:nvGrpSpPr>
+        <p:cNvPr id="1" name=""/>
+        <p:cNvGrpSpPr/>
+        <p:nvPr/>
+      </p:nvGrpSpPr>
+      <p:grpSpPr>
+        <a:xfrm>
+          <a:off x="0" y="0"/>
+          <a:ext cx="0" cy="0"/>
+          <a:chOff x="0" y="0"/>
+          <a:chExt cx="0" cy="0"/>
+        </a:xfrm>
+      </p:grpSpPr>
+      <p:pic>
+        <p:nvPicPr>
+          <p:cNvPr id="2" name="Image 0" descr="preencoded.png">    </p:cNvPr>
+          <p:cNvPicPr>
+            <a:picLocks noChangeAspect="1"/>
+          </p:cNvPicPr>
+          <p:nvPr/>
+        </p:nvPicPr>
+        <p:blipFill>
+          <a:blip r:embed="rId2">
+            <a:extLst>
+              <a:ext uri="{96DAC541-7B7A-43D3-8B79-37D633B846F1}">
+                <asvg:svgBlip xmlns:asvg="http://schemas.microsoft.com/office/drawing/2016/SVG/main" r:embed="rId3"/>
+              </a:ext>
+            </a:extLst>
+          </a:blip>
+          <a:stretch>
+            <a:fillRect/>
+          </a:stretch>
+        </p:blipFill>
+        <p:spPr>
+          <a:xfrm>
+            <a:off x="228600" y="4709160"/>
+            <a:ext cx="256032" cy="256032"/>
+          </a:xfrm>
+          <a:prstGeom prst="rect">
+            <a:avLst/>
+          </a:prstGeom>
+        </p:spPr>
+      </p:pic>
+      <p:sp>
+        <p:nvSpPr>
+          <p:cNvPr id="3" name="Text 0"/>
+          <p:cNvSpPr/>
+          <p:nvPr/>
+        </p:nvSpPr>
+        <p:spPr>
+          <a:xfrm>
+            <a:off x="8046720" y="164592"/>
+            <a:ext cx="914400" cy="228600"/>
+          </a:xfrm>
+          <a:prstGeom prst="rect">
+            <a:avLst/>
+          </a:prstGeom>
+          <a:noFill/>
+          <a:ln/>
+        </p:spPr>
+        <p:txBody>
+          <a:bodyPr wrap="square" lIns="0" tIns="0" rIns="0" bIns="0" rtlCol="0" anchor="ctr"/>
+          <a:lstStyle/>
+          <a:p>
+            <a:pPr algn="r" indent="0" marL="0">
+              <a:buNone/>
+            </a:pPr>
+            <a:r>
+              <a:rPr lang="en-US" sz="900" dirty="0">
+                <a:solidFill>
+                  <a:srgbClr val="A8C7FA"/>
+                </a:solidFill>
+                <a:latin typeface="Geist" pitchFamily="34" charset="0"/>
+                <a:ea typeface="Geist" pitchFamily="34" charset="-122"/>
+                <a:cs typeface="Geist" pitchFamily="34" charset="-120"/>
+              </a:rPr>
+              <a:t>Aug 2026</a:t>
+            </a:r>
+            <a:endParaRPr lang="en-US" sz="900" dirty="0"/>
+          </a:p>
+        </p:txBody>
+      </p:sp>
+      <p:sp>
+        <p:nvSpPr>
+          <p:cNvPr id="4" name="Text 1"/>
+          <p:cNvSpPr/>
+          <p:nvPr/>
+        </p:nvSpPr>
+        <p:spPr>
+          <a:xfrm>
+            <a:off x="411480" y="777240"/>
+            <a:ext cx="5486400" cy="256032"/>
+          </a:xfrm>
+          <a:prstGeom prst="rect">
+            <a:avLst/>
+          </a:prstGeom>
+          <a:noFill/>
+          <a:ln/>
+        </p:spPr>
+        <p:txBody>
+          <a:bodyPr wrap="square" lIns="0" tIns="0" rIns="0" bIns="0" rtlCol="0" anchor="ctr"/>
+          <a:lstStyle/>
+          <a:p>
+            <a:pPr indent="0" marL="0">
+              <a:buNone/>
+            </a:pPr>
+            <a:r>
+              <a:rPr lang="en-US" sz="1000" spc="150" kern="0" dirty="0">
+                <a:solidFill>
+                  <a:srgbClr val="A8C7FA"/>
+                </a:solidFill>
+                <a:latin typeface="Geist" pitchFamily="34" charset="0"/>
+                <a:ea typeface="Geist" pitchFamily="34" charset="-122"/>
+                <a:cs typeface="Geist" pitchFamily="34" charset="-120"/>
+              </a:rPr>
+              <a:t>WAY FORWARD</a:t>
+            </a:r>
+            <a:endParaRPr lang="en-US" sz="1000" dirty="0"/>
+          </a:p>
+        </p:txBody>
+      </p:sp>
+      <p:sp>
+        <p:nvSpPr>
+          <p:cNvPr id="5" name="Text 2"/>
+          <p:cNvSpPr/>
+          <p:nvPr/>
+        </p:nvSpPr>
+        <p:spPr>
+          <a:xfrm>
+            <a:off x="411480" y="1005840"/>
+            <a:ext cx="8321040" cy="749808"/>
+          </a:xfrm>
+          <a:prstGeom prst="rect">
+            <a:avLst/>
+          </a:prstGeom>
+          <a:noFill/>
+          <a:ln/>
+        </p:spPr>
+        <p:txBody>
+          <a:bodyPr wrap="square" lIns="0" tIns="0" rIns="0" bIns="0" rtlCol="0" anchor="ctr"/>
+          <a:lstStyle/>
+          <a:p>
+            <a:pPr indent="0" marL="0">
+              <a:buNone/>
+            </a:pPr>
+            <a:r>
+              <a:rPr lang="en-US" sz="3400" dirty="0">
+                <a:solidFill>
+                  <a:srgbClr val="FFFFFF"/>
+                </a:solidFill>
+                <a:latin typeface="Geist" pitchFamily="34" charset="0"/>
+                <a:ea typeface="Geist" pitchFamily="34" charset="-122"/>
+                <a:cs typeface="Geist" pitchFamily="34" charset="-120"/>
+              </a:rPr>
+              <a:t>Production Data — Android Is the Outlier</a:t>
+            </a:r>
+            <a:endParaRPr lang="en-US" sz="3400" dirty="0"/>
+          </a:p>
+        </p:txBody>
+      </p:sp>
+      <p:sp>
+        <p:nvSpPr>
+          <p:cNvPr id="6" name="Shape 3"/>
+          <p:cNvSpPr/>
+          <p:nvPr/>
+        </p:nvSpPr>
+        <p:spPr>
+          <a:xfrm>
+            <a:off x="411480" y="1783080"/>
+            <a:ext cx="8321040" cy="10973"/>
+          </a:xfrm>
+          <a:prstGeom prst="rect">
+            <a:avLst/>
+          </a:prstGeom>
+          <a:solidFill>
+            <a:srgbClr val="1E3A6E"/>
+          </a:solidFill>
+          <a:ln w="12700">
+            <a:solidFill>
+              <a:srgbClr val="1E3A6E"/>
+            </a:solidFill>
+            <a:prstDash val="solid"/>
+          </a:ln>
+        </p:spPr>
+      </p:sp>
+      <p:sp>
+        <p:nvSpPr>
           <p:cNvPr id="7" name="Text 4"/>
           <p:cNvSpPr/>
           <p:nvPr/>
@@ -8403,7 +10383,7 @@
       </p:sp>
       <p:graphicFrame>
         <p:nvGraphicFramePr>
-          <p:cNvPr id="19" name="Table 0"/>
+          <p:cNvPr id="21" name="Table 0"/>
           <p:cNvGraphicFramePr>
             <a:graphicFrameLocks noGrp="1"/>
           </p:cNvGraphicFramePr>
@@ -9857,9 +11837,9 @@
 </p:sld>
 </file>
 
-<file path=ppt/slides/slide19.xml><?xml version="1.0" encoding="utf-8"?>
+<file path=ppt/slides/slide21.xml><?xml version="1.0" encoding="utf-8"?>
 <p:sld xmlns:a="http://schemas.openxmlformats.org/drawingml/2006/main" xmlns:r="http://schemas.openxmlformats.org/officeDocument/2006/relationships" xmlns:p="http://schemas.openxmlformats.org/presentationml/2006/main">
-  <p:cSld name="Slide 19">
+  <p:cSld name="Slide 21">
     <p:bg>
       <p:bgPr>
         <a:blipFill dpi="0" rotWithShape="1">
@@ -11027,9 +13007,9 @@
 </p:sld>
 </file>
 
-<file path=ppt/slides/slide2.xml><?xml version="1.0" encoding="utf-8"?>
+<file path=ppt/slides/slide22.xml><?xml version="1.0" encoding="utf-8"?>
 <p:sld xmlns:a="http://schemas.openxmlformats.org/drawingml/2006/main" xmlns:r="http://schemas.openxmlformats.org/officeDocument/2006/relationships" xmlns:p="http://schemas.openxmlformats.org/presentationml/2006/main">
-  <p:cSld name="Slide 2">
+  <p:cSld name="Slide 22">
     <p:bg>
       <p:bgPr>
         <a:blipFill dpi="0" rotWithShape="1">
@@ -11135,540 +13115,6 @@
         </p:nvSpPr>
         <p:spPr>
           <a:xfrm>
-            <a:off x="365760" y="201168"/>
-            <a:ext cx="3657600" cy="201168"/>
-          </a:xfrm>
-          <a:prstGeom prst="rect">
-            <a:avLst/>
-          </a:prstGeom>
-          <a:noFill/>
-          <a:ln/>
-        </p:spPr>
-        <p:txBody>
-          <a:bodyPr wrap="square" lIns="0" tIns="0" rIns="0" bIns="0" rtlCol="0" anchor="ctr"/>
-          <a:lstStyle/>
-          <a:p>
-            <a:pPr indent="0" marL="0">
-              <a:buNone/>
-            </a:pPr>
-            <a:r>
-              <a:rPr lang="en-US" sz="1000" spc="150" kern="0" dirty="0">
-                <a:solidFill>
-                  <a:srgbClr val="A8C7FA"/>
-                </a:solidFill>
-                <a:latin typeface="Geist" pitchFamily="34" charset="0"/>
-                <a:ea typeface="Geist" pitchFamily="34" charset="-122"/>
-                <a:cs typeface="Geist" pitchFamily="34" charset="-120"/>
-              </a:rPr>
-              <a:t>STREAM</a:t>
-            </a:r>
-            <a:endParaRPr lang="en-US" sz="1000" dirty="0"/>
-          </a:p>
-        </p:txBody>
-      </p:sp>
-      <p:sp>
-        <p:nvSpPr>
-          <p:cNvPr id="5" name="Text 2"/>
-          <p:cNvSpPr/>
-          <p:nvPr/>
-        </p:nvSpPr>
-        <p:spPr>
-          <a:xfrm>
-            <a:off x="365760" y="402336"/>
-            <a:ext cx="8229600" cy="457200"/>
-          </a:xfrm>
-          <a:prstGeom prst="rect">
-            <a:avLst/>
-          </a:prstGeom>
-          <a:noFill/>
-          <a:ln/>
-        </p:spPr>
-        <p:txBody>
-          <a:bodyPr wrap="square" lIns="0" tIns="0" rIns="0" bIns="0" rtlCol="0" anchor="ctr"/>
-          <a:lstStyle/>
-          <a:p>
-            <a:pPr indent="0" marL="0">
-              <a:buNone/>
-            </a:pPr>
-            <a:r>
-              <a:rPr lang="en-US" sz="2800" dirty="0">
-                <a:solidFill>
-                  <a:srgbClr val="FFFFFF"/>
-                </a:solidFill>
-                <a:latin typeface="Geist" pitchFamily="34" charset="0"/>
-                <a:ea typeface="Geist" pitchFamily="34" charset="-122"/>
-                <a:cs typeface="Geist" pitchFamily="34" charset="-120"/>
-              </a:rPr>
-              <a:t>Stream Products</a:t>
-            </a:r>
-            <a:endParaRPr lang="en-US" sz="2800" dirty="0"/>
-          </a:p>
-        </p:txBody>
-      </p:sp>
-      <p:pic>
-        <p:nvPicPr>
-          <p:cNvPr id="6" name="Image 1" descr="/Users/pratimmallick/Projects/Stream/stream-video-android/docs/talks/build-assets/icon-chat.png">    </p:cNvPr>
-          <p:cNvPicPr>
-            <a:picLocks noChangeAspect="1"/>
-          </p:cNvPicPr>
-          <p:nvPr/>
-        </p:nvPicPr>
-        <p:blipFill>
-          <a:blip r:embed="rId4"/>
-          <a:stretch>
-            <a:fillRect/>
-          </a:stretch>
-        </p:blipFill>
-        <p:spPr>
-          <a:xfrm>
-            <a:off x="1202436" y="960120"/>
-            <a:ext cx="384048" cy="384048"/>
-          </a:xfrm>
-          <a:prstGeom prst="rect">
-            <a:avLst/>
-          </a:prstGeom>
-        </p:spPr>
-      </p:pic>
-      <p:sp>
-        <p:nvSpPr>
-          <p:cNvPr id="7" name="Text 3"/>
-          <p:cNvSpPr/>
-          <p:nvPr/>
-        </p:nvSpPr>
-        <p:spPr>
-          <a:xfrm>
-            <a:off x="365760" y="1389888"/>
-            <a:ext cx="2057400" cy="256032"/>
-          </a:xfrm>
-          <a:prstGeom prst="rect">
-            <a:avLst/>
-          </a:prstGeom>
-          <a:noFill/>
-          <a:ln/>
-        </p:spPr>
-        <p:txBody>
-          <a:bodyPr wrap="square" lIns="0" tIns="0" rIns="0" bIns="0" rtlCol="0" anchor="ctr"/>
-          <a:lstStyle/>
-          <a:p>
-            <a:pPr algn="ctr" indent="0" marL="0">
-              <a:buNone/>
-            </a:pPr>
-            <a:r>
-              <a:rPr lang="en-US" sz="1000" spc="60" kern="0" dirty="0">
-                <a:solidFill>
-                  <a:srgbClr val="A8C7FA"/>
-                </a:solidFill>
-                <a:latin typeface="Geist" pitchFamily="34" charset="0"/>
-                <a:ea typeface="Geist" pitchFamily="34" charset="-122"/>
-                <a:cs typeface="Geist" pitchFamily="34" charset="-120"/>
-              </a:rPr>
-              <a:t>CHAT MESSAGING</a:t>
-            </a:r>
-            <a:endParaRPr lang="en-US" sz="1000" dirty="0"/>
-          </a:p>
-        </p:txBody>
-      </p:sp>
-      <p:pic>
-        <p:nvPicPr>
-          <p:cNvPr id="8" name="Image 2" descr="/Users/pratimmallick/Projects/Stream/stream-video-android/docs/talks/build-assets/product-chat.png">    </p:cNvPr>
-          <p:cNvPicPr>
-            <a:picLocks noChangeAspect="1"/>
-          </p:cNvPicPr>
-          <p:nvPr/>
-        </p:nvPicPr>
-        <p:blipFill>
-          <a:blip r:embed="rId5"/>
-          <a:stretch>
-            <a:fillRect/>
-          </a:stretch>
-        </p:blipFill>
-        <p:spPr>
-          <a:xfrm>
-            <a:off x="486556" y="1719072"/>
-            <a:ext cx="1815807" cy="3063240"/>
-          </a:xfrm>
-          <a:prstGeom prst="rect">
-            <a:avLst/>
-          </a:prstGeom>
-        </p:spPr>
-      </p:pic>
-      <p:pic>
-        <p:nvPicPr>
-          <p:cNvPr id="9" name="Image 3" descr="/Users/pratimmallick/Projects/Stream/stream-video-android/docs/talks/build-assets/icon-video.png">    </p:cNvPr>
-          <p:cNvPicPr>
-            <a:picLocks noChangeAspect="1"/>
-          </p:cNvPicPr>
-          <p:nvPr/>
-        </p:nvPicPr>
-        <p:blipFill>
-          <a:blip r:embed="rId6"/>
-          <a:stretch>
-            <a:fillRect/>
-          </a:stretch>
-        </p:blipFill>
-        <p:spPr>
-          <a:xfrm>
-            <a:off x="3396996" y="960120"/>
-            <a:ext cx="384048" cy="384048"/>
-          </a:xfrm>
-          <a:prstGeom prst="rect">
-            <a:avLst/>
-          </a:prstGeom>
-        </p:spPr>
-      </p:pic>
-      <p:sp>
-        <p:nvSpPr>
-          <p:cNvPr id="10" name="Text 4"/>
-          <p:cNvSpPr/>
-          <p:nvPr/>
-        </p:nvSpPr>
-        <p:spPr>
-          <a:xfrm>
-            <a:off x="2560320" y="1389888"/>
-            <a:ext cx="2057400" cy="256032"/>
-          </a:xfrm>
-          <a:prstGeom prst="rect">
-            <a:avLst/>
-          </a:prstGeom>
-          <a:noFill/>
-          <a:ln/>
-        </p:spPr>
-        <p:txBody>
-          <a:bodyPr wrap="square" lIns="0" tIns="0" rIns="0" bIns="0" rtlCol="0" anchor="ctr"/>
-          <a:lstStyle/>
-          <a:p>
-            <a:pPr algn="ctr" indent="0" marL="0">
-              <a:buNone/>
-            </a:pPr>
-            <a:r>
-              <a:rPr lang="en-US" sz="1000" spc="60" kern="0" dirty="0">
-                <a:solidFill>
-                  <a:srgbClr val="A8C7FA"/>
-                </a:solidFill>
-                <a:latin typeface="Geist" pitchFamily="34" charset="0"/>
-                <a:ea typeface="Geist" pitchFamily="34" charset="-122"/>
-                <a:cs typeface="Geist" pitchFamily="34" charset="-120"/>
-              </a:rPr>
-              <a:t>VIDEO &amp; AUDIO</a:t>
-            </a:r>
-            <a:endParaRPr lang="en-US" sz="1000" dirty="0"/>
-          </a:p>
-        </p:txBody>
-      </p:sp>
-      <p:pic>
-        <p:nvPicPr>
-          <p:cNvPr id="11" name="Image 4" descr="/Users/pratimmallick/Projects/Stream/stream-video-android/docs/talks/build-assets/product-video.png">    </p:cNvPr>
-          <p:cNvPicPr>
-            <a:picLocks noChangeAspect="1"/>
-          </p:cNvPicPr>
-          <p:nvPr/>
-        </p:nvPicPr>
-        <p:blipFill>
-          <a:blip r:embed="rId7"/>
-          <a:stretch>
-            <a:fillRect/>
-          </a:stretch>
-        </p:blipFill>
-        <p:spPr>
-          <a:xfrm>
-            <a:off x="2829193" y="1719072"/>
-            <a:ext cx="1519654" cy="3063240"/>
-          </a:xfrm>
-          <a:prstGeom prst="rect">
-            <a:avLst/>
-          </a:prstGeom>
-        </p:spPr>
-      </p:pic>
-      <p:pic>
-        <p:nvPicPr>
-          <p:cNvPr id="12" name="Image 5" descr="/Users/pratimmallick/Projects/Stream/stream-video-android/docs/talks/build-assets/icon-feeds.png">    </p:cNvPr>
-          <p:cNvPicPr>
-            <a:picLocks noChangeAspect="1"/>
-          </p:cNvPicPr>
-          <p:nvPr/>
-        </p:nvPicPr>
-        <p:blipFill>
-          <a:blip r:embed="rId8"/>
-          <a:stretch>
-            <a:fillRect/>
-          </a:stretch>
-        </p:blipFill>
-        <p:spPr>
-          <a:xfrm>
-            <a:off x="5591556" y="960120"/>
-            <a:ext cx="384048" cy="384048"/>
-          </a:xfrm>
-          <a:prstGeom prst="rect">
-            <a:avLst/>
-          </a:prstGeom>
-        </p:spPr>
-      </p:pic>
-      <p:sp>
-        <p:nvSpPr>
-          <p:cNvPr id="13" name="Text 5"/>
-          <p:cNvSpPr/>
-          <p:nvPr/>
-        </p:nvSpPr>
-        <p:spPr>
-          <a:xfrm>
-            <a:off x="4754880" y="1389888"/>
-            <a:ext cx="2057400" cy="256032"/>
-          </a:xfrm>
-          <a:prstGeom prst="rect">
-            <a:avLst/>
-          </a:prstGeom>
-          <a:noFill/>
-          <a:ln/>
-        </p:spPr>
-        <p:txBody>
-          <a:bodyPr wrap="square" lIns="0" tIns="0" rIns="0" bIns="0" rtlCol="0" anchor="ctr"/>
-          <a:lstStyle/>
-          <a:p>
-            <a:pPr algn="ctr" indent="0" marL="0">
-              <a:buNone/>
-            </a:pPr>
-            <a:r>
-              <a:rPr lang="en-US" sz="1000" spc="60" kern="0" dirty="0">
-                <a:solidFill>
-                  <a:srgbClr val="A8C7FA"/>
-                </a:solidFill>
-                <a:latin typeface="Geist" pitchFamily="34" charset="0"/>
-                <a:ea typeface="Geist" pitchFamily="34" charset="-122"/>
-                <a:cs typeface="Geist" pitchFamily="34" charset="-120"/>
-              </a:rPr>
-              <a:t>ACTIVITY FEEDS</a:t>
-            </a:r>
-            <a:endParaRPr lang="en-US" sz="1000" dirty="0"/>
-          </a:p>
-        </p:txBody>
-      </p:sp>
-      <p:pic>
-        <p:nvPicPr>
-          <p:cNvPr id="14" name="Image 6" descr="/Users/pratimmallick/Projects/Stream/stream-video-android/docs/talks/build-assets/product-feeds.png">    </p:cNvPr>
-          <p:cNvPicPr>
-            <a:picLocks noChangeAspect="1"/>
-          </p:cNvPicPr>
-          <p:nvPr/>
-        </p:nvPicPr>
-        <p:blipFill>
-          <a:blip r:embed="rId9"/>
-          <a:stretch>
-            <a:fillRect/>
-          </a:stretch>
-        </p:blipFill>
-        <p:spPr>
-          <a:xfrm>
-            <a:off x="5077599" y="1719072"/>
-            <a:ext cx="1411962" cy="3063240"/>
-          </a:xfrm>
-          <a:prstGeom prst="rect">
-            <a:avLst/>
-          </a:prstGeom>
-        </p:spPr>
-      </p:pic>
-      <p:pic>
-        <p:nvPicPr>
-          <p:cNvPr id="15" name="Image 7" descr="/Users/pratimmallick/Projects/Stream/stream-video-android/docs/talks/build-assets/icon-mod.png">    </p:cNvPr>
-          <p:cNvPicPr>
-            <a:picLocks noChangeAspect="1"/>
-          </p:cNvPicPr>
-          <p:nvPr/>
-        </p:nvPicPr>
-        <p:blipFill>
-          <a:blip r:embed="rId10"/>
-          <a:stretch>
-            <a:fillRect/>
-          </a:stretch>
-        </p:blipFill>
-        <p:spPr>
-          <a:xfrm>
-            <a:off x="7786116" y="960120"/>
-            <a:ext cx="384048" cy="384048"/>
-          </a:xfrm>
-          <a:prstGeom prst="rect">
-            <a:avLst/>
-          </a:prstGeom>
-        </p:spPr>
-      </p:pic>
-      <p:sp>
-        <p:nvSpPr>
-          <p:cNvPr id="16" name="Text 6"/>
-          <p:cNvSpPr/>
-          <p:nvPr/>
-        </p:nvSpPr>
-        <p:spPr>
-          <a:xfrm>
-            <a:off x="6949440" y="1389888"/>
-            <a:ext cx="2057400" cy="256032"/>
-          </a:xfrm>
-          <a:prstGeom prst="rect">
-            <a:avLst/>
-          </a:prstGeom>
-          <a:noFill/>
-          <a:ln/>
-        </p:spPr>
-        <p:txBody>
-          <a:bodyPr wrap="square" lIns="0" tIns="0" rIns="0" bIns="0" rtlCol="0" anchor="ctr"/>
-          <a:lstStyle/>
-          <a:p>
-            <a:pPr algn="ctr" indent="0" marL="0">
-              <a:buNone/>
-            </a:pPr>
-            <a:r>
-              <a:rPr lang="en-US" sz="1000" spc="60" kern="0" dirty="0">
-                <a:solidFill>
-                  <a:srgbClr val="A8C7FA"/>
-                </a:solidFill>
-                <a:latin typeface="Geist" pitchFamily="34" charset="0"/>
-                <a:ea typeface="Geist" pitchFamily="34" charset="-122"/>
-                <a:cs typeface="Geist" pitchFamily="34" charset="-120"/>
-              </a:rPr>
-              <a:t>AUTO MODERATION</a:t>
-            </a:r>
-            <a:endParaRPr lang="en-US" sz="1000" dirty="0"/>
-          </a:p>
-        </p:txBody>
-      </p:sp>
-      <p:pic>
-        <p:nvPicPr>
-          <p:cNvPr id="17" name="Image 8" descr="/Users/pratimmallick/Projects/Stream/stream-video-android/docs/talks/build-assets/product-mod.png">    </p:cNvPr>
-          <p:cNvPicPr>
-            <a:picLocks noChangeAspect="1"/>
-          </p:cNvPicPr>
-          <p:nvPr/>
-        </p:nvPicPr>
-        <p:blipFill>
-          <a:blip r:embed="rId11"/>
-          <a:stretch>
-            <a:fillRect/>
-          </a:stretch>
-        </p:blipFill>
-        <p:spPr>
-          <a:xfrm>
-            <a:off x="6995160" y="1719072"/>
-            <a:ext cx="1965960" cy="2058428"/>
-          </a:xfrm>
-          <a:prstGeom prst="rect">
-            <a:avLst/>
-          </a:prstGeom>
-        </p:spPr>
-      </p:pic>
-    </p:spTree>
-  </p:cSld>
-  <p:clrMapOvr>
-    <a:masterClrMapping/>
-  </p:clrMapOvr>
-</p:sld>
-</file>
-
-<file path=ppt/slides/slide20.xml><?xml version="1.0" encoding="utf-8"?>
-<p:sld xmlns:a="http://schemas.openxmlformats.org/drawingml/2006/main" xmlns:r="http://schemas.openxmlformats.org/officeDocument/2006/relationships" xmlns:p="http://schemas.openxmlformats.org/presentationml/2006/main">
-  <p:cSld name="Slide 20">
-    <p:bg>
-      <p:bgPr>
-        <a:blipFill dpi="0" rotWithShape="1">
-          <a:blip r:embed="rId1">
-            <a:lum/>
-          </a:blip>
-          <a:srcRect/>
-          <a:stretch>
-            <a:fillRect/>
-          </a:stretch>
-        </a:blipFill>
-        <a:effectLst/>
-      </p:bgPr>
-    </p:bg>
-    <p:spTree>
-      <p:nvGrpSpPr>
-        <p:cNvPr id="1" name=""/>
-        <p:cNvGrpSpPr/>
-        <p:nvPr/>
-      </p:nvGrpSpPr>
-      <p:grpSpPr>
-        <a:xfrm>
-          <a:off x="0" y="0"/>
-          <a:ext cx="0" cy="0"/>
-          <a:chOff x="0" y="0"/>
-          <a:chExt cx="0" cy="0"/>
-        </a:xfrm>
-      </p:grpSpPr>
-      <p:pic>
-        <p:nvPicPr>
-          <p:cNvPr id="2" name="Image 0" descr="preencoded.png">    </p:cNvPr>
-          <p:cNvPicPr>
-            <a:picLocks noChangeAspect="1"/>
-          </p:cNvPicPr>
-          <p:nvPr/>
-        </p:nvPicPr>
-        <p:blipFill>
-          <a:blip r:embed="rId2">
-            <a:extLst>
-              <a:ext uri="{96DAC541-7B7A-43D3-8B79-37D633B846F1}">
-                <asvg:svgBlip xmlns:asvg="http://schemas.microsoft.com/office/drawing/2016/SVG/main" r:embed="rId3"/>
-              </a:ext>
-            </a:extLst>
-          </a:blip>
-          <a:stretch>
-            <a:fillRect/>
-          </a:stretch>
-        </p:blipFill>
-        <p:spPr>
-          <a:xfrm>
-            <a:off x="228600" y="4709160"/>
-            <a:ext cx="256032" cy="256032"/>
-          </a:xfrm>
-          <a:prstGeom prst="rect">
-            <a:avLst/>
-          </a:prstGeom>
-        </p:spPr>
-      </p:pic>
-      <p:sp>
-        <p:nvSpPr>
-          <p:cNvPr id="3" name="Text 0"/>
-          <p:cNvSpPr/>
-          <p:nvPr/>
-        </p:nvSpPr>
-        <p:spPr>
-          <a:xfrm>
-            <a:off x="8046720" y="164592"/>
-            <a:ext cx="914400" cy="228600"/>
-          </a:xfrm>
-          <a:prstGeom prst="rect">
-            <a:avLst/>
-          </a:prstGeom>
-          <a:noFill/>
-          <a:ln/>
-        </p:spPr>
-        <p:txBody>
-          <a:bodyPr wrap="square" lIns="0" tIns="0" rIns="0" bIns="0" rtlCol="0" anchor="ctr"/>
-          <a:lstStyle/>
-          <a:p>
-            <a:pPr algn="r" indent="0" marL="0">
-              <a:buNone/>
-            </a:pPr>
-            <a:r>
-              <a:rPr lang="en-US" sz="900" dirty="0">
-                <a:solidFill>
-                  <a:srgbClr val="A8C7FA"/>
-                </a:solidFill>
-                <a:latin typeface="Geist" pitchFamily="34" charset="0"/>
-                <a:ea typeface="Geist" pitchFamily="34" charset="-122"/>
-                <a:cs typeface="Geist" pitchFamily="34" charset="-120"/>
-              </a:rPr>
-              <a:t>Aug 2026</a:t>
-            </a:r>
-            <a:endParaRPr lang="en-US" sz="900" dirty="0"/>
-          </a:p>
-        </p:txBody>
-      </p:sp>
-      <p:sp>
-        <p:nvSpPr>
-          <p:cNvPr id="4" name="Text 1"/>
-          <p:cNvSpPr/>
-          <p:nvPr/>
-        </p:nvSpPr>
-        <p:spPr>
-          <a:xfrm>
             <a:off x="411480" y="777240"/>
             <a:ext cx="5486400" cy="256032"/>
           </a:xfrm>
@@ -12162,9 +13608,9 @@
 </p:sld>
 </file>
 
-<file path=ppt/slides/slide21.xml><?xml version="1.0" encoding="utf-8"?>
+<file path=ppt/slides/slide23.xml><?xml version="1.0" encoding="utf-8"?>
 <p:sld xmlns:a="http://schemas.openxmlformats.org/drawingml/2006/main" xmlns:r="http://schemas.openxmlformats.org/officeDocument/2006/relationships" xmlns:p="http://schemas.openxmlformats.org/presentationml/2006/main">
-  <p:cSld name="Slide 21">
+  <p:cSld name="Slide 23">
     <p:bg>
       <p:bgPr>
         <a:blipFill dpi="0" rotWithShape="1">
@@ -13619,8 +15065,8 @@
         </p:nvSpPr>
         <p:spPr>
           <a:xfrm>
-            <a:off x="365760" y="1965960"/>
-            <a:ext cx="1417320" cy="1554480"/>
+            <a:off x="320040" y="1965960"/>
+            <a:ext cx="1234440" cy="1600200"/>
           </a:xfrm>
           <a:prstGeom prst="rect">
             <a:avLst/>
@@ -13644,8 +15090,8 @@
         </p:nvSpPr>
         <p:spPr>
           <a:xfrm>
-            <a:off x="475488" y="2057400"/>
-            <a:ext cx="1188720" cy="201168"/>
+            <a:off x="411480" y="2057400"/>
+            <a:ext cx="1051560" cy="182880"/>
           </a:xfrm>
           <a:prstGeom prst="rect">
             <a:avLst/>
@@ -13683,8 +15129,8 @@
         </p:nvSpPr>
         <p:spPr>
           <a:xfrm>
-            <a:off x="475488" y="2286000"/>
-            <a:ext cx="1188720" cy="640080"/>
+            <a:off x="411480" y="2286000"/>
+            <a:ext cx="1051560" cy="640080"/>
           </a:xfrm>
           <a:prstGeom prst="rect">
             <a:avLst/>
@@ -13700,7 +15146,7 @@
               <a:buNone/>
             </a:pPr>
             <a:r>
-              <a:rPr lang="en-US" sz="1800" dirty="0">
+              <a:rPr lang="en-US" sz="1600" dirty="0">
                 <a:solidFill>
                   <a:srgbClr val="FFFFFF"/>
                 </a:solidFill>
@@ -13710,14 +15156,14 @@
               </a:rPr>
               <a:t>Encode</a:t>
             </a:r>
-            <a:endParaRPr lang="en-US" sz="1800" dirty="0"/>
+            <a:endParaRPr lang="en-US" sz="1600" dirty="0"/>
           </a:p>
           <a:p>
             <a:pPr indent="0" marL="0">
               <a:buNone/>
             </a:pPr>
             <a:r>
-              <a:rPr lang="en-US" sz="1800" dirty="0">
+              <a:rPr lang="en-US" sz="1600" dirty="0">
                 <a:solidFill>
                   <a:srgbClr val="FFFFFF"/>
                 </a:solidFill>
@@ -13727,7 +15173,7 @@
               </a:rPr>
               <a:t>once</a:t>
             </a:r>
-            <a:endParaRPr lang="en-US" sz="1800" dirty="0"/>
+            <a:endParaRPr lang="en-US" sz="1600" dirty="0"/>
           </a:p>
         </p:txBody>
       </p:sp>
@@ -13739,8 +15185,8 @@
         </p:nvSpPr>
         <p:spPr>
           <a:xfrm>
-            <a:off x="475488" y="2971800"/>
-            <a:ext cx="1188720" cy="411480"/>
+            <a:off x="411480" y="2971800"/>
+            <a:ext cx="1051560" cy="457200"/>
           </a:xfrm>
           <a:prstGeom prst="rect">
             <a:avLst/>
@@ -13756,7 +15202,7 @@
               <a:buNone/>
             </a:pPr>
             <a:r>
-              <a:rPr lang="en-US" sz="1200" dirty="0">
+              <a:rPr lang="en-US" sz="1100" dirty="0">
                 <a:solidFill>
                   <a:srgbClr val="8AABB8"/>
                 </a:solidFill>
@@ -13766,14 +15212,14 @@
               </a:rPr>
               <a:t>1 encoder</a:t>
             </a:r>
-            <a:endParaRPr lang="en-US" sz="1200" dirty="0"/>
+            <a:endParaRPr lang="en-US" sz="1100" dirty="0"/>
           </a:p>
           <a:p>
             <a:pPr indent="0" marL="0">
               <a:buNone/>
             </a:pPr>
             <a:r>
-              <a:rPr lang="en-US" sz="1200" dirty="0">
+              <a:rPr lang="en-US" sz="1100" dirty="0">
                 <a:solidFill>
                   <a:srgbClr val="8AABB8"/>
                 </a:solidFill>
@@ -13783,7 +15229,7 @@
               </a:rPr>
               <a:t>1 stream</a:t>
             </a:r>
-            <a:endParaRPr lang="en-US" sz="1200" dirty="0"/>
+            <a:endParaRPr lang="en-US" sz="1100" dirty="0"/>
           </a:p>
         </p:txBody>
       </p:sp>
@@ -13795,8 +15241,8 @@
         </p:nvSpPr>
         <p:spPr>
           <a:xfrm>
-            <a:off x="1783080" y="2514600"/>
-            <a:ext cx="320040" cy="411480"/>
+            <a:off x="1554480" y="2560320"/>
+            <a:ext cx="256032" cy="365760"/>
           </a:xfrm>
           <a:prstGeom prst="rect">
             <a:avLst/>
@@ -13812,7 +15258,7 @@
               <a:buNone/>
             </a:pPr>
             <a:r>
-              <a:rPr lang="en-US" sz="2200" dirty="0">
+              <a:rPr lang="en-US" sz="2000" dirty="0">
                 <a:solidFill>
                   <a:srgbClr val="005FFF"/>
                 </a:solidFill>
@@ -13822,7 +15268,7 @@
               </a:rPr>
               <a:t>→</a:t>
             </a:r>
-            <a:endParaRPr lang="en-US" sz="2200" dirty="0"/>
+            <a:endParaRPr lang="en-US" sz="2000" dirty="0"/>
           </a:p>
         </p:txBody>
       </p:sp>
@@ -13834,8 +15280,8 @@
         </p:nvSpPr>
         <p:spPr>
           <a:xfrm>
-            <a:off x="2148840" y="1938528"/>
-            <a:ext cx="2468880" cy="201168"/>
+            <a:off x="1810512" y="1901952"/>
+            <a:ext cx="3246120" cy="182880"/>
           </a:xfrm>
           <a:prstGeom prst="rect">
             <a:avLst/>
@@ -13851,7 +15297,7 @@
               <a:buNone/>
             </a:pPr>
             <a:r>
-              <a:rPr lang="en-US" sz="1100" spc="120" kern="0" dirty="0">
+              <a:rPr lang="en-US" sz="1000" spc="40" kern="0" dirty="0">
                 <a:solidFill>
                   <a:srgbClr val="005FFF"/>
                 </a:solidFill>
@@ -13859,7 +15305,280 @@
                 <a:ea typeface="Geist" pitchFamily="34" charset="-122"/>
                 <a:cs typeface="Geist" pitchFamily="34" charset="-120"/>
               </a:rPr>
-              <a:t>L3T3</a:t>
+              <a:t>L3T3  ·  3 spatial × 3 temporal</a:t>
+            </a:r>
+            <a:endParaRPr lang="en-US" sz="1000" dirty="0"/>
+          </a:p>
+        </p:txBody>
+      </p:sp>
+      <p:sp>
+        <p:nvSpPr>
+          <p:cNvPr id="13" name="Text 10"/>
+          <p:cNvSpPr/>
+          <p:nvPr/>
+        </p:nvSpPr>
+        <p:spPr>
+          <a:xfrm>
+            <a:off x="2487168" y="2084832"/>
+            <a:ext cx="731520" cy="146304"/>
+          </a:xfrm>
+          <a:prstGeom prst="rect">
+            <a:avLst/>
+          </a:prstGeom>
+          <a:noFill/>
+          <a:ln/>
+        </p:spPr>
+        <p:txBody>
+          <a:bodyPr wrap="square" lIns="0" tIns="0" rIns="0" bIns="0" rtlCol="0" anchor="ctr"/>
+          <a:lstStyle/>
+          <a:p>
+            <a:pPr algn="ctr" indent="0" marL="0">
+              <a:buNone/>
+            </a:pPr>
+            <a:r>
+              <a:rPr lang="en-US" sz="1000" dirty="0">
+                <a:solidFill>
+                  <a:srgbClr val="A8C7FA"/>
+                </a:solidFill>
+                <a:latin typeface="Geist" pitchFamily="34" charset="0"/>
+                <a:ea typeface="Geist" pitchFamily="34" charset="-122"/>
+                <a:cs typeface="Geist" pitchFamily="34" charset="-120"/>
+              </a:rPr>
+              <a:t>T0</a:t>
+            </a:r>
+            <a:endParaRPr lang="en-US" sz="1000" dirty="0"/>
+          </a:p>
+        </p:txBody>
+      </p:sp>
+      <p:sp>
+        <p:nvSpPr>
+          <p:cNvPr id="14" name="Text 11"/>
+          <p:cNvSpPr/>
+          <p:nvPr/>
+        </p:nvSpPr>
+        <p:spPr>
+          <a:xfrm>
+            <a:off x="2487168" y="2212848"/>
+            <a:ext cx="731520" cy="128016"/>
+          </a:xfrm>
+          <a:prstGeom prst="rect">
+            <a:avLst/>
+          </a:prstGeom>
+          <a:noFill/>
+          <a:ln/>
+        </p:spPr>
+        <p:txBody>
+          <a:bodyPr wrap="square" lIns="0" tIns="0" rIns="0" bIns="0" rtlCol="0" anchor="ctr"/>
+          <a:lstStyle/>
+          <a:p>
+            <a:pPr algn="ctr" indent="0" marL="0">
+              <a:buNone/>
+            </a:pPr>
+            <a:r>
+              <a:rPr lang="en-US" sz="900" dirty="0">
+                <a:solidFill>
+                  <a:srgbClr val="6FA0E8"/>
+                </a:solidFill>
+                <a:latin typeface="Geist" pitchFamily="34" charset="0"/>
+                <a:ea typeface="Geist" pitchFamily="34" charset="-122"/>
+                <a:cs typeface="Geist" pitchFamily="34" charset="-120"/>
+              </a:rPr>
+              <a:t>7.5</a:t>
+            </a:r>
+            <a:endParaRPr lang="en-US" sz="900" dirty="0"/>
+          </a:p>
+        </p:txBody>
+      </p:sp>
+      <p:sp>
+        <p:nvSpPr>
+          <p:cNvPr id="15" name="Text 12"/>
+          <p:cNvSpPr/>
+          <p:nvPr/>
+        </p:nvSpPr>
+        <p:spPr>
+          <a:xfrm>
+            <a:off x="3291840" y="2084832"/>
+            <a:ext cx="731520" cy="146304"/>
+          </a:xfrm>
+          <a:prstGeom prst="rect">
+            <a:avLst/>
+          </a:prstGeom>
+          <a:noFill/>
+          <a:ln/>
+        </p:spPr>
+        <p:txBody>
+          <a:bodyPr wrap="square" lIns="0" tIns="0" rIns="0" bIns="0" rtlCol="0" anchor="ctr"/>
+          <a:lstStyle/>
+          <a:p>
+            <a:pPr algn="ctr" indent="0" marL="0">
+              <a:buNone/>
+            </a:pPr>
+            <a:r>
+              <a:rPr lang="en-US" sz="1000" dirty="0">
+                <a:solidFill>
+                  <a:srgbClr val="A8C7FA"/>
+                </a:solidFill>
+                <a:latin typeface="Geist" pitchFamily="34" charset="0"/>
+                <a:ea typeface="Geist" pitchFamily="34" charset="-122"/>
+                <a:cs typeface="Geist" pitchFamily="34" charset="-120"/>
+              </a:rPr>
+              <a:t>T1</a:t>
+            </a:r>
+            <a:endParaRPr lang="en-US" sz="1000" dirty="0"/>
+          </a:p>
+        </p:txBody>
+      </p:sp>
+      <p:sp>
+        <p:nvSpPr>
+          <p:cNvPr id="16" name="Text 13"/>
+          <p:cNvSpPr/>
+          <p:nvPr/>
+        </p:nvSpPr>
+        <p:spPr>
+          <a:xfrm>
+            <a:off x="3291840" y="2212848"/>
+            <a:ext cx="731520" cy="128016"/>
+          </a:xfrm>
+          <a:prstGeom prst="rect">
+            <a:avLst/>
+          </a:prstGeom>
+          <a:noFill/>
+          <a:ln/>
+        </p:spPr>
+        <p:txBody>
+          <a:bodyPr wrap="square" lIns="0" tIns="0" rIns="0" bIns="0" rtlCol="0" anchor="ctr"/>
+          <a:lstStyle/>
+          <a:p>
+            <a:pPr algn="ctr" indent="0" marL="0">
+              <a:buNone/>
+            </a:pPr>
+            <a:r>
+              <a:rPr lang="en-US" sz="900" dirty="0">
+                <a:solidFill>
+                  <a:srgbClr val="6FA0E8"/>
+                </a:solidFill>
+                <a:latin typeface="Geist" pitchFamily="34" charset="0"/>
+                <a:ea typeface="Geist" pitchFamily="34" charset="-122"/>
+                <a:cs typeface="Geist" pitchFamily="34" charset="-120"/>
+              </a:rPr>
+              <a:t>15</a:t>
+            </a:r>
+            <a:endParaRPr lang="en-US" sz="900" dirty="0"/>
+          </a:p>
+        </p:txBody>
+      </p:sp>
+      <p:sp>
+        <p:nvSpPr>
+          <p:cNvPr id="17" name="Text 14"/>
+          <p:cNvSpPr/>
+          <p:nvPr/>
+        </p:nvSpPr>
+        <p:spPr>
+          <a:xfrm>
+            <a:off x="4096512" y="2084832"/>
+            <a:ext cx="731520" cy="146304"/>
+          </a:xfrm>
+          <a:prstGeom prst="rect">
+            <a:avLst/>
+          </a:prstGeom>
+          <a:noFill/>
+          <a:ln/>
+        </p:spPr>
+        <p:txBody>
+          <a:bodyPr wrap="square" lIns="0" tIns="0" rIns="0" bIns="0" rtlCol="0" anchor="ctr"/>
+          <a:lstStyle/>
+          <a:p>
+            <a:pPr algn="ctr" indent="0" marL="0">
+              <a:buNone/>
+            </a:pPr>
+            <a:r>
+              <a:rPr lang="en-US" sz="1000" dirty="0">
+                <a:solidFill>
+                  <a:srgbClr val="A8C7FA"/>
+                </a:solidFill>
+                <a:latin typeface="Geist" pitchFamily="34" charset="0"/>
+                <a:ea typeface="Geist" pitchFamily="34" charset="-122"/>
+                <a:cs typeface="Geist" pitchFamily="34" charset="-120"/>
+              </a:rPr>
+              <a:t>T2</a:t>
+            </a:r>
+            <a:endParaRPr lang="en-US" sz="1000" dirty="0"/>
+          </a:p>
+        </p:txBody>
+      </p:sp>
+      <p:sp>
+        <p:nvSpPr>
+          <p:cNvPr id="18" name="Text 15"/>
+          <p:cNvSpPr/>
+          <p:nvPr/>
+        </p:nvSpPr>
+        <p:spPr>
+          <a:xfrm>
+            <a:off x="4096512" y="2212848"/>
+            <a:ext cx="731520" cy="128016"/>
+          </a:xfrm>
+          <a:prstGeom prst="rect">
+            <a:avLst/>
+          </a:prstGeom>
+          <a:noFill/>
+          <a:ln/>
+        </p:spPr>
+        <p:txBody>
+          <a:bodyPr wrap="square" lIns="0" tIns="0" rIns="0" bIns="0" rtlCol="0" anchor="ctr"/>
+          <a:lstStyle/>
+          <a:p>
+            <a:pPr algn="ctr" indent="0" marL="0">
+              <a:buNone/>
+            </a:pPr>
+            <a:r>
+              <a:rPr lang="en-US" sz="900" dirty="0">
+                <a:solidFill>
+                  <a:srgbClr val="6FA0E8"/>
+                </a:solidFill>
+                <a:latin typeface="Geist" pitchFamily="34" charset="0"/>
+                <a:ea typeface="Geist" pitchFamily="34" charset="-122"/>
+                <a:cs typeface="Geist" pitchFamily="34" charset="-120"/>
+              </a:rPr>
+              <a:t>30</a:t>
+            </a:r>
+            <a:endParaRPr lang="en-US" sz="900" dirty="0"/>
+          </a:p>
+        </p:txBody>
+      </p:sp>
+      <p:sp>
+        <p:nvSpPr>
+          <p:cNvPr id="19" name="Text 16"/>
+          <p:cNvSpPr/>
+          <p:nvPr/>
+        </p:nvSpPr>
+        <p:spPr>
+          <a:xfrm>
+            <a:off x="1810512" y="2377440"/>
+            <a:ext cx="347472" cy="347472"/>
+          </a:xfrm>
+          <a:prstGeom prst="rect">
+            <a:avLst/>
+          </a:prstGeom>
+          <a:noFill/>
+          <a:ln/>
+        </p:spPr>
+        <p:txBody>
+          <a:bodyPr wrap="square" lIns="0" tIns="0" rIns="0" bIns="0" rtlCol="0" anchor="ctr"/>
+          <a:lstStyle/>
+          <a:p>
+            <a:pPr algn="r" indent="0" marL="0">
+              <a:buNone/>
+            </a:pPr>
+            <a:r>
+              <a:rPr lang="en-US" sz="1100" dirty="0">
+                <a:solidFill>
+                  <a:srgbClr val="FFFFFF"/>
+                </a:solidFill>
+                <a:latin typeface="Geist" pitchFamily="34" charset="0"/>
+                <a:ea typeface="Geist" pitchFamily="34" charset="-122"/>
+                <a:cs typeface="Geist" pitchFamily="34" charset="-120"/>
+              </a:rPr>
+              <a:t>S2</a:t>
             </a:r>
             <a:endParaRPr lang="en-US" sz="1100" dirty="0"/>
           </a:p>
@@ -13867,14 +15586,14 @@
       </p:sp>
       <p:sp>
         <p:nvSpPr>
-          <p:cNvPr id="13" name="Shape 10"/>
-          <p:cNvSpPr/>
-          <p:nvPr/>
-        </p:nvSpPr>
-        <p:spPr>
-          <a:xfrm>
-            <a:off x="2148840" y="2176272"/>
-            <a:ext cx="2468880" cy="438912"/>
+          <p:cNvPr id="20" name="Shape 17"/>
+          <p:cNvSpPr/>
+          <p:nvPr/>
+        </p:nvSpPr>
+        <p:spPr>
+          <a:xfrm>
+            <a:off x="2487168" y="2377440"/>
+            <a:ext cx="731520" cy="347472"/>
           </a:xfrm>
           <a:prstGeom prst="rect">
             <a:avLst/>
@@ -13892,14 +15611,14 @@
       </p:sp>
       <p:sp>
         <p:nvSpPr>
-          <p:cNvPr id="14" name="Text 11"/>
-          <p:cNvSpPr/>
-          <p:nvPr/>
-        </p:nvSpPr>
-        <p:spPr>
-          <a:xfrm>
-            <a:off x="2148840" y="2176272"/>
-            <a:ext cx="2468880" cy="438912"/>
+          <p:cNvPr id="21" name="Text 18"/>
+          <p:cNvSpPr/>
+          <p:nvPr/>
+        </p:nvSpPr>
+        <p:spPr>
+          <a:xfrm>
+            <a:off x="2487168" y="2377440"/>
+            <a:ext cx="731520" cy="347472"/>
           </a:xfrm>
           <a:prstGeom prst="rect">
             <a:avLst/>
@@ -13915,7 +15634,7 @@
               <a:buNone/>
             </a:pPr>
             <a:r>
-              <a:rPr lang="en-US" sz="1100" dirty="0">
+              <a:rPr lang="en-US" sz="1000" dirty="0">
                 <a:solidFill>
                   <a:srgbClr val="FFFFFF"/>
                 </a:solidFill>
@@ -13923,22 +15642,22 @@
                 <a:ea typeface="Geist" pitchFamily="34" charset="-122"/>
                 <a:cs typeface="Geist" pitchFamily="34" charset="-120"/>
               </a:rPr>
-              <a:t>S2  ·  720p  ·  30 fps</a:t>
-            </a:r>
-            <a:endParaRPr lang="en-US" sz="1100" dirty="0"/>
-          </a:p>
-        </p:txBody>
-      </p:sp>
-      <p:sp>
-        <p:nvSpPr>
-          <p:cNvPr id="15" name="Shape 12"/>
-          <p:cNvSpPr/>
-          <p:nvPr/>
-        </p:nvSpPr>
-        <p:spPr>
-          <a:xfrm>
-            <a:off x="2400300" y="2670048"/>
-            <a:ext cx="1965960" cy="438912"/>
+              <a:t>720p</a:t>
+            </a:r>
+            <a:endParaRPr lang="en-US" sz="1000" dirty="0"/>
+          </a:p>
+        </p:txBody>
+      </p:sp>
+      <p:sp>
+        <p:nvSpPr>
+          <p:cNvPr id="22" name="Shape 19"/>
+          <p:cNvSpPr/>
+          <p:nvPr/>
+        </p:nvSpPr>
+        <p:spPr>
+          <a:xfrm>
+            <a:off x="3291840" y="2377440"/>
+            <a:ext cx="731520" cy="347472"/>
           </a:xfrm>
           <a:prstGeom prst="rect">
             <a:avLst/>
@@ -13956,14 +15675,14 @@
       </p:sp>
       <p:sp>
         <p:nvSpPr>
-          <p:cNvPr id="16" name="Text 13"/>
-          <p:cNvSpPr/>
-          <p:nvPr/>
-        </p:nvSpPr>
-        <p:spPr>
-          <a:xfrm>
-            <a:off x="2400300" y="2670048"/>
-            <a:ext cx="1965960" cy="438912"/>
+          <p:cNvPr id="23" name="Text 20"/>
+          <p:cNvSpPr/>
+          <p:nvPr/>
+        </p:nvSpPr>
+        <p:spPr>
+          <a:xfrm>
+            <a:off x="3291840" y="2377440"/>
+            <a:ext cx="731520" cy="347472"/>
           </a:xfrm>
           <a:prstGeom prst="rect">
             <a:avLst/>
@@ -13979,7 +15698,7 @@
               <a:buNone/>
             </a:pPr>
             <a:r>
-              <a:rPr lang="en-US" sz="1100" dirty="0">
+              <a:rPr lang="en-US" sz="1000" dirty="0">
                 <a:solidFill>
                   <a:srgbClr val="FFFFFF"/>
                 </a:solidFill>
@@ -13987,22 +15706,22 @@
                 <a:ea typeface="Geist" pitchFamily="34" charset="-122"/>
                 <a:cs typeface="Geist" pitchFamily="34" charset="-120"/>
               </a:rPr>
-              <a:t>S1  ·  360p  ·  15 fps</a:t>
-            </a:r>
-            <a:endParaRPr lang="en-US" sz="1100" dirty="0"/>
-          </a:p>
-        </p:txBody>
-      </p:sp>
-      <p:sp>
-        <p:nvSpPr>
-          <p:cNvPr id="17" name="Shape 14"/>
-          <p:cNvSpPr/>
-          <p:nvPr/>
-        </p:nvSpPr>
-        <p:spPr>
-          <a:xfrm>
-            <a:off x="2651760" y="3163824"/>
-            <a:ext cx="1463040" cy="438912"/>
+              <a:t>720p</a:t>
+            </a:r>
+            <a:endParaRPr lang="en-US" sz="1000" dirty="0"/>
+          </a:p>
+        </p:txBody>
+      </p:sp>
+      <p:sp>
+        <p:nvSpPr>
+          <p:cNvPr id="24" name="Shape 21"/>
+          <p:cNvSpPr/>
+          <p:nvPr/>
+        </p:nvSpPr>
+        <p:spPr>
+          <a:xfrm>
+            <a:off x="4096512" y="2377440"/>
+            <a:ext cx="731520" cy="347472"/>
           </a:xfrm>
           <a:prstGeom prst="rect">
             <a:avLst/>
@@ -14020,14 +15739,14 @@
       </p:sp>
       <p:sp>
         <p:nvSpPr>
-          <p:cNvPr id="18" name="Text 15"/>
-          <p:cNvSpPr/>
-          <p:nvPr/>
-        </p:nvSpPr>
-        <p:spPr>
-          <a:xfrm>
-            <a:off x="2651760" y="3163824"/>
-            <a:ext cx="1463040" cy="438912"/>
+          <p:cNvPr id="25" name="Text 22"/>
+          <p:cNvSpPr/>
+          <p:nvPr/>
+        </p:nvSpPr>
+        <p:spPr>
+          <a:xfrm>
+            <a:off x="4096512" y="2377440"/>
+            <a:ext cx="731520" cy="347472"/>
           </a:xfrm>
           <a:prstGeom prst="rect">
             <a:avLst/>
@@ -14043,6 +15762,45 @@
               <a:buNone/>
             </a:pPr>
             <a:r>
+              <a:rPr lang="en-US" sz="1000" dirty="0">
+                <a:solidFill>
+                  <a:srgbClr val="FFFFFF"/>
+                </a:solidFill>
+                <a:latin typeface="Geist" pitchFamily="34" charset="0"/>
+                <a:ea typeface="Geist" pitchFamily="34" charset="-122"/>
+                <a:cs typeface="Geist" pitchFamily="34" charset="-120"/>
+              </a:rPr>
+              <a:t>720p</a:t>
+            </a:r>
+            <a:endParaRPr lang="en-US" sz="1000" dirty="0"/>
+          </a:p>
+        </p:txBody>
+      </p:sp>
+      <p:sp>
+        <p:nvSpPr>
+          <p:cNvPr id="26" name="Text 23"/>
+          <p:cNvSpPr/>
+          <p:nvPr/>
+        </p:nvSpPr>
+        <p:spPr>
+          <a:xfrm>
+            <a:off x="1810512" y="2761488"/>
+            <a:ext cx="347472" cy="347472"/>
+          </a:xfrm>
+          <a:prstGeom prst="rect">
+            <a:avLst/>
+          </a:prstGeom>
+          <a:noFill/>
+          <a:ln/>
+        </p:spPr>
+        <p:txBody>
+          <a:bodyPr wrap="square" lIns="0" tIns="0" rIns="0" bIns="0" rtlCol="0" anchor="ctr"/>
+          <a:lstStyle/>
+          <a:p>
+            <a:pPr algn="r" indent="0" marL="0">
+              <a:buNone/>
+            </a:pPr>
+            <a:r>
               <a:rPr lang="en-US" sz="1100" dirty="0">
                 <a:solidFill>
                   <a:srgbClr val="FFFFFF"/>
@@ -14051,7 +15809,7 @@
                 <a:ea typeface="Geist" pitchFamily="34" charset="-122"/>
                 <a:cs typeface="Geist" pitchFamily="34" charset="-120"/>
               </a:rPr>
-              <a:t>S0  ·  180p  ·  7.5 fps</a:t>
+              <a:t>S1</a:t>
             </a:r>
             <a:endParaRPr lang="en-US" sz="1100" dirty="0"/>
           </a:p>
@@ -14059,53 +15817,14 @@
       </p:sp>
       <p:sp>
         <p:nvSpPr>
-          <p:cNvPr id="19" name="Text 16"/>
-          <p:cNvSpPr/>
-          <p:nvPr/>
-        </p:nvSpPr>
-        <p:spPr>
-          <a:xfrm>
-            <a:off x="4663440" y="2514600"/>
-            <a:ext cx="320040" cy="411480"/>
-          </a:xfrm>
-          <a:prstGeom prst="rect">
-            <a:avLst/>
-          </a:prstGeom>
-          <a:noFill/>
-          <a:ln/>
-        </p:spPr>
-        <p:txBody>
-          <a:bodyPr wrap="square" lIns="0" tIns="0" rIns="0" bIns="0" rtlCol="0" anchor="ctr"/>
-          <a:lstStyle/>
-          <a:p>
-            <a:pPr algn="ctr" indent="0" marL="0">
-              <a:buNone/>
-            </a:pPr>
-            <a:r>
-              <a:rPr lang="en-US" sz="2200" dirty="0">
-                <a:solidFill>
-                  <a:srgbClr val="005FFF"/>
-                </a:solidFill>
-                <a:latin typeface="Geist" pitchFamily="34" charset="0"/>
-                <a:ea typeface="Geist" pitchFamily="34" charset="-122"/>
-                <a:cs typeface="Geist" pitchFamily="34" charset="-120"/>
-              </a:rPr>
-              <a:t>→</a:t>
-            </a:r>
-            <a:endParaRPr lang="en-US" sz="2200" dirty="0"/>
-          </a:p>
-        </p:txBody>
-      </p:sp>
-      <p:sp>
-        <p:nvSpPr>
-          <p:cNvPr id="20" name="Shape 17"/>
-          <p:cNvSpPr/>
-          <p:nvPr/>
-        </p:nvSpPr>
-        <p:spPr>
-          <a:xfrm>
-            <a:off x="5029200" y="1965960"/>
-            <a:ext cx="1554480" cy="1554480"/>
+          <p:cNvPr id="27" name="Shape 24"/>
+          <p:cNvSpPr/>
+          <p:nvPr/>
+        </p:nvSpPr>
+        <p:spPr>
+          <a:xfrm>
+            <a:off x="2487168" y="2761488"/>
+            <a:ext cx="731520" cy="347472"/>
           </a:xfrm>
           <a:prstGeom prst="rect">
             <a:avLst/>
@@ -14123,14 +15842,476 @@
       </p:sp>
       <p:sp>
         <p:nvSpPr>
-          <p:cNvPr id="21" name="Text 18"/>
-          <p:cNvSpPr/>
-          <p:nvPr/>
-        </p:nvSpPr>
-        <p:spPr>
-          <a:xfrm>
-            <a:off x="5138928" y="2057400"/>
-            <a:ext cx="1325880" cy="201168"/>
+          <p:cNvPr id="28" name="Text 25"/>
+          <p:cNvSpPr/>
+          <p:nvPr/>
+        </p:nvSpPr>
+        <p:spPr>
+          <a:xfrm>
+            <a:off x="2487168" y="2761488"/>
+            <a:ext cx="731520" cy="347472"/>
+          </a:xfrm>
+          <a:prstGeom prst="rect">
+            <a:avLst/>
+          </a:prstGeom>
+          <a:noFill/>
+          <a:ln/>
+        </p:spPr>
+        <p:txBody>
+          <a:bodyPr wrap="square" lIns="0" tIns="0" rIns="0" bIns="0" rtlCol="0" anchor="ctr"/>
+          <a:lstStyle/>
+          <a:p>
+            <a:pPr algn="ctr" indent="0" marL="0">
+              <a:buNone/>
+            </a:pPr>
+            <a:r>
+              <a:rPr lang="en-US" sz="1000" dirty="0">
+                <a:solidFill>
+                  <a:srgbClr val="FFFFFF"/>
+                </a:solidFill>
+                <a:latin typeface="Geist" pitchFamily="34" charset="0"/>
+                <a:ea typeface="Geist" pitchFamily="34" charset="-122"/>
+                <a:cs typeface="Geist" pitchFamily="34" charset="-120"/>
+              </a:rPr>
+              <a:t>360p</a:t>
+            </a:r>
+            <a:endParaRPr lang="en-US" sz="1000" dirty="0"/>
+          </a:p>
+        </p:txBody>
+      </p:sp>
+      <p:sp>
+        <p:nvSpPr>
+          <p:cNvPr id="29" name="Shape 26"/>
+          <p:cNvSpPr/>
+          <p:nvPr/>
+        </p:nvSpPr>
+        <p:spPr>
+          <a:xfrm>
+            <a:off x="3291840" y="2761488"/>
+            <a:ext cx="731520" cy="347472"/>
+          </a:xfrm>
+          <a:prstGeom prst="rect">
+            <a:avLst/>
+          </a:prstGeom>
+          <a:solidFill>
+            <a:srgbClr val="0B2347"/>
+          </a:solidFill>
+          <a:ln w="12700">
+            <a:solidFill>
+              <a:srgbClr val="005FFF"/>
+            </a:solidFill>
+            <a:prstDash val="solid"/>
+          </a:ln>
+        </p:spPr>
+      </p:sp>
+      <p:sp>
+        <p:nvSpPr>
+          <p:cNvPr id="30" name="Text 27"/>
+          <p:cNvSpPr/>
+          <p:nvPr/>
+        </p:nvSpPr>
+        <p:spPr>
+          <a:xfrm>
+            <a:off x="3291840" y="2761488"/>
+            <a:ext cx="731520" cy="347472"/>
+          </a:xfrm>
+          <a:prstGeom prst="rect">
+            <a:avLst/>
+          </a:prstGeom>
+          <a:noFill/>
+          <a:ln/>
+        </p:spPr>
+        <p:txBody>
+          <a:bodyPr wrap="square" lIns="0" tIns="0" rIns="0" bIns="0" rtlCol="0" anchor="ctr"/>
+          <a:lstStyle/>
+          <a:p>
+            <a:pPr algn="ctr" indent="0" marL="0">
+              <a:buNone/>
+            </a:pPr>
+            <a:r>
+              <a:rPr lang="en-US" sz="1000" dirty="0">
+                <a:solidFill>
+                  <a:srgbClr val="FFFFFF"/>
+                </a:solidFill>
+                <a:latin typeface="Geist" pitchFamily="34" charset="0"/>
+                <a:ea typeface="Geist" pitchFamily="34" charset="-122"/>
+                <a:cs typeface="Geist" pitchFamily="34" charset="-120"/>
+              </a:rPr>
+              <a:t>360p</a:t>
+            </a:r>
+            <a:endParaRPr lang="en-US" sz="1000" dirty="0"/>
+          </a:p>
+        </p:txBody>
+      </p:sp>
+      <p:sp>
+        <p:nvSpPr>
+          <p:cNvPr id="31" name="Shape 28"/>
+          <p:cNvSpPr/>
+          <p:nvPr/>
+        </p:nvSpPr>
+        <p:spPr>
+          <a:xfrm>
+            <a:off x="4096512" y="2761488"/>
+            <a:ext cx="731520" cy="347472"/>
+          </a:xfrm>
+          <a:prstGeom prst="rect">
+            <a:avLst/>
+          </a:prstGeom>
+          <a:solidFill>
+            <a:srgbClr val="0B2347"/>
+          </a:solidFill>
+          <a:ln w="12700">
+            <a:solidFill>
+              <a:srgbClr val="005FFF"/>
+            </a:solidFill>
+            <a:prstDash val="solid"/>
+          </a:ln>
+        </p:spPr>
+      </p:sp>
+      <p:sp>
+        <p:nvSpPr>
+          <p:cNvPr id="32" name="Text 29"/>
+          <p:cNvSpPr/>
+          <p:nvPr/>
+        </p:nvSpPr>
+        <p:spPr>
+          <a:xfrm>
+            <a:off x="4096512" y="2761488"/>
+            <a:ext cx="731520" cy="347472"/>
+          </a:xfrm>
+          <a:prstGeom prst="rect">
+            <a:avLst/>
+          </a:prstGeom>
+          <a:noFill/>
+          <a:ln/>
+        </p:spPr>
+        <p:txBody>
+          <a:bodyPr wrap="square" lIns="0" tIns="0" rIns="0" bIns="0" rtlCol="0" anchor="ctr"/>
+          <a:lstStyle/>
+          <a:p>
+            <a:pPr algn="ctr" indent="0" marL="0">
+              <a:buNone/>
+            </a:pPr>
+            <a:r>
+              <a:rPr lang="en-US" sz="1000" dirty="0">
+                <a:solidFill>
+                  <a:srgbClr val="FFFFFF"/>
+                </a:solidFill>
+                <a:latin typeface="Geist" pitchFamily="34" charset="0"/>
+                <a:ea typeface="Geist" pitchFamily="34" charset="-122"/>
+                <a:cs typeface="Geist" pitchFamily="34" charset="-120"/>
+              </a:rPr>
+              <a:t>360p</a:t>
+            </a:r>
+            <a:endParaRPr lang="en-US" sz="1000" dirty="0"/>
+          </a:p>
+        </p:txBody>
+      </p:sp>
+      <p:sp>
+        <p:nvSpPr>
+          <p:cNvPr id="33" name="Text 30"/>
+          <p:cNvSpPr/>
+          <p:nvPr/>
+        </p:nvSpPr>
+        <p:spPr>
+          <a:xfrm>
+            <a:off x="1810512" y="3145536"/>
+            <a:ext cx="347472" cy="347472"/>
+          </a:xfrm>
+          <a:prstGeom prst="rect">
+            <a:avLst/>
+          </a:prstGeom>
+          <a:noFill/>
+          <a:ln/>
+        </p:spPr>
+        <p:txBody>
+          <a:bodyPr wrap="square" lIns="0" tIns="0" rIns="0" bIns="0" rtlCol="0" anchor="ctr"/>
+          <a:lstStyle/>
+          <a:p>
+            <a:pPr algn="r" indent="0" marL="0">
+              <a:buNone/>
+            </a:pPr>
+            <a:r>
+              <a:rPr lang="en-US" sz="1100" dirty="0">
+                <a:solidFill>
+                  <a:srgbClr val="FFFFFF"/>
+                </a:solidFill>
+                <a:latin typeface="Geist" pitchFamily="34" charset="0"/>
+                <a:ea typeface="Geist" pitchFamily="34" charset="-122"/>
+                <a:cs typeface="Geist" pitchFamily="34" charset="-120"/>
+              </a:rPr>
+              <a:t>S0</a:t>
+            </a:r>
+            <a:endParaRPr lang="en-US" sz="1100" dirty="0"/>
+          </a:p>
+        </p:txBody>
+      </p:sp>
+      <p:sp>
+        <p:nvSpPr>
+          <p:cNvPr id="34" name="Shape 31"/>
+          <p:cNvSpPr/>
+          <p:nvPr/>
+        </p:nvSpPr>
+        <p:spPr>
+          <a:xfrm>
+            <a:off x="2487168" y="3145536"/>
+            <a:ext cx="731520" cy="347472"/>
+          </a:xfrm>
+          <a:prstGeom prst="rect">
+            <a:avLst/>
+          </a:prstGeom>
+          <a:solidFill>
+            <a:srgbClr val="0B2347"/>
+          </a:solidFill>
+          <a:ln w="12700">
+            <a:solidFill>
+              <a:srgbClr val="005FFF"/>
+            </a:solidFill>
+            <a:prstDash val="solid"/>
+          </a:ln>
+        </p:spPr>
+      </p:sp>
+      <p:sp>
+        <p:nvSpPr>
+          <p:cNvPr id="35" name="Text 32"/>
+          <p:cNvSpPr/>
+          <p:nvPr/>
+        </p:nvSpPr>
+        <p:spPr>
+          <a:xfrm>
+            <a:off x="2487168" y="3145536"/>
+            <a:ext cx="731520" cy="347472"/>
+          </a:xfrm>
+          <a:prstGeom prst="rect">
+            <a:avLst/>
+          </a:prstGeom>
+          <a:noFill/>
+          <a:ln/>
+        </p:spPr>
+        <p:txBody>
+          <a:bodyPr wrap="square" lIns="0" tIns="0" rIns="0" bIns="0" rtlCol="0" anchor="ctr"/>
+          <a:lstStyle/>
+          <a:p>
+            <a:pPr algn="ctr" indent="0" marL="0">
+              <a:buNone/>
+            </a:pPr>
+            <a:r>
+              <a:rPr lang="en-US" sz="1000" dirty="0">
+                <a:solidFill>
+                  <a:srgbClr val="FFFFFF"/>
+                </a:solidFill>
+                <a:latin typeface="Geist" pitchFamily="34" charset="0"/>
+                <a:ea typeface="Geist" pitchFamily="34" charset="-122"/>
+                <a:cs typeface="Geist" pitchFamily="34" charset="-120"/>
+              </a:rPr>
+              <a:t>180p</a:t>
+            </a:r>
+            <a:endParaRPr lang="en-US" sz="1000" dirty="0"/>
+          </a:p>
+        </p:txBody>
+      </p:sp>
+      <p:sp>
+        <p:nvSpPr>
+          <p:cNvPr id="36" name="Shape 33"/>
+          <p:cNvSpPr/>
+          <p:nvPr/>
+        </p:nvSpPr>
+        <p:spPr>
+          <a:xfrm>
+            <a:off x="3291840" y="3145536"/>
+            <a:ext cx="731520" cy="347472"/>
+          </a:xfrm>
+          <a:prstGeom prst="rect">
+            <a:avLst/>
+          </a:prstGeom>
+          <a:solidFill>
+            <a:srgbClr val="0B2347"/>
+          </a:solidFill>
+          <a:ln w="12700">
+            <a:solidFill>
+              <a:srgbClr val="005FFF"/>
+            </a:solidFill>
+            <a:prstDash val="solid"/>
+          </a:ln>
+        </p:spPr>
+      </p:sp>
+      <p:sp>
+        <p:nvSpPr>
+          <p:cNvPr id="37" name="Text 34"/>
+          <p:cNvSpPr/>
+          <p:nvPr/>
+        </p:nvSpPr>
+        <p:spPr>
+          <a:xfrm>
+            <a:off x="3291840" y="3145536"/>
+            <a:ext cx="731520" cy="347472"/>
+          </a:xfrm>
+          <a:prstGeom prst="rect">
+            <a:avLst/>
+          </a:prstGeom>
+          <a:noFill/>
+          <a:ln/>
+        </p:spPr>
+        <p:txBody>
+          <a:bodyPr wrap="square" lIns="0" tIns="0" rIns="0" bIns="0" rtlCol="0" anchor="ctr"/>
+          <a:lstStyle/>
+          <a:p>
+            <a:pPr algn="ctr" indent="0" marL="0">
+              <a:buNone/>
+            </a:pPr>
+            <a:r>
+              <a:rPr lang="en-US" sz="1000" dirty="0">
+                <a:solidFill>
+                  <a:srgbClr val="FFFFFF"/>
+                </a:solidFill>
+                <a:latin typeface="Geist" pitchFamily="34" charset="0"/>
+                <a:ea typeface="Geist" pitchFamily="34" charset="-122"/>
+                <a:cs typeface="Geist" pitchFamily="34" charset="-120"/>
+              </a:rPr>
+              <a:t>180p</a:t>
+            </a:r>
+            <a:endParaRPr lang="en-US" sz="1000" dirty="0"/>
+          </a:p>
+        </p:txBody>
+      </p:sp>
+      <p:sp>
+        <p:nvSpPr>
+          <p:cNvPr id="38" name="Shape 35"/>
+          <p:cNvSpPr/>
+          <p:nvPr/>
+        </p:nvSpPr>
+        <p:spPr>
+          <a:xfrm>
+            <a:off x="4096512" y="3145536"/>
+            <a:ext cx="731520" cy="347472"/>
+          </a:xfrm>
+          <a:prstGeom prst="rect">
+            <a:avLst/>
+          </a:prstGeom>
+          <a:solidFill>
+            <a:srgbClr val="0B2347"/>
+          </a:solidFill>
+          <a:ln w="12700">
+            <a:solidFill>
+              <a:srgbClr val="005FFF"/>
+            </a:solidFill>
+            <a:prstDash val="solid"/>
+          </a:ln>
+        </p:spPr>
+      </p:sp>
+      <p:sp>
+        <p:nvSpPr>
+          <p:cNvPr id="39" name="Text 36"/>
+          <p:cNvSpPr/>
+          <p:nvPr/>
+        </p:nvSpPr>
+        <p:spPr>
+          <a:xfrm>
+            <a:off x="4096512" y="3145536"/>
+            <a:ext cx="731520" cy="347472"/>
+          </a:xfrm>
+          <a:prstGeom prst="rect">
+            <a:avLst/>
+          </a:prstGeom>
+          <a:noFill/>
+          <a:ln/>
+        </p:spPr>
+        <p:txBody>
+          <a:bodyPr wrap="square" lIns="0" tIns="0" rIns="0" bIns="0" rtlCol="0" anchor="ctr"/>
+          <a:lstStyle/>
+          <a:p>
+            <a:pPr algn="ctr" indent="0" marL="0">
+              <a:buNone/>
+            </a:pPr>
+            <a:r>
+              <a:rPr lang="en-US" sz="1000" dirty="0">
+                <a:solidFill>
+                  <a:srgbClr val="FFFFFF"/>
+                </a:solidFill>
+                <a:latin typeface="Geist" pitchFamily="34" charset="0"/>
+                <a:ea typeface="Geist" pitchFamily="34" charset="-122"/>
+                <a:cs typeface="Geist" pitchFamily="34" charset="-120"/>
+              </a:rPr>
+              <a:t>180p</a:t>
+            </a:r>
+            <a:endParaRPr lang="en-US" sz="1000" dirty="0"/>
+          </a:p>
+        </p:txBody>
+      </p:sp>
+      <p:sp>
+        <p:nvSpPr>
+          <p:cNvPr id="40" name="Text 37"/>
+          <p:cNvSpPr/>
+          <p:nvPr/>
+        </p:nvSpPr>
+        <p:spPr>
+          <a:xfrm>
+            <a:off x="4937760" y="2560320"/>
+            <a:ext cx="256032" cy="365760"/>
+          </a:xfrm>
+          <a:prstGeom prst="rect">
+            <a:avLst/>
+          </a:prstGeom>
+          <a:noFill/>
+          <a:ln/>
+        </p:spPr>
+        <p:txBody>
+          <a:bodyPr wrap="square" lIns="0" tIns="0" rIns="0" bIns="0" rtlCol="0" anchor="ctr"/>
+          <a:lstStyle/>
+          <a:p>
+            <a:pPr algn="ctr" indent="0" marL="0">
+              <a:buNone/>
+            </a:pPr>
+            <a:r>
+              <a:rPr lang="en-US" sz="2000" dirty="0">
+                <a:solidFill>
+                  <a:srgbClr val="005FFF"/>
+                </a:solidFill>
+                <a:latin typeface="Geist" pitchFamily="34" charset="0"/>
+                <a:ea typeface="Geist" pitchFamily="34" charset="-122"/>
+                <a:cs typeface="Geist" pitchFamily="34" charset="-120"/>
+              </a:rPr>
+              <a:t>→</a:t>
+            </a:r>
+            <a:endParaRPr lang="en-US" sz="2000" dirty="0"/>
+          </a:p>
+        </p:txBody>
+      </p:sp>
+      <p:sp>
+        <p:nvSpPr>
+          <p:cNvPr id="41" name="Shape 38"/>
+          <p:cNvSpPr/>
+          <p:nvPr/>
+        </p:nvSpPr>
+        <p:spPr>
+          <a:xfrm>
+            <a:off x="5193792" y="1965960"/>
+            <a:ext cx="1417320" cy="1600200"/>
+          </a:xfrm>
+          <a:prstGeom prst="rect">
+            <a:avLst/>
+          </a:prstGeom>
+          <a:solidFill>
+            <a:srgbClr val="0B2347"/>
+          </a:solidFill>
+          <a:ln w="12700">
+            <a:solidFill>
+              <a:srgbClr val="005FFF"/>
+            </a:solidFill>
+            <a:prstDash val="solid"/>
+          </a:ln>
+        </p:spPr>
+      </p:sp>
+      <p:sp>
+        <p:nvSpPr>
+          <p:cNvPr id="42" name="Text 39"/>
+          <p:cNvSpPr/>
+          <p:nvPr/>
+        </p:nvSpPr>
+        <p:spPr>
+          <a:xfrm>
+            <a:off x="5303520" y="2057400"/>
+            <a:ext cx="1188720" cy="182880"/>
           </a:xfrm>
           <a:prstGeom prst="rect">
             <a:avLst/>
@@ -14162,14 +16343,14 @@
       </p:sp>
       <p:sp>
         <p:nvSpPr>
-          <p:cNvPr id="22" name="Text 19"/>
-          <p:cNvSpPr/>
-          <p:nvPr/>
-        </p:nvSpPr>
-        <p:spPr>
-          <a:xfrm>
-            <a:off x="5138928" y="2286000"/>
-            <a:ext cx="1325880" cy="640080"/>
+          <p:cNvPr id="43" name="Text 40"/>
+          <p:cNvSpPr/>
+          <p:nvPr/>
+        </p:nvSpPr>
+        <p:spPr>
+          <a:xfrm>
+            <a:off x="5303520" y="2286000"/>
+            <a:ext cx="1188720" cy="640080"/>
           </a:xfrm>
           <a:prstGeom prst="rect">
             <a:avLst/>
@@ -14185,7 +16366,7 @@
               <a:buNone/>
             </a:pPr>
             <a:r>
-              <a:rPr lang="en-US" sz="1600" dirty="0">
+              <a:rPr lang="en-US" sz="1500" dirty="0">
                 <a:solidFill>
                   <a:srgbClr val="FFFFFF"/>
                 </a:solidFill>
@@ -14195,14 +16376,14 @@
               </a:rPr>
               <a:t>SFU drops</a:t>
             </a:r>
-            <a:endParaRPr lang="en-US" sz="1600" dirty="0"/>
+            <a:endParaRPr lang="en-US" sz="1500" dirty="0"/>
           </a:p>
           <a:p>
             <a:pPr indent="0" marL="0">
               <a:buNone/>
             </a:pPr>
             <a:r>
-              <a:rPr lang="en-US" sz="1600" dirty="0">
+              <a:rPr lang="en-US" sz="1500" dirty="0">
                 <a:solidFill>
                   <a:srgbClr val="FFFFFF"/>
                 </a:solidFill>
@@ -14212,20 +16393,20 @@
               </a:rPr>
               <a:t>layers</a:t>
             </a:r>
-            <a:endParaRPr lang="en-US" sz="1600" dirty="0"/>
-          </a:p>
-        </p:txBody>
-      </p:sp>
-      <p:sp>
-        <p:nvSpPr>
-          <p:cNvPr id="23" name="Text 20"/>
-          <p:cNvSpPr/>
-          <p:nvPr/>
-        </p:nvSpPr>
-        <p:spPr>
-          <a:xfrm>
-            <a:off x="5138928" y="2971800"/>
-            <a:ext cx="1325880" cy="411480"/>
+            <a:endParaRPr lang="en-US" sz="1500" dirty="0"/>
+          </a:p>
+        </p:txBody>
+      </p:sp>
+      <p:sp>
+        <p:nvSpPr>
+          <p:cNvPr id="44" name="Text 41"/>
+          <p:cNvSpPr/>
+          <p:nvPr/>
+        </p:nvSpPr>
+        <p:spPr>
+          <a:xfrm>
+            <a:off x="5303520" y="2971800"/>
+            <a:ext cx="1188720" cy="457200"/>
           </a:xfrm>
           <a:prstGeom prst="rect">
             <a:avLst/>
@@ -14241,7 +16422,7 @@
               <a:buNone/>
             </a:pPr>
             <a:r>
-              <a:rPr lang="en-US" sz="1200" dirty="0">
+              <a:rPr lang="en-US" sz="1100" dirty="0">
                 <a:solidFill>
                   <a:srgbClr val="8AABB8"/>
                 </a:solidFill>
@@ -14251,14 +16432,14 @@
               </a:rPr>
               <a:t>No decode</a:t>
             </a:r>
-            <a:endParaRPr lang="en-US" sz="1200" dirty="0"/>
+            <a:endParaRPr lang="en-US" sz="1100" dirty="0"/>
           </a:p>
           <a:p>
             <a:pPr indent="0" marL="0">
               <a:buNone/>
             </a:pPr>
             <a:r>
-              <a:rPr lang="en-US" sz="1200" dirty="0">
+              <a:rPr lang="en-US" sz="1100" dirty="0">
                 <a:solidFill>
                   <a:srgbClr val="8AABB8"/>
                 </a:solidFill>
@@ -14268,20 +16449,20 @@
               </a:rPr>
               <a:t>No re-encode</a:t>
             </a:r>
-            <a:endParaRPr lang="en-US" sz="1200" dirty="0"/>
-          </a:p>
-        </p:txBody>
-      </p:sp>
-      <p:sp>
-        <p:nvSpPr>
-          <p:cNvPr id="24" name="Text 21"/>
-          <p:cNvSpPr/>
-          <p:nvPr/>
-        </p:nvSpPr>
-        <p:spPr>
-          <a:xfrm>
-            <a:off x="6629400" y="2514600"/>
-            <a:ext cx="320040" cy="411480"/>
+            <a:endParaRPr lang="en-US" sz="1100" dirty="0"/>
+          </a:p>
+        </p:txBody>
+      </p:sp>
+      <p:sp>
+        <p:nvSpPr>
+          <p:cNvPr id="45" name="Text 42"/>
+          <p:cNvSpPr/>
+          <p:nvPr/>
+        </p:nvSpPr>
+        <p:spPr>
+          <a:xfrm>
+            <a:off x="6611112" y="2560320"/>
+            <a:ext cx="256032" cy="365760"/>
           </a:xfrm>
           <a:prstGeom prst="rect">
             <a:avLst/>
@@ -14297,7 +16478,7 @@
               <a:buNone/>
             </a:pPr>
             <a:r>
-              <a:rPr lang="en-US" sz="2200" dirty="0">
+              <a:rPr lang="en-US" sz="2000" dirty="0">
                 <a:solidFill>
                   <a:srgbClr val="005FFF"/>
                 </a:solidFill>
@@ -14307,20 +16488,20 @@
               </a:rPr>
               <a:t>→</a:t>
             </a:r>
-            <a:endParaRPr lang="en-US" sz="2200" dirty="0"/>
-          </a:p>
-        </p:txBody>
-      </p:sp>
-      <p:sp>
-        <p:nvSpPr>
-          <p:cNvPr id="25" name="Shape 22"/>
-          <p:cNvSpPr/>
-          <p:nvPr/>
-        </p:nvSpPr>
-        <p:spPr>
-          <a:xfrm>
-            <a:off x="6995160" y="1965960"/>
-            <a:ext cx="1737360" cy="713232"/>
+            <a:endParaRPr lang="en-US" sz="2000" dirty="0"/>
+          </a:p>
+        </p:txBody>
+      </p:sp>
+      <p:sp>
+        <p:nvSpPr>
+          <p:cNvPr id="46" name="Shape 43"/>
+          <p:cNvSpPr/>
+          <p:nvPr/>
+        </p:nvSpPr>
+        <p:spPr>
+          <a:xfrm>
+            <a:off x="6876288" y="1965960"/>
+            <a:ext cx="1856232" cy="731520"/>
           </a:xfrm>
           <a:prstGeom prst="rect">
             <a:avLst/>
@@ -14338,14 +16519,14 @@
       </p:sp>
       <p:sp>
         <p:nvSpPr>
-          <p:cNvPr id="26" name="Text 23"/>
-          <p:cNvSpPr/>
-          <p:nvPr/>
-        </p:nvSpPr>
-        <p:spPr>
-          <a:xfrm>
-            <a:off x="6995160" y="1965960"/>
-            <a:ext cx="1737360" cy="713232"/>
+          <p:cNvPr id="47" name="Text 44"/>
+          <p:cNvSpPr/>
+          <p:nvPr/>
+        </p:nvSpPr>
+        <p:spPr>
+          <a:xfrm>
+            <a:off x="6876288" y="2011680"/>
+            <a:ext cx="1856232" cy="347472"/>
           </a:xfrm>
           <a:prstGeom prst="rect">
             <a:avLst/>
@@ -14369,7 +16550,7 @@
                 <a:ea typeface="Geist" pitchFamily="34" charset="-122"/>
                 <a:cs typeface="Geist" pitchFamily="34" charset="-120"/>
               </a:rPr>
-              <a:t>720p viewer</a:t>
+              <a:t>S2T2 viewer</a:t>
             </a:r>
             <a:endParaRPr lang="en-US" sz="1300" dirty="0"/>
           </a:p>
@@ -14377,14 +16558,53 @@
       </p:sp>
       <p:sp>
         <p:nvSpPr>
-          <p:cNvPr id="27" name="Shape 24"/>
-          <p:cNvSpPr/>
-          <p:nvPr/>
-        </p:nvSpPr>
-        <p:spPr>
-          <a:xfrm>
-            <a:off x="6995160" y="2807208"/>
-            <a:ext cx="1737360" cy="713232"/>
+          <p:cNvPr id="48" name="Text 45"/>
+          <p:cNvSpPr/>
+          <p:nvPr/>
+        </p:nvSpPr>
+        <p:spPr>
+          <a:xfrm>
+            <a:off x="6876288" y="2304288"/>
+            <a:ext cx="1856232" cy="292608"/>
+          </a:xfrm>
+          <a:prstGeom prst="rect">
+            <a:avLst/>
+          </a:prstGeom>
+          <a:noFill/>
+          <a:ln/>
+        </p:spPr>
+        <p:txBody>
+          <a:bodyPr wrap="square" lIns="0" tIns="0" rIns="0" bIns="0" rtlCol="0" anchor="ctr"/>
+          <a:lstStyle/>
+          <a:p>
+            <a:pPr algn="ctr" indent="0" marL="0">
+              <a:buNone/>
+            </a:pPr>
+            <a:r>
+              <a:rPr lang="en-US" sz="1100" dirty="0">
+                <a:solidFill>
+                  <a:srgbClr val="A8C7FA"/>
+                </a:solidFill>
+                <a:latin typeface="Geist" pitchFamily="34" charset="0"/>
+                <a:ea typeface="Geist" pitchFamily="34" charset="-122"/>
+                <a:cs typeface="Geist" pitchFamily="34" charset="-120"/>
+              </a:rPr>
+              <a:t>720p  ·  30 fps</a:t>
+            </a:r>
+            <a:endParaRPr lang="en-US" sz="1100" dirty="0"/>
+          </a:p>
+        </p:txBody>
+      </p:sp>
+      <p:sp>
+        <p:nvSpPr>
+          <p:cNvPr id="49" name="Shape 46"/>
+          <p:cNvSpPr/>
+          <p:nvPr/>
+        </p:nvSpPr>
+        <p:spPr>
+          <a:xfrm>
+            <a:off x="6876288" y="2834640"/>
+            <a:ext cx="1856232" cy="731520"/>
           </a:xfrm>
           <a:prstGeom prst="rect">
             <a:avLst/>
@@ -14402,14 +16622,14 @@
       </p:sp>
       <p:sp>
         <p:nvSpPr>
-          <p:cNvPr id="28" name="Text 25"/>
-          <p:cNvSpPr/>
-          <p:nvPr/>
-        </p:nvSpPr>
-        <p:spPr>
-          <a:xfrm>
-            <a:off x="6995160" y="2807208"/>
-            <a:ext cx="1737360" cy="713232"/>
+          <p:cNvPr id="50" name="Text 47"/>
+          <p:cNvSpPr/>
+          <p:nvPr/>
+        </p:nvSpPr>
+        <p:spPr>
+          <a:xfrm>
+            <a:off x="6876288" y="2880360"/>
+            <a:ext cx="1856232" cy="347472"/>
           </a:xfrm>
           <a:prstGeom prst="rect">
             <a:avLst/>
@@ -14433,7 +16653,7 @@
                 <a:ea typeface="Geist" pitchFamily="34" charset="-122"/>
                 <a:cs typeface="Geist" pitchFamily="34" charset="-120"/>
               </a:rPr>
-              <a:t>180p viewer</a:t>
+              <a:t>S0T0 viewer</a:t>
             </a:r>
             <a:endParaRPr lang="en-US" sz="1300" dirty="0"/>
           </a:p>
@@ -14441,14 +16661,53 @@
       </p:sp>
       <p:sp>
         <p:nvSpPr>
-          <p:cNvPr id="29" name="Shape 26"/>
-          <p:cNvSpPr/>
-          <p:nvPr/>
-        </p:nvSpPr>
-        <p:spPr>
-          <a:xfrm>
-            <a:off x="365760" y="3749040"/>
-            <a:ext cx="4114800" cy="960120"/>
+          <p:cNvPr id="51" name="Text 48"/>
+          <p:cNvSpPr/>
+          <p:nvPr/>
+        </p:nvSpPr>
+        <p:spPr>
+          <a:xfrm>
+            <a:off x="6876288" y="3172968"/>
+            <a:ext cx="1856232" cy="292608"/>
+          </a:xfrm>
+          <a:prstGeom prst="rect">
+            <a:avLst/>
+          </a:prstGeom>
+          <a:noFill/>
+          <a:ln/>
+        </p:spPr>
+        <p:txBody>
+          <a:bodyPr wrap="square" lIns="0" tIns="0" rIns="0" bIns="0" rtlCol="0" anchor="ctr"/>
+          <a:lstStyle/>
+          <a:p>
+            <a:pPr algn="ctr" indent="0" marL="0">
+              <a:buNone/>
+            </a:pPr>
+            <a:r>
+              <a:rPr lang="en-US" sz="1100" dirty="0">
+                <a:solidFill>
+                  <a:srgbClr val="A8C7FA"/>
+                </a:solidFill>
+                <a:latin typeface="Geist" pitchFamily="34" charset="0"/>
+                <a:ea typeface="Geist" pitchFamily="34" charset="-122"/>
+                <a:cs typeface="Geist" pitchFamily="34" charset="-120"/>
+              </a:rPr>
+              <a:t>180p  ·  7.5 fps</a:t>
+            </a:r>
+            <a:endParaRPr lang="en-US" sz="1100" dirty="0"/>
+          </a:p>
+        </p:txBody>
+      </p:sp>
+      <p:sp>
+        <p:nvSpPr>
+          <p:cNvPr id="52" name="Shape 49"/>
+          <p:cNvSpPr/>
+          <p:nvPr/>
+        </p:nvSpPr>
+        <p:spPr>
+          <a:xfrm>
+            <a:off x="320040" y="3749040"/>
+            <a:ext cx="4160520" cy="960120"/>
           </a:xfrm>
           <a:prstGeom prst="rect">
             <a:avLst/>
@@ -14466,14 +16725,14 @@
       </p:sp>
       <p:sp>
         <p:nvSpPr>
-          <p:cNvPr id="30" name="Text 27"/>
-          <p:cNvSpPr/>
-          <p:nvPr/>
-        </p:nvSpPr>
-        <p:spPr>
-          <a:xfrm>
-            <a:off x="502920" y="3840480"/>
-            <a:ext cx="3840480" cy="201168"/>
+          <p:cNvPr id="53" name="Text 50"/>
+          <p:cNvSpPr/>
+          <p:nvPr/>
+        </p:nvSpPr>
+        <p:spPr>
+          <a:xfrm>
+            <a:off x="457200" y="3840480"/>
+            <a:ext cx="3886200" cy="201168"/>
           </a:xfrm>
           <a:prstGeom prst="rect">
             <a:avLst/>
@@ -14505,14 +16764,14 @@
       </p:sp>
       <p:sp>
         <p:nvSpPr>
-          <p:cNvPr id="31" name="Text 28"/>
-          <p:cNvSpPr/>
-          <p:nvPr/>
-        </p:nvSpPr>
-        <p:spPr>
-          <a:xfrm>
-            <a:off x="502920" y="4096512"/>
-            <a:ext cx="3840480" cy="411480"/>
+          <p:cNvPr id="54" name="Text 51"/>
+          <p:cNvSpPr/>
+          <p:nvPr/>
+        </p:nvSpPr>
+        <p:spPr>
+          <a:xfrm>
+            <a:off x="457200" y="4096512"/>
+            <a:ext cx="3886200" cy="411480"/>
           </a:xfrm>
           <a:prstGeom prst="rect">
             <a:avLst/>
@@ -14536,7 +16795,7 @@
                 <a:ea typeface="Geist" pitchFamily="34" charset="-122"/>
                 <a:cs typeface="Geist" pitchFamily="34" charset="-120"/>
               </a:rPr>
-              <a:t>Resolution  ·  720p → 360p → 180p</a:t>
+              <a:t>S0 / S1 / S2  ·  180p → 360p → 720p</a:t>
             </a:r>
             <a:endParaRPr lang="en-US" sz="1400" dirty="0"/>
           </a:p>
@@ -14544,7 +16803,7 @@
       </p:sp>
       <p:sp>
         <p:nvSpPr>
-          <p:cNvPr id="32" name="Shape 29"/>
+          <p:cNvPr id="55" name="Shape 52"/>
           <p:cNvSpPr/>
           <p:nvPr/>
         </p:nvSpPr>
@@ -14569,7 +16828,7 @@
       </p:sp>
       <p:sp>
         <p:nvSpPr>
-          <p:cNvPr id="33" name="Text 30"/>
+          <p:cNvPr id="56" name="Text 53"/>
           <p:cNvSpPr/>
           <p:nvPr/>
         </p:nvSpPr>
@@ -14608,7 +16867,7 @@
       </p:sp>
       <p:sp>
         <p:nvSpPr>
-          <p:cNvPr id="34" name="Text 31"/>
+          <p:cNvPr id="57" name="Text 54"/>
           <p:cNvSpPr/>
           <p:nvPr/>
         </p:nvSpPr>
@@ -14639,7 +16898,7 @@
                 <a:ea typeface="Geist" pitchFamily="34" charset="-122"/>
                 <a:cs typeface="Geist" pitchFamily="34" charset="-120"/>
               </a:rPr>
-              <a:t>Frame rate  ·  30 → 15 → 7.5 fps</a:t>
+              <a:t>T0 / T1 / T2 on every S  ·  7.5 → 15 → 30 fps</a:t>
             </a:r>
             <a:endParaRPr lang="en-US" sz="1400" dirty="0"/>
           </a:p>
